--- a/docs/final review/KINETIQ_V1_final_review.pptx
+++ b/docs/final review/KINETIQ_V1_final_review.pptx
@@ -6890,13 +6890,7 @@
               </a:spcAft>
             </a:pPr>
             <a:r>
-              <a:rPr sz="1300" b="0" i="0">
-                <a:solidFill>
-                  <a:srgbClr val="262626"/>
-                </a:solidFill>
-                <a:latin typeface="Times New Roman"/>
-              </a:rPr>
-              <a:t>Honest status: v1 software complete · hardware designed and ordered · Wokwi simulation next week; HR/SpO2 via wearable bridge is a timeboxed stretch goal.</a:t>
+              <a:t>Honest status: Wokwi browser sim + native FreeRTOS node (keyboard-driven) ✓ · physical units next week; HR/SpO2 via wearable bridge is a timeboxed stretch goal.</a:t>
             </a:r>
           </a:p>
         </p:txBody>

--- a/docs/final review/KINETIQ_V1_final_review.pptx
+++ b/docs/final review/KINETIQ_V1_final_review.pptx
@@ -5,17 +5,19 @@
     <p:sldMasterId id="2147483648" r:id="rId1"/>
   </p:sldMasterIdLst>
   <p:notesMasterIdLst>
-    <p:notesMasterId r:id="rId24"/>
+    <p:notesMasterId r:id="rId12"/>
   </p:notesMasterIdLst>
   <p:sldIdLst>
-    <p:sldId id="256" r:id="rId7"/>
-    <p:sldId id="257" r:id="rId8"/>
-    <p:sldId id="258" r:id="rId9"/>
-    <p:sldId id="259" r:id="rId10"/>
-    <p:sldId id="260" r:id="rId11"/>
-    <p:sldId id="261" r:id="rId12"/>
-    <p:sldId id="262" r:id="rId13"/>
-    <p:sldId id="263" r:id="rId14"/>
+    <p:sldId id="276" r:id="rId2"/>
+    <p:sldId id="256" r:id="rId3"/>
+    <p:sldId id="257" r:id="rId4"/>
+    <p:sldId id="258" r:id="rId5"/>
+    <p:sldId id="259" r:id="rId6"/>
+    <p:sldId id="260" r:id="rId7"/>
+    <p:sldId id="261" r:id="rId8"/>
+    <p:sldId id="262" r:id="rId9"/>
+    <p:sldId id="263" r:id="rId10"/>
+    <p:sldId id="275" r:id="rId11"/>
   </p:sldIdLst>
   <p:sldSz cx="12192000" cy="6858000"/>
   <p:notesSz cx="6858000" cy="9144000"/>
@@ -216,7 +218,7 @@
             <a:fld id="{F6B2298D-2FFE-4517-8E10-E9394894EEAF}" type="datetimeFigureOut">
               <a:rPr lang="en-US" smtClean="0"/>
               <a:pPr/>
-              <a:t>10/6/2026</a:t>
+              <a:t>10/15/2026</a:t>
             </a:fld>
             <a:endParaRPr lang="en-US"/>
           </a:p>
@@ -484,6 +486,224 @@
 </p:notesMaster>
 </file>
 
+<file path=ppt/notesSlides/notesSlide1.xml><?xml version="1.0" encoding="utf-8"?>
+<p:notes xmlns:a="http://schemas.openxmlformats.org/drawingml/2006/main" xmlns:r="http://schemas.openxmlformats.org/officeDocument/2006/relationships" xmlns:p="http://schemas.openxmlformats.org/presentationml/2006/main">
+  <p:cSld>
+    <p:spTree>
+      <p:nvGrpSpPr>
+        <p:cNvPr id="1" name="">
+          <a:extLst>
+            <a:ext uri="{FF2B5EF4-FFF2-40B4-BE49-F238E27FC236}">
+              <a16:creationId xmlns:a16="http://schemas.microsoft.com/office/drawing/2014/main" id="{C1B03300-F7C1-77D3-CE4F-17E9B92E7E75}"/>
+            </a:ext>
+          </a:extLst>
+        </p:cNvPr>
+        <p:cNvGrpSpPr/>
+        <p:nvPr/>
+      </p:nvGrpSpPr>
+      <p:grpSpPr>
+        <a:xfrm>
+          <a:off x="0" y="0"/>
+          <a:ext cx="0" cy="0"/>
+          <a:chOff x="0" y="0"/>
+          <a:chExt cx="0" cy="0"/>
+        </a:xfrm>
+      </p:grpSpPr>
+      <p:sp>
+        <p:nvSpPr>
+          <p:cNvPr id="2" name="Slide Image Placeholder 1">
+            <a:extLst>
+              <a:ext uri="{FF2B5EF4-FFF2-40B4-BE49-F238E27FC236}">
+                <a16:creationId xmlns:a16="http://schemas.microsoft.com/office/drawing/2014/main" id="{7198A73A-8540-EF55-5032-8CC401589EF7}"/>
+              </a:ext>
+            </a:extLst>
+          </p:cNvPr>
+          <p:cNvSpPr>
+            <a:spLocks noGrp="1" noRot="1" noChangeAspect="1"/>
+          </p:cNvSpPr>
+          <p:nvPr>
+            <p:ph type="sldImg"/>
+          </p:nvPr>
+        </p:nvSpPr>
+        <p:spPr/>
+      </p:sp>
+      <p:sp>
+        <p:nvSpPr>
+          <p:cNvPr id="3" name="Notes Placeholder 2">
+            <a:extLst>
+              <a:ext uri="{FF2B5EF4-FFF2-40B4-BE49-F238E27FC236}">
+                <a16:creationId xmlns:a16="http://schemas.microsoft.com/office/drawing/2014/main" id="{5C68AADD-787C-DED2-CBC5-38FECFFB400C}"/>
+              </a:ext>
+            </a:extLst>
+          </p:cNvPr>
+          <p:cNvSpPr>
+            <a:spLocks noGrp="1"/>
+          </p:cNvSpPr>
+          <p:nvPr>
+            <p:ph type="body" idx="1"/>
+          </p:nvPr>
+        </p:nvSpPr>
+        <p:spPr/>
+        <p:txBody>
+          <a:bodyPr/>
+          <a:lstStyle/>
+          <a:p>
+            <a:endParaRPr lang="en-US" dirty="0"/>
+          </a:p>
+        </p:txBody>
+      </p:sp>
+      <p:sp>
+        <p:nvSpPr>
+          <p:cNvPr id="4" name="Slide Number Placeholder 3">
+            <a:extLst>
+              <a:ext uri="{FF2B5EF4-FFF2-40B4-BE49-F238E27FC236}">
+                <a16:creationId xmlns:a16="http://schemas.microsoft.com/office/drawing/2014/main" id="{3E1A8BA7-1D3D-3F68-71DB-5D1B73642DFE}"/>
+              </a:ext>
+            </a:extLst>
+          </p:cNvPr>
+          <p:cNvSpPr>
+            <a:spLocks noGrp="1"/>
+          </p:cNvSpPr>
+          <p:nvPr>
+            <p:ph type="sldNum" sz="quarter" idx="10"/>
+          </p:nvPr>
+        </p:nvSpPr>
+        <p:spPr/>
+        <p:txBody>
+          <a:bodyPr/>
+          <a:lstStyle/>
+          <a:p>
+            <a:fld id="{722C1D7D-EFEA-4841-959A-F45461074D07}" type="slidenum">
+              <a:rPr lang="en-US" smtClean="0"/>
+              <a:pPr/>
+              <a:t>1</a:t>
+            </a:fld>
+            <a:endParaRPr lang="en-US"/>
+          </a:p>
+        </p:txBody>
+      </p:sp>
+    </p:spTree>
+    <p:extLst>
+      <p:ext uri="{BB962C8B-B14F-4D97-AF65-F5344CB8AC3E}">
+        <p14:creationId xmlns:p14="http://schemas.microsoft.com/office/powerpoint/2010/main" val="3515078548"/>
+      </p:ext>
+    </p:extLst>
+  </p:cSld>
+  <p:clrMapOvr>
+    <a:masterClrMapping/>
+  </p:clrMapOvr>
+</p:notes>
+</file>
+
+<file path=ppt/notesSlides/notesSlide2.xml><?xml version="1.0" encoding="utf-8"?>
+<p:notes xmlns:a="http://schemas.openxmlformats.org/drawingml/2006/main" xmlns:r="http://schemas.openxmlformats.org/officeDocument/2006/relationships" xmlns:p="http://schemas.openxmlformats.org/presentationml/2006/main">
+  <p:cSld>
+    <p:spTree>
+      <p:nvGrpSpPr>
+        <p:cNvPr id="1" name="">
+          <a:extLst>
+            <a:ext uri="{FF2B5EF4-FFF2-40B4-BE49-F238E27FC236}">
+              <a16:creationId xmlns:a16="http://schemas.microsoft.com/office/drawing/2014/main" id="{EA1A49C1-4CDC-F30E-1CC1-F1365EC1CA4F}"/>
+            </a:ext>
+          </a:extLst>
+        </p:cNvPr>
+        <p:cNvGrpSpPr/>
+        <p:nvPr/>
+      </p:nvGrpSpPr>
+      <p:grpSpPr>
+        <a:xfrm>
+          <a:off x="0" y="0"/>
+          <a:ext cx="0" cy="0"/>
+          <a:chOff x="0" y="0"/>
+          <a:chExt cx="0" cy="0"/>
+        </a:xfrm>
+      </p:grpSpPr>
+      <p:sp>
+        <p:nvSpPr>
+          <p:cNvPr id="2" name="Slide Image Placeholder 1">
+            <a:extLst>
+              <a:ext uri="{FF2B5EF4-FFF2-40B4-BE49-F238E27FC236}">
+                <a16:creationId xmlns:a16="http://schemas.microsoft.com/office/drawing/2014/main" id="{9F941BB6-C799-3EBE-942A-68D074EBB646}"/>
+              </a:ext>
+            </a:extLst>
+          </p:cNvPr>
+          <p:cNvSpPr>
+            <a:spLocks noGrp="1" noRot="1" noChangeAspect="1"/>
+          </p:cNvSpPr>
+          <p:nvPr>
+            <p:ph type="sldImg"/>
+          </p:nvPr>
+        </p:nvSpPr>
+        <p:spPr/>
+      </p:sp>
+      <p:sp>
+        <p:nvSpPr>
+          <p:cNvPr id="3" name="Notes Placeholder 2">
+            <a:extLst>
+              <a:ext uri="{FF2B5EF4-FFF2-40B4-BE49-F238E27FC236}">
+                <a16:creationId xmlns:a16="http://schemas.microsoft.com/office/drawing/2014/main" id="{976E53D0-26B0-42FE-93D7-6F33B96F545E}"/>
+              </a:ext>
+            </a:extLst>
+          </p:cNvPr>
+          <p:cNvSpPr>
+            <a:spLocks noGrp="1"/>
+          </p:cNvSpPr>
+          <p:nvPr>
+            <p:ph type="body" idx="1"/>
+          </p:nvPr>
+        </p:nvSpPr>
+        <p:spPr/>
+        <p:txBody>
+          <a:bodyPr/>
+          <a:lstStyle/>
+          <a:p>
+            <a:endParaRPr lang="en-US" dirty="0"/>
+          </a:p>
+        </p:txBody>
+      </p:sp>
+      <p:sp>
+        <p:nvSpPr>
+          <p:cNvPr id="4" name="Slide Number Placeholder 3">
+            <a:extLst>
+              <a:ext uri="{FF2B5EF4-FFF2-40B4-BE49-F238E27FC236}">
+                <a16:creationId xmlns:a16="http://schemas.microsoft.com/office/drawing/2014/main" id="{22506A03-DD9A-CCA3-EEE5-6CE130744BC4}"/>
+              </a:ext>
+            </a:extLst>
+          </p:cNvPr>
+          <p:cNvSpPr>
+            <a:spLocks noGrp="1"/>
+          </p:cNvSpPr>
+          <p:nvPr>
+            <p:ph type="sldNum" sz="quarter" idx="10"/>
+          </p:nvPr>
+        </p:nvSpPr>
+        <p:spPr/>
+        <p:txBody>
+          <a:bodyPr/>
+          <a:lstStyle/>
+          <a:p>
+            <a:fld id="{722C1D7D-EFEA-4841-959A-F45461074D07}" type="slidenum">
+              <a:rPr lang="en-US" smtClean="0"/>
+              <a:pPr/>
+              <a:t>10</a:t>
+            </a:fld>
+            <a:endParaRPr lang="en-US"/>
+          </a:p>
+        </p:txBody>
+      </p:sp>
+    </p:spTree>
+    <p:extLst>
+      <p:ext uri="{BB962C8B-B14F-4D97-AF65-F5344CB8AC3E}">
+        <p14:creationId xmlns:p14="http://schemas.microsoft.com/office/powerpoint/2010/main" val="2724894224"/>
+      </p:ext>
+    </p:extLst>
+  </p:cSld>
+  <p:clrMapOvr>
+    <a:masterClrMapping/>
+  </p:clrMapOvr>
+</p:notes>
+</file>
+
 <file path=ppt/slideLayouts/slideLayout1.xml><?xml version="1.0" encoding="utf-8"?>
 <p:sldLayout xmlns:a="http://schemas.openxmlformats.org/drawingml/2006/main" xmlns:r="http://schemas.openxmlformats.org/officeDocument/2006/relationships" xmlns:p="http://schemas.openxmlformats.org/presentationml/2006/main" type="title" preserve="1">
   <p:cSld name="Title Slide">
@@ -615,7 +835,7 @@
           <a:p>
             <a:fld id="{323C5FF3-00EA-45CC-B7E1-84D5D7832992}" type="datetime1">
               <a:rPr lang="en-IN" smtClean="0"/>
-              <a:t>06-10-2026</a:t>
+              <a:t>15-10-2026</a:t>
             </a:fld>
             <a:endParaRPr lang="en-IN"/>
           </a:p>
@@ -786,7 +1006,7 @@
           <a:p>
             <a:fld id="{DB868717-7530-43FA-B168-D3E0E4D4B37A}" type="datetime1">
               <a:rPr lang="en-IN" smtClean="0"/>
-              <a:t>06-10-2026</a:t>
+              <a:t>15-10-2026</a:t>
             </a:fld>
             <a:endParaRPr lang="en-IN"/>
           </a:p>
@@ -967,7 +1187,7 @@
           <a:p>
             <a:fld id="{B8A96AF4-4731-4765-B4DF-43497718C08B}" type="datetime1">
               <a:rPr lang="en-IN" smtClean="0"/>
-              <a:t>06-10-2026</a:t>
+              <a:t>15-10-2026</a:t>
             </a:fld>
             <a:endParaRPr lang="en-IN"/>
           </a:p>
@@ -1138,7 +1358,7 @@
           <a:p>
             <a:fld id="{258C1846-6848-4C3C-A053-A69834132C16}" type="datetime1">
               <a:rPr lang="en-IN" smtClean="0"/>
-              <a:t>06-10-2026</a:t>
+              <a:t>15-10-2026</a:t>
             </a:fld>
             <a:endParaRPr lang="en-IN"/>
           </a:p>
@@ -1385,7 +1605,7 @@
           <a:p>
             <a:fld id="{872822C4-472E-44A9-A657-67EDBE37D843}" type="datetime1">
               <a:rPr lang="en-IN" smtClean="0"/>
-              <a:t>06-10-2026</a:t>
+              <a:t>15-10-2026</a:t>
             </a:fld>
             <a:endParaRPr lang="en-IN"/>
           </a:p>
@@ -1618,7 +1838,7 @@
           <a:p>
             <a:fld id="{54192B11-9E42-47E7-A44B-2AD99F380F86}" type="datetime1">
               <a:rPr lang="en-IN" smtClean="0"/>
-              <a:t>06-10-2026</a:t>
+              <a:t>15-10-2026</a:t>
             </a:fld>
             <a:endParaRPr lang="en-IN"/>
           </a:p>
@@ -1986,7 +2206,7 @@
           <a:p>
             <a:fld id="{03E4798E-D96E-4627-9584-A0046B543FEA}" type="datetime1">
               <a:rPr lang="en-IN" smtClean="0"/>
-              <a:t>06-10-2026</a:t>
+              <a:t>15-10-2026</a:t>
             </a:fld>
             <a:endParaRPr lang="en-IN"/>
           </a:p>
@@ -2105,7 +2325,7 @@
           <a:p>
             <a:fld id="{15B5BD22-7724-45F4-BDB5-8F99527BB392}" type="datetime1">
               <a:rPr lang="en-IN" smtClean="0"/>
-              <a:t>06-10-2026</a:t>
+              <a:t>15-10-2026</a:t>
             </a:fld>
             <a:endParaRPr lang="en-IN"/>
           </a:p>
@@ -2201,7 +2421,7 @@
           <a:p>
             <a:fld id="{9D879EA4-3F90-4BA9-A7BC-6EA928BE2513}" type="datetime1">
               <a:rPr lang="en-IN" smtClean="0"/>
-              <a:t>06-10-2026</a:t>
+              <a:t>15-10-2026</a:t>
             </a:fld>
             <a:endParaRPr lang="en-IN"/>
           </a:p>
@@ -2479,7 +2699,7 @@
           <a:p>
             <a:fld id="{44D8D480-A190-4E2C-B605-D3841A021D52}" type="datetime1">
               <a:rPr lang="en-IN" smtClean="0"/>
-              <a:t>06-10-2026</a:t>
+              <a:t>15-10-2026</a:t>
             </a:fld>
             <a:endParaRPr lang="en-IN"/>
           </a:p>
@@ -2733,7 +2953,7 @@
           <a:p>
             <a:fld id="{314BD555-71D3-4570-A68C-E33065D8866E}" type="datetime1">
               <a:rPr lang="en-IN" smtClean="0"/>
-              <a:t>06-10-2026</a:t>
+              <a:t>15-10-2026</a:t>
             </a:fld>
             <a:endParaRPr lang="en-IN"/>
           </a:p>
@@ -2947,7 +3167,7 @@
           <a:p>
             <a:fld id="{EDAA8838-B03B-4394-A81F-E39DD145F32C}" type="datetime1">
               <a:rPr lang="en-IN" smtClean="0"/>
-              <a:t>06-10-2026</a:t>
+              <a:t>15-10-2026</a:t>
             </a:fld>
             <a:endParaRPr lang="en-IN"/>
           </a:p>
@@ -3338,7 +3558,772 @@
 </file>
 
 <file path=ppt/slides/slide1.xml><?xml version="1.0" encoding="utf-8"?>
-<p:sld xmlns:a="http://schemas.openxmlformats.org/drawingml/2006/main" xmlns:p="http://schemas.openxmlformats.org/presentationml/2006/main" xmlns:r="http://schemas.openxmlformats.org/officeDocument/2006/relationships">
+<p:sld xmlns:a="http://schemas.openxmlformats.org/drawingml/2006/main" xmlns:r="http://schemas.openxmlformats.org/officeDocument/2006/relationships" xmlns:p="http://schemas.openxmlformats.org/presentationml/2006/main">
+  <p:cSld>
+    <p:spTree>
+      <p:nvGrpSpPr>
+        <p:cNvPr id="1" name="">
+          <a:extLst>
+            <a:ext uri="{FF2B5EF4-FFF2-40B4-BE49-F238E27FC236}">
+              <a16:creationId xmlns:a16="http://schemas.microsoft.com/office/drawing/2014/main" id="{F498CFA0-CC8E-1BA5-784B-FAE41EE3ADB7}"/>
+            </a:ext>
+          </a:extLst>
+        </p:cNvPr>
+        <p:cNvGrpSpPr/>
+        <p:nvPr/>
+      </p:nvGrpSpPr>
+      <p:grpSpPr>
+        <a:xfrm>
+          <a:off x="0" y="0"/>
+          <a:ext cx="0" cy="0"/>
+          <a:chOff x="0" y="0"/>
+          <a:chExt cx="0" cy="0"/>
+        </a:xfrm>
+      </p:grpSpPr>
+      <p:sp>
+        <p:nvSpPr>
+          <p:cNvPr id="4" name="TextBox 3">
+            <a:extLst>
+              <a:ext uri="{FF2B5EF4-FFF2-40B4-BE49-F238E27FC236}">
+                <a16:creationId xmlns:a16="http://schemas.microsoft.com/office/drawing/2014/main" id="{9B1166AC-0AB5-B888-0318-C3CFACC546EF}"/>
+              </a:ext>
+            </a:extLst>
+          </p:cNvPr>
+          <p:cNvSpPr txBox="1"/>
+          <p:nvPr/>
+        </p:nvSpPr>
+        <p:spPr>
+          <a:xfrm>
+            <a:off x="1822249" y="75183"/>
+            <a:ext cx="7870391" cy="1107996"/>
+          </a:xfrm>
+          <a:prstGeom prst="rect">
+            <a:avLst/>
+          </a:prstGeom>
+          <a:noFill/>
+        </p:spPr>
+        <p:txBody>
+          <a:bodyPr wrap="square" rtlCol="0">
+            <a:spAutoFit/>
+          </a:bodyPr>
+          <a:lstStyle/>
+          <a:p>
+            <a:r>
+              <a:rPr lang="en-IN" sz="2400" b="1" dirty="0">
+                <a:solidFill>
+                  <a:srgbClr val="FF0000"/>
+                </a:solidFill>
+                <a:latin typeface="Swis721 BlkCn BT" panose="020B0806030502040204" pitchFamily="34" charset="0"/>
+              </a:rPr>
+              <a:t>SAINTGITS</a:t>
+            </a:r>
+            <a:endParaRPr lang="en-IN" sz="2400" b="1" dirty="0">
+              <a:latin typeface="Swis721 BlkCn BT" panose="020B0806030502040204" pitchFamily="34" charset="0"/>
+            </a:endParaRPr>
+          </a:p>
+          <a:p>
+            <a:r>
+              <a:rPr lang="en-IN" sz="2400" b="1" dirty="0">
+                <a:latin typeface="Swis721 BlkCn BT" panose="020B0806030502040204" pitchFamily="34" charset="0"/>
+              </a:rPr>
+              <a:t>COLLEGE OF ENGINEERING</a:t>
+            </a:r>
+          </a:p>
+          <a:p>
+            <a:r>
+              <a:rPr lang="en-IN" dirty="0">
+                <a:latin typeface="Gill Sans MT" panose="020B0502020104020203" pitchFamily="34" charset="0"/>
+              </a:rPr>
+              <a:t>(AUTONOMOUS)</a:t>
+            </a:r>
+          </a:p>
+        </p:txBody>
+      </p:sp>
+      <p:sp>
+        <p:nvSpPr>
+          <p:cNvPr id="10" name="TextBox 9">
+            <a:extLst>
+              <a:ext uri="{FF2B5EF4-FFF2-40B4-BE49-F238E27FC236}">
+                <a16:creationId xmlns:a16="http://schemas.microsoft.com/office/drawing/2014/main" id="{266563E1-7D96-F5A2-6ACA-C37C233872DC}"/>
+              </a:ext>
+            </a:extLst>
+          </p:cNvPr>
+          <p:cNvSpPr txBox="1"/>
+          <p:nvPr/>
+        </p:nvSpPr>
+        <p:spPr>
+          <a:xfrm>
+            <a:off x="0" y="6412331"/>
+            <a:ext cx="7686676" cy="461665"/>
+          </a:xfrm>
+          <a:custGeom>
+            <a:avLst/>
+            <a:gdLst>
+              <a:gd name="connsiteX0" fmla="*/ 0 w 6172200"/>
+              <a:gd name="connsiteY0" fmla="*/ 0 h 369332"/>
+              <a:gd name="connsiteX1" fmla="*/ 6172200 w 6172200"/>
+              <a:gd name="connsiteY1" fmla="*/ 0 h 369332"/>
+              <a:gd name="connsiteX2" fmla="*/ 6172200 w 6172200"/>
+              <a:gd name="connsiteY2" fmla="*/ 369332 h 369332"/>
+              <a:gd name="connsiteX3" fmla="*/ 0 w 6172200"/>
+              <a:gd name="connsiteY3" fmla="*/ 369332 h 369332"/>
+              <a:gd name="connsiteX4" fmla="*/ 0 w 6172200"/>
+              <a:gd name="connsiteY4" fmla="*/ 0 h 369332"/>
+              <a:gd name="connsiteX0" fmla="*/ 0 w 6172200"/>
+              <a:gd name="connsiteY0" fmla="*/ 0 h 369332"/>
+              <a:gd name="connsiteX1" fmla="*/ 5791200 w 6172200"/>
+              <a:gd name="connsiteY1" fmla="*/ 0 h 369332"/>
+              <a:gd name="connsiteX2" fmla="*/ 6172200 w 6172200"/>
+              <a:gd name="connsiteY2" fmla="*/ 369332 h 369332"/>
+              <a:gd name="connsiteX3" fmla="*/ 0 w 6172200"/>
+              <a:gd name="connsiteY3" fmla="*/ 369332 h 369332"/>
+              <a:gd name="connsiteX4" fmla="*/ 0 w 6172200"/>
+              <a:gd name="connsiteY4" fmla="*/ 0 h 369332"/>
+            </a:gdLst>
+            <a:ahLst/>
+            <a:cxnLst>
+              <a:cxn ang="0">
+                <a:pos x="connsiteX0" y="connsiteY0"/>
+              </a:cxn>
+              <a:cxn ang="0">
+                <a:pos x="connsiteX1" y="connsiteY1"/>
+              </a:cxn>
+              <a:cxn ang="0">
+                <a:pos x="connsiteX2" y="connsiteY2"/>
+              </a:cxn>
+              <a:cxn ang="0">
+                <a:pos x="connsiteX3" y="connsiteY3"/>
+              </a:cxn>
+              <a:cxn ang="0">
+                <a:pos x="connsiteX4" y="connsiteY4"/>
+              </a:cxn>
+            </a:cxnLst>
+            <a:rect l="l" t="t" r="r" b="b"/>
+            <a:pathLst>
+              <a:path w="6172200" h="369332">
+                <a:moveTo>
+                  <a:pt x="0" y="0"/>
+                </a:moveTo>
+                <a:lnTo>
+                  <a:pt x="5791200" y="0"/>
+                </a:lnTo>
+                <a:lnTo>
+                  <a:pt x="6172200" y="369332"/>
+                </a:lnTo>
+                <a:lnTo>
+                  <a:pt x="0" y="369332"/>
+                </a:lnTo>
+                <a:lnTo>
+                  <a:pt x="0" y="0"/>
+                </a:lnTo>
+                <a:close/>
+              </a:path>
+            </a:pathLst>
+          </a:custGeom>
+          <a:solidFill>
+            <a:schemeClr val="accent1">
+              <a:lumMod val="75000"/>
+            </a:schemeClr>
+          </a:solidFill>
+        </p:spPr>
+        <p:txBody>
+          <a:bodyPr wrap="square" rtlCol="0">
+            <a:spAutoFit/>
+          </a:bodyPr>
+          <a:lstStyle/>
+          <a:p>
+            <a:pPr algn="ctr"/>
+            <a:r>
+              <a:rPr lang="en-IN" sz="2400" spc="600" dirty="0">
+                <a:solidFill>
+                  <a:schemeClr val="bg1"/>
+                </a:solidFill>
+                <a:latin typeface="Gill Sans MT" panose="020B0502020104020203" pitchFamily="34" charset="0"/>
+              </a:rPr>
+              <a:t>LEARN . GROW . EXCEL</a:t>
+            </a:r>
+          </a:p>
+        </p:txBody>
+      </p:sp>
+      <p:sp>
+        <p:nvSpPr>
+          <p:cNvPr id="2" name="Rectangle 1">
+            <a:extLst>
+              <a:ext uri="{FF2B5EF4-FFF2-40B4-BE49-F238E27FC236}">
+                <a16:creationId xmlns:a16="http://schemas.microsoft.com/office/drawing/2014/main" id="{6210ABD3-75FA-9C16-C33C-3D90B75C71BE}"/>
+              </a:ext>
+            </a:extLst>
+          </p:cNvPr>
+          <p:cNvSpPr/>
+          <p:nvPr/>
+        </p:nvSpPr>
+        <p:spPr>
+          <a:xfrm>
+            <a:off x="571500" y="4642"/>
+            <a:ext cx="1152525" cy="1266998"/>
+          </a:xfrm>
+          <a:prstGeom prst="rect">
+            <a:avLst/>
+          </a:prstGeom>
+          <a:solidFill>
+            <a:schemeClr val="bg1"/>
+          </a:solidFill>
+          <a:ln>
+            <a:noFill/>
+          </a:ln>
+          <a:effectLst>
+            <a:outerShdw blurRad="50800" dist="38100" dir="2700000" algn="tl" rotWithShape="0">
+              <a:prstClr val="black">
+                <a:alpha val="40000"/>
+              </a:prstClr>
+            </a:outerShdw>
+          </a:effectLst>
+        </p:spPr>
+        <p:style>
+          <a:lnRef idx="2">
+            <a:schemeClr val="accent1">
+              <a:shade val="50000"/>
+            </a:schemeClr>
+          </a:lnRef>
+          <a:fillRef idx="1">
+            <a:schemeClr val="accent1"/>
+          </a:fillRef>
+          <a:effectRef idx="0">
+            <a:schemeClr val="accent1"/>
+          </a:effectRef>
+          <a:fontRef idx="minor">
+            <a:schemeClr val="lt1"/>
+          </a:fontRef>
+        </p:style>
+        <p:txBody>
+          <a:bodyPr rtlCol="0" anchor="ctr"/>
+          <a:lstStyle/>
+          <a:p>
+            <a:pPr algn="ctr"/>
+            <a:endParaRPr lang="en-IN"/>
+          </a:p>
+        </p:txBody>
+      </p:sp>
+      <p:pic>
+        <p:nvPicPr>
+          <p:cNvPr id="3" name="Picture 2">
+            <a:extLst>
+              <a:ext uri="{FF2B5EF4-FFF2-40B4-BE49-F238E27FC236}">
+                <a16:creationId xmlns:a16="http://schemas.microsoft.com/office/drawing/2014/main" id="{A4BFF886-5C7F-145E-7210-AACC6FB7830A}"/>
+              </a:ext>
+            </a:extLst>
+          </p:cNvPr>
+          <p:cNvPicPr>
+            <a:picLocks noChangeAspect="1"/>
+          </p:cNvPicPr>
+          <p:nvPr/>
+        </p:nvPicPr>
+        <p:blipFill>
+          <a:blip r:embed="rId3" cstate="print">
+            <a:extLst>
+              <a:ext uri="{28A0092B-C50C-407E-A947-70E740481C1C}">
+                <a14:useLocalDpi xmlns:a14="http://schemas.microsoft.com/office/drawing/2010/main" val="0"/>
+              </a:ext>
+            </a:extLst>
+          </a:blip>
+          <a:stretch>
+            <a:fillRect/>
+          </a:stretch>
+        </p:blipFill>
+        <p:spPr>
+          <a:xfrm>
+            <a:off x="669724" y="93102"/>
+            <a:ext cx="956075" cy="1090077"/>
+          </a:xfrm>
+          <a:prstGeom prst="rect">
+            <a:avLst/>
+          </a:prstGeom>
+        </p:spPr>
+      </p:pic>
+      <p:sp>
+        <p:nvSpPr>
+          <p:cNvPr id="5" name="Title 4">
+            <a:extLst>
+              <a:ext uri="{FF2B5EF4-FFF2-40B4-BE49-F238E27FC236}">
+                <a16:creationId xmlns:a16="http://schemas.microsoft.com/office/drawing/2014/main" id="{0887D997-2295-17D9-FC47-20F1B4E89E59}"/>
+              </a:ext>
+            </a:extLst>
+          </p:cNvPr>
+          <p:cNvSpPr>
+            <a:spLocks noGrp="1"/>
+          </p:cNvSpPr>
+          <p:nvPr>
+            <p:ph type="ctrTitle"/>
+          </p:nvPr>
+        </p:nvSpPr>
+        <p:spPr>
+          <a:xfrm>
+            <a:off x="145411" y="1980411"/>
+            <a:ext cx="12192000" cy="1569659"/>
+          </a:xfrm>
+        </p:spPr>
+        <p:txBody>
+          <a:bodyPr wrap="square">
+            <a:normAutofit/>
+          </a:bodyPr>
+          <a:lstStyle/>
+          <a:p>
+            <a:r>
+              <a:rPr sz="4800" b="1">
+                <a:latin typeface="Book Antiqua"/>
+              </a:rPr>
+              <a:t>B.TECH MINOR PROJECT
+FINAL STATUS UPDATE
+23/10/2026</a:t>
+            </a:r>
+            <a:endParaRPr lang="en-IN" sz="4500" b="1" dirty="0">
+              <a:latin typeface="Book Antiqua" panose="02040602050305030304" pitchFamily="18" charset="0"/>
+              <a:cs typeface="Times New Roman" panose="02020603050405020304" pitchFamily="18" charset="0"/>
+            </a:endParaRPr>
+          </a:p>
+        </p:txBody>
+      </p:sp>
+    </p:spTree>
+    <p:extLst>
+      <p:ext uri="{BB962C8B-B14F-4D97-AF65-F5344CB8AC3E}">
+        <p14:creationId xmlns:p14="http://schemas.microsoft.com/office/powerpoint/2010/main" val="3876540410"/>
+      </p:ext>
+    </p:extLst>
+  </p:cSld>
+  <p:clrMapOvr>
+    <a:masterClrMapping/>
+  </p:clrMapOvr>
+</p:sld>
+</file>
+
+<file path=ppt/slides/slide10.xml><?xml version="1.0" encoding="utf-8"?>
+<p:sld xmlns:a="http://schemas.openxmlformats.org/drawingml/2006/main" xmlns:r="http://schemas.openxmlformats.org/officeDocument/2006/relationships" xmlns:p="http://schemas.openxmlformats.org/presentationml/2006/main">
+  <p:cSld>
+    <p:spTree>
+      <p:nvGrpSpPr>
+        <p:cNvPr id="1" name="">
+          <a:extLst>
+            <a:ext uri="{FF2B5EF4-FFF2-40B4-BE49-F238E27FC236}">
+              <a16:creationId xmlns:a16="http://schemas.microsoft.com/office/drawing/2014/main" id="{57114E8C-CB82-8EED-8B5E-1C6FE73D24B2}"/>
+            </a:ext>
+          </a:extLst>
+        </p:cNvPr>
+        <p:cNvGrpSpPr/>
+        <p:nvPr/>
+      </p:nvGrpSpPr>
+      <p:grpSpPr>
+        <a:xfrm>
+          <a:off x="0" y="0"/>
+          <a:ext cx="0" cy="0"/>
+          <a:chOff x="0" y="0"/>
+          <a:chExt cx="0" cy="0"/>
+        </a:xfrm>
+      </p:grpSpPr>
+      <p:sp>
+        <p:nvSpPr>
+          <p:cNvPr id="10" name="TextBox 9">
+            <a:extLst>
+              <a:ext uri="{FF2B5EF4-FFF2-40B4-BE49-F238E27FC236}">
+                <a16:creationId xmlns:a16="http://schemas.microsoft.com/office/drawing/2014/main" id="{93C239BF-CAD6-519B-F809-84AD8C9DFD24}"/>
+              </a:ext>
+            </a:extLst>
+          </p:cNvPr>
+          <p:cNvSpPr txBox="1"/>
+          <p:nvPr/>
+        </p:nvSpPr>
+        <p:spPr>
+          <a:xfrm>
+            <a:off x="0" y="6508273"/>
+            <a:ext cx="7686676" cy="338554"/>
+          </a:xfrm>
+          <a:custGeom>
+            <a:avLst/>
+            <a:gdLst>
+              <a:gd name="connsiteX0" fmla="*/ 0 w 6172200"/>
+              <a:gd name="connsiteY0" fmla="*/ 0 h 369332"/>
+              <a:gd name="connsiteX1" fmla="*/ 6172200 w 6172200"/>
+              <a:gd name="connsiteY1" fmla="*/ 0 h 369332"/>
+              <a:gd name="connsiteX2" fmla="*/ 6172200 w 6172200"/>
+              <a:gd name="connsiteY2" fmla="*/ 369332 h 369332"/>
+              <a:gd name="connsiteX3" fmla="*/ 0 w 6172200"/>
+              <a:gd name="connsiteY3" fmla="*/ 369332 h 369332"/>
+              <a:gd name="connsiteX4" fmla="*/ 0 w 6172200"/>
+              <a:gd name="connsiteY4" fmla="*/ 0 h 369332"/>
+              <a:gd name="connsiteX0" fmla="*/ 0 w 6172200"/>
+              <a:gd name="connsiteY0" fmla="*/ 0 h 369332"/>
+              <a:gd name="connsiteX1" fmla="*/ 5791200 w 6172200"/>
+              <a:gd name="connsiteY1" fmla="*/ 0 h 369332"/>
+              <a:gd name="connsiteX2" fmla="*/ 6172200 w 6172200"/>
+              <a:gd name="connsiteY2" fmla="*/ 369332 h 369332"/>
+              <a:gd name="connsiteX3" fmla="*/ 0 w 6172200"/>
+              <a:gd name="connsiteY3" fmla="*/ 369332 h 369332"/>
+              <a:gd name="connsiteX4" fmla="*/ 0 w 6172200"/>
+              <a:gd name="connsiteY4" fmla="*/ 0 h 369332"/>
+            </a:gdLst>
+            <a:ahLst/>
+            <a:cxnLst>
+              <a:cxn ang="0">
+                <a:pos x="connsiteX0" y="connsiteY0"/>
+              </a:cxn>
+              <a:cxn ang="0">
+                <a:pos x="connsiteX1" y="connsiteY1"/>
+              </a:cxn>
+              <a:cxn ang="0">
+                <a:pos x="connsiteX2" y="connsiteY2"/>
+              </a:cxn>
+              <a:cxn ang="0">
+                <a:pos x="connsiteX3" y="connsiteY3"/>
+              </a:cxn>
+              <a:cxn ang="0">
+                <a:pos x="connsiteX4" y="connsiteY4"/>
+              </a:cxn>
+            </a:cxnLst>
+            <a:rect l="l" t="t" r="r" b="b"/>
+            <a:pathLst>
+              <a:path w="6172200" h="369332">
+                <a:moveTo>
+                  <a:pt x="0" y="0"/>
+                </a:moveTo>
+                <a:lnTo>
+                  <a:pt x="5791200" y="0"/>
+                </a:lnTo>
+                <a:lnTo>
+                  <a:pt x="6172200" y="369332"/>
+                </a:lnTo>
+                <a:lnTo>
+                  <a:pt x="0" y="369332"/>
+                </a:lnTo>
+                <a:lnTo>
+                  <a:pt x="0" y="0"/>
+                </a:lnTo>
+                <a:close/>
+              </a:path>
+            </a:pathLst>
+          </a:custGeom>
+          <a:solidFill>
+            <a:schemeClr val="accent1">
+              <a:lumMod val="75000"/>
+            </a:schemeClr>
+          </a:solidFill>
+        </p:spPr>
+        <p:txBody>
+          <a:bodyPr wrap="square" rtlCol="0">
+            <a:spAutoFit/>
+          </a:bodyPr>
+          <a:lstStyle/>
+          <a:p>
+            <a:pPr algn="ctr"/>
+            <a:r>
+              <a:rPr lang="en-IN" sz="1600" spc="600" dirty="0">
+                <a:solidFill>
+                  <a:schemeClr val="bg1"/>
+                </a:solidFill>
+                <a:latin typeface="Gill Sans MT" panose="020B0502020104020203" pitchFamily="34" charset="0"/>
+              </a:rPr>
+              <a:t>LEARN . GROW . EXCEL</a:t>
+            </a:r>
+          </a:p>
+        </p:txBody>
+      </p:sp>
+      <p:pic>
+        <p:nvPicPr>
+          <p:cNvPr id="3" name="Picture 2">
+            <a:extLst>
+              <a:ext uri="{FF2B5EF4-FFF2-40B4-BE49-F238E27FC236}">
+                <a16:creationId xmlns:a16="http://schemas.microsoft.com/office/drawing/2014/main" id="{49222C93-C84A-2506-9F91-BEFF0A98F477}"/>
+              </a:ext>
+            </a:extLst>
+          </p:cNvPr>
+          <p:cNvPicPr>
+            <a:picLocks noChangeAspect="1"/>
+          </p:cNvPicPr>
+          <p:nvPr/>
+        </p:nvPicPr>
+        <p:blipFill>
+          <a:blip r:embed="rId3" cstate="print">
+            <a:extLst>
+              <a:ext uri="{28A0092B-C50C-407E-A947-70E740481C1C}">
+                <a14:useLocalDpi xmlns:a14="http://schemas.microsoft.com/office/drawing/2010/main" val="0"/>
+              </a:ext>
+            </a:extLst>
+          </a:blip>
+          <a:stretch>
+            <a:fillRect/>
+          </a:stretch>
+        </p:blipFill>
+        <p:spPr>
+          <a:xfrm>
+            <a:off x="11448288" y="105155"/>
+            <a:ext cx="619959" cy="706851"/>
+          </a:xfrm>
+          <a:prstGeom prst="rect">
+            <a:avLst/>
+          </a:prstGeom>
+        </p:spPr>
+      </p:pic>
+      <p:sp>
+        <p:nvSpPr>
+          <p:cNvPr id="5" name="TextBox 4">
+            <a:extLst>
+              <a:ext uri="{FF2B5EF4-FFF2-40B4-BE49-F238E27FC236}">
+                <a16:creationId xmlns:a16="http://schemas.microsoft.com/office/drawing/2014/main" id="{9F2BAD83-C3D6-8644-EBBA-2593D627991B}"/>
+              </a:ext>
+            </a:extLst>
+          </p:cNvPr>
+          <p:cNvSpPr txBox="1"/>
+          <p:nvPr/>
+        </p:nvSpPr>
+        <p:spPr>
+          <a:xfrm>
+            <a:off x="0" y="2629091"/>
+            <a:ext cx="12192000" cy="1061829"/>
+          </a:xfrm>
+          <a:prstGeom prst="rect">
+            <a:avLst/>
+          </a:prstGeom>
+          <a:noFill/>
+        </p:spPr>
+        <p:txBody>
+          <a:bodyPr wrap="square" rtlCol="0">
+            <a:spAutoFit/>
+          </a:bodyPr>
+          <a:lstStyle/>
+          <a:p>
+            <a:pPr algn="ctr"/>
+            <a:r>
+              <a:rPr sz="2700" b="1">
+                <a:solidFill>
+                  <a:srgbClr val="FF0000"/>
+                </a:solidFill>
+                <a:latin typeface="Times New Roman"/>
+              </a:rPr>
+              <a:t>THANK YOU
+KINETIQ
+Live source · honest freshness · grounded wellness assistance</a:t>
+            </a:r>
+          </a:p>
+        </p:txBody>
+      </p:sp>
+      <p:sp>
+        <p:nvSpPr>
+          <p:cNvPr id="7" name="Content Placeholder 2">
+            <a:extLst>
+              <a:ext uri="{FF2B5EF4-FFF2-40B4-BE49-F238E27FC236}">
+                <a16:creationId xmlns:a16="http://schemas.microsoft.com/office/drawing/2014/main" id="{DE4020A3-1CCA-E234-FAD5-4E85B29794E8}"/>
+              </a:ext>
+            </a:extLst>
+          </p:cNvPr>
+          <p:cNvSpPr txBox="1">
+            <a:spLocks/>
+          </p:cNvSpPr>
+          <p:nvPr/>
+        </p:nvSpPr>
+        <p:spPr>
+          <a:xfrm>
+            <a:off x="0" y="1293192"/>
+            <a:ext cx="12192000" cy="5171522"/>
+          </a:xfrm>
+          <a:prstGeom prst="rect">
+            <a:avLst/>
+          </a:prstGeom>
+        </p:spPr>
+        <p:txBody>
+          <a:bodyPr>
+            <a:normAutofit/>
+          </a:bodyPr>
+          <a:lstStyle>
+            <a:lvl1pPr marL="228600" indent="-228600" algn="l" defTabSz="914400" rtl="0" eaLnBrk="1" latinLnBrk="0" hangingPunct="1">
+              <a:lnSpc>
+                <a:spcPct val="90000"/>
+              </a:lnSpc>
+              <a:spcBef>
+                <a:spcPts val="1000"/>
+              </a:spcBef>
+              <a:buFont typeface="Arial" panose="020B0604020202020204" pitchFamily="34" charset="0"/>
+              <a:buChar char="•"/>
+              <a:defRPr sz="2800" kern="1200">
+                <a:solidFill>
+                  <a:schemeClr val="tx1"/>
+                </a:solidFill>
+                <a:latin typeface="+mn-lt"/>
+                <a:ea typeface="+mn-ea"/>
+                <a:cs typeface="+mn-cs"/>
+              </a:defRPr>
+            </a:lvl1pPr>
+            <a:lvl2pPr marL="685800" indent="-228600" algn="l" defTabSz="914400" rtl="0" eaLnBrk="1" latinLnBrk="0" hangingPunct="1">
+              <a:lnSpc>
+                <a:spcPct val="90000"/>
+              </a:lnSpc>
+              <a:spcBef>
+                <a:spcPts val="500"/>
+              </a:spcBef>
+              <a:buFont typeface="Arial" panose="020B0604020202020204" pitchFamily="34" charset="0"/>
+              <a:buChar char="•"/>
+              <a:defRPr sz="2400" kern="1200">
+                <a:solidFill>
+                  <a:schemeClr val="tx1"/>
+                </a:solidFill>
+                <a:latin typeface="+mn-lt"/>
+                <a:ea typeface="+mn-ea"/>
+                <a:cs typeface="+mn-cs"/>
+              </a:defRPr>
+            </a:lvl2pPr>
+            <a:lvl3pPr marL="1143000" indent="-228600" algn="l" defTabSz="914400" rtl="0" eaLnBrk="1" latinLnBrk="0" hangingPunct="1">
+              <a:lnSpc>
+                <a:spcPct val="90000"/>
+              </a:lnSpc>
+              <a:spcBef>
+                <a:spcPts val="500"/>
+              </a:spcBef>
+              <a:buFont typeface="Arial" panose="020B0604020202020204" pitchFamily="34" charset="0"/>
+              <a:buChar char="•"/>
+              <a:defRPr sz="2000" kern="1200">
+                <a:solidFill>
+                  <a:schemeClr val="tx1"/>
+                </a:solidFill>
+                <a:latin typeface="+mn-lt"/>
+                <a:ea typeface="+mn-ea"/>
+                <a:cs typeface="+mn-cs"/>
+              </a:defRPr>
+            </a:lvl3pPr>
+            <a:lvl4pPr marL="1600200" indent="-228600" algn="l" defTabSz="914400" rtl="0" eaLnBrk="1" latinLnBrk="0" hangingPunct="1">
+              <a:lnSpc>
+                <a:spcPct val="90000"/>
+              </a:lnSpc>
+              <a:spcBef>
+                <a:spcPts val="500"/>
+              </a:spcBef>
+              <a:buFont typeface="Arial" panose="020B0604020202020204" pitchFamily="34" charset="0"/>
+              <a:buChar char="•"/>
+              <a:defRPr sz="1800" kern="1200">
+                <a:solidFill>
+                  <a:schemeClr val="tx1"/>
+                </a:solidFill>
+                <a:latin typeface="+mn-lt"/>
+                <a:ea typeface="+mn-ea"/>
+                <a:cs typeface="+mn-cs"/>
+              </a:defRPr>
+            </a:lvl4pPr>
+            <a:lvl5pPr marL="2057400" indent="-228600" algn="l" defTabSz="914400" rtl="0" eaLnBrk="1" latinLnBrk="0" hangingPunct="1">
+              <a:lnSpc>
+                <a:spcPct val="90000"/>
+              </a:lnSpc>
+              <a:spcBef>
+                <a:spcPts val="500"/>
+              </a:spcBef>
+              <a:buFont typeface="Arial" panose="020B0604020202020204" pitchFamily="34" charset="0"/>
+              <a:buChar char="•"/>
+              <a:defRPr sz="1800" kern="1200">
+                <a:solidFill>
+                  <a:schemeClr val="tx1"/>
+                </a:solidFill>
+                <a:latin typeface="+mn-lt"/>
+                <a:ea typeface="+mn-ea"/>
+                <a:cs typeface="+mn-cs"/>
+              </a:defRPr>
+            </a:lvl5pPr>
+            <a:lvl6pPr marL="2514600" indent="-228600" algn="l" defTabSz="914400" rtl="0" eaLnBrk="1" latinLnBrk="0" hangingPunct="1">
+              <a:lnSpc>
+                <a:spcPct val="90000"/>
+              </a:lnSpc>
+              <a:spcBef>
+                <a:spcPts val="500"/>
+              </a:spcBef>
+              <a:buFont typeface="Arial" panose="020B0604020202020204" pitchFamily="34" charset="0"/>
+              <a:buChar char="•"/>
+              <a:defRPr sz="1800" kern="1200">
+                <a:solidFill>
+                  <a:schemeClr val="tx1"/>
+                </a:solidFill>
+                <a:latin typeface="+mn-lt"/>
+                <a:ea typeface="+mn-ea"/>
+                <a:cs typeface="+mn-cs"/>
+              </a:defRPr>
+            </a:lvl6pPr>
+            <a:lvl7pPr marL="2971800" indent="-228600" algn="l" defTabSz="914400" rtl="0" eaLnBrk="1" latinLnBrk="0" hangingPunct="1">
+              <a:lnSpc>
+                <a:spcPct val="90000"/>
+              </a:lnSpc>
+              <a:spcBef>
+                <a:spcPts val="500"/>
+              </a:spcBef>
+              <a:buFont typeface="Arial" panose="020B0604020202020204" pitchFamily="34" charset="0"/>
+              <a:buChar char="•"/>
+              <a:defRPr sz="1800" kern="1200">
+                <a:solidFill>
+                  <a:schemeClr val="tx1"/>
+                </a:solidFill>
+                <a:latin typeface="+mn-lt"/>
+                <a:ea typeface="+mn-ea"/>
+                <a:cs typeface="+mn-cs"/>
+              </a:defRPr>
+            </a:lvl7pPr>
+            <a:lvl8pPr marL="3429000" indent="-228600" algn="l" defTabSz="914400" rtl="0" eaLnBrk="1" latinLnBrk="0" hangingPunct="1">
+              <a:lnSpc>
+                <a:spcPct val="90000"/>
+              </a:lnSpc>
+              <a:spcBef>
+                <a:spcPts val="500"/>
+              </a:spcBef>
+              <a:buFont typeface="Arial" panose="020B0604020202020204" pitchFamily="34" charset="0"/>
+              <a:buChar char="•"/>
+              <a:defRPr sz="1800" kern="1200">
+                <a:solidFill>
+                  <a:schemeClr val="tx1"/>
+                </a:solidFill>
+                <a:latin typeface="+mn-lt"/>
+                <a:ea typeface="+mn-ea"/>
+                <a:cs typeface="+mn-cs"/>
+              </a:defRPr>
+            </a:lvl8pPr>
+            <a:lvl9pPr marL="3886200" indent="-228600" algn="l" defTabSz="914400" rtl="0" eaLnBrk="1" latinLnBrk="0" hangingPunct="1">
+              <a:lnSpc>
+                <a:spcPct val="90000"/>
+              </a:lnSpc>
+              <a:spcBef>
+                <a:spcPts val="500"/>
+              </a:spcBef>
+              <a:buFont typeface="Arial" panose="020B0604020202020204" pitchFamily="34" charset="0"/>
+              <a:buChar char="•"/>
+              <a:defRPr sz="1800" kern="1200">
+                <a:solidFill>
+                  <a:schemeClr val="tx1"/>
+                </a:solidFill>
+                <a:latin typeface="+mn-lt"/>
+                <a:ea typeface="+mn-ea"/>
+                <a:cs typeface="+mn-cs"/>
+              </a:defRPr>
+            </a:lvl9pPr>
+          </a:lstStyle>
+          <a:p>
+            <a:pPr marL="0" indent="0">
+              <a:lnSpc>
+                <a:spcPct val="125000"/>
+              </a:lnSpc>
+              <a:buNone/>
+            </a:pPr>
+            <a:endParaRPr lang="en-US" sz="4400" dirty="0">
+              <a:latin typeface="Times New Roman" panose="02020603050405020304" pitchFamily="18" charset="0"/>
+              <a:cs typeface="Times New Roman" panose="02020603050405020304" pitchFamily="18" charset="0"/>
+            </a:endParaRPr>
+          </a:p>
+        </p:txBody>
+      </p:sp>
+    </p:spTree>
+    <p:extLst>
+      <p:ext uri="{BB962C8B-B14F-4D97-AF65-F5344CB8AC3E}">
+        <p14:creationId xmlns:p14="http://schemas.microsoft.com/office/powerpoint/2010/main" val="2095014710"/>
+      </p:ext>
+    </p:extLst>
+  </p:cSld>
+  <p:clrMapOvr>
+    <a:masterClrMapping/>
+  </p:clrMapOvr>
+</p:sld>
+</file>
+
+<file path=ppt/slides/slide2.xml><?xml version="1.0" encoding="utf-8"?>
+<p:sld xmlns:a="http://schemas.openxmlformats.org/drawingml/2006/main" xmlns:r="http://schemas.openxmlformats.org/officeDocument/2006/relationships" xmlns:p="http://schemas.openxmlformats.org/presentationml/2006/main">
   <p:cSld>
     <p:spTree>
       <p:nvGrpSpPr>
@@ -3346,7 +4331,14 @@
         <p:cNvGrpSpPr/>
         <p:nvPr/>
       </p:nvGrpSpPr>
-      <p:grpSpPr/>
+      <p:grpSpPr>
+        <a:xfrm>
+          <a:off x="0" y="0"/>
+          <a:ext cx="0" cy="0"/>
+          <a:chOff x="0" y="0"/>
+          <a:chExt cx="0" cy="0"/>
+        </a:xfrm>
+      </p:grpSpPr>
       <p:sp>
         <p:nvSpPr>
           <p:cNvPr id="2" name="Title 1"/>
@@ -3369,7 +4361,7 @@
           <a:p>
             <a:pPr algn="ctr"/>
             <a:r>
-              <a:rPr sz="7200" b="1" i="0">
+              <a:rPr sz="7200" b="1" i="0" dirty="0">
                 <a:solidFill>
                   <a:srgbClr val="FF0000"/>
                 </a:solidFill>
@@ -3393,7 +4385,7 @@
         <p:spPr>
           <a:xfrm>
             <a:off x="1527048" y="2926080"/>
-            <a:ext cx="9144000" cy="2743200"/>
+            <a:ext cx="9106539" cy="1321455"/>
           </a:xfrm>
         </p:spPr>
         <p:txBody>
@@ -3406,75 +4398,34 @@
               </a:spcAft>
             </a:pPr>
             <a:r>
-              <a:rPr sz="2200" b="1" i="0">
+              <a:rPr sz="2000" b="1" i="0">
                 <a:solidFill>
                   <a:srgbClr val="262626"/>
                 </a:solidFill>
                 <a:latin typeface="Times New Roman"/>
               </a:rPr>
-              <a:t>RTOS-Based IoT Healthcare Assistant with Sensor-Grounded Voice AI</a:t>
-            </a:r>
-          </a:p>
-          <a:p>
-            <a:pPr algn="ctr">
-              <a:spcAft>
-                <a:spcPts val="600"/>
-              </a:spcAft>
-            </a:pPr>
-            <a:r>
-              <a:rPr sz="1800" b="0" i="1">
-                <a:solidFill>
-                  <a:srgbClr val="262626"/>
-                </a:solidFill>
-                <a:latin typeface="Times New Roman"/>
-              </a:rPr>
-              <a:t>‘Mirror, Mirror’ — the wellness mirror that sees, listens and answers</a:t>
-            </a:r>
-          </a:p>
-          <a:p>
-            <a:pPr algn="ctr">
-              <a:spcAft>
-                <a:spcPts val="600"/>
-              </a:spcAft>
-            </a:pPr>
-            <a:r>
-              <a:rPr sz="1600" b="0" i="0">
-                <a:solidFill>
-                  <a:srgbClr val="262626"/>
-                </a:solidFill>
-                <a:latin typeface="Times New Roman"/>
-              </a:rPr>
-              <a:t>Team: Sid &amp; Tharun  ·  Faculty Guide: (to be confirmed)</a:t>
-            </a:r>
-          </a:p>
-          <a:p>
-            <a:pPr algn="ctr">
-              <a:spcAft>
-                <a:spcPts val="600"/>
-              </a:spcAft>
-            </a:pPr>
-            <a:r>
-              <a:rPr sz="1600" b="1" i="0">
-                <a:solidFill>
-                  <a:srgbClr val="FF0000"/>
-                </a:solidFill>
-                <a:latin typeface="Times New Roman"/>
-              </a:rPr>
-              <a:t>FINAL INTERNAL REVIEW — 15 Oct 2026</a:t>
-            </a:r>
-          </a:p>
-        </p:txBody>
-      </p:sp>
-      <p:sp>
-        <p:nvSpPr>
-          <p:cNvPr id="4" name="TextBox 3"/>
+              <a:t>Real-Time Wellness Mirror with FreeRTOS and Sensor-Grounded AI
+Two evidence lanes: genuine Huawei Band 6 biometrics + deterministic RTOS control</a:t>
+            </a:r>
+          </a:p>
+        </p:txBody>
+      </p:sp>
+      <p:sp>
+        <p:nvSpPr>
+          <p:cNvPr id="9" name="TextBox 8">
+            <a:extLst>
+              <a:ext uri="{FF2B5EF4-FFF2-40B4-BE49-F238E27FC236}">
+                <a16:creationId xmlns:a16="http://schemas.microsoft.com/office/drawing/2014/main" id="{0D65F4A9-0B85-9A40-61E4-9E6F10CB350C}"/>
+              </a:ext>
+            </a:extLst>
+          </p:cNvPr>
           <p:cNvSpPr txBox="1"/>
           <p:nvPr/>
         </p:nvSpPr>
         <p:spPr>
           <a:xfrm>
-            <a:off x="1819656" y="73152"/>
-            <a:ext cx="7872983" cy="1106424"/>
+            <a:off x="1817329" y="75463"/>
+            <a:ext cx="7870391" cy="1107996"/>
           </a:xfrm>
           <a:prstGeom prst="rect">
             <a:avLst/>
@@ -3482,62 +4433,237 @@
           <a:noFill/>
         </p:spPr>
         <p:txBody>
-          <a:bodyPr wrap="square">
+          <a:bodyPr wrap="square" rtlCol="0">
             <a:spAutoFit/>
           </a:bodyPr>
           <a:lstStyle/>
           <a:p>
-            <a:pPr algn="ctr">
-              <a:spcAft>
-                <a:spcPts val="0"/>
-              </a:spcAft>
-            </a:pPr>
-            <a:r>
-              <a:rPr sz="2800" b="1" i="0">
+            <a:r>
+              <a:rPr lang="en-IN" sz="2400" b="1" dirty="0">
                 <a:solidFill>
-                  <a:srgbClr val="262626"/>
+                  <a:srgbClr val="FF0000"/>
                 </a:solidFill>
-                <a:latin typeface="Times New Roman"/>
+                <a:latin typeface="Swis721 BlkCn BT" panose="020B0806030502040204" pitchFamily="34" charset="0"/>
               </a:rPr>
               <a:t>SAINTGITS</a:t>
             </a:r>
-          </a:p>
-          <a:p>
-            <a:pPr algn="ctr">
-              <a:spcAft>
-                <a:spcPts val="600"/>
-              </a:spcAft>
-            </a:pPr>
-            <a:r>
-              <a:rPr sz="1600" b="1" i="0">
+            <a:endParaRPr lang="en-IN" sz="2400" b="1" dirty="0">
+              <a:latin typeface="Swis721 BlkCn BT" panose="020B0806030502040204" pitchFamily="34" charset="0"/>
+            </a:endParaRPr>
+          </a:p>
+          <a:p>
+            <a:r>
+              <a:rPr lang="en-IN" sz="2400" b="1" dirty="0">
+                <a:latin typeface="Swis721 BlkCn BT" panose="020B0806030502040204" pitchFamily="34" charset="0"/>
+              </a:rPr>
+              <a:t>COLLEGE OF ENGINEERING</a:t>
+            </a:r>
+          </a:p>
+          <a:p>
+            <a:r>
+              <a:rPr lang="en-IN" dirty="0">
+                <a:latin typeface="Gill Sans MT" panose="020B0502020104020203" pitchFamily="34" charset="0"/>
+              </a:rPr>
+              <a:t>(AUTONOMOUS)</a:t>
+            </a:r>
+          </a:p>
+        </p:txBody>
+      </p:sp>
+      <p:sp>
+        <p:nvSpPr>
+          <p:cNvPr id="11" name="TextBox 10">
+            <a:extLst>
+              <a:ext uri="{FF2B5EF4-FFF2-40B4-BE49-F238E27FC236}">
+                <a16:creationId xmlns:a16="http://schemas.microsoft.com/office/drawing/2014/main" id="{809C8E22-9F8A-524C-51B1-A6A255F65594}"/>
+              </a:ext>
+            </a:extLst>
+          </p:cNvPr>
+          <p:cNvSpPr txBox="1"/>
+          <p:nvPr/>
+        </p:nvSpPr>
+        <p:spPr>
+          <a:xfrm>
+            <a:off x="0" y="6396335"/>
+            <a:ext cx="7686676" cy="461665"/>
+          </a:xfrm>
+          <a:custGeom>
+            <a:avLst/>
+            <a:gdLst>
+              <a:gd name="connsiteX0" fmla="*/ 0 w 6172200"/>
+              <a:gd name="connsiteY0" fmla="*/ 0 h 369332"/>
+              <a:gd name="connsiteX1" fmla="*/ 6172200 w 6172200"/>
+              <a:gd name="connsiteY1" fmla="*/ 0 h 369332"/>
+              <a:gd name="connsiteX2" fmla="*/ 6172200 w 6172200"/>
+              <a:gd name="connsiteY2" fmla="*/ 369332 h 369332"/>
+              <a:gd name="connsiteX3" fmla="*/ 0 w 6172200"/>
+              <a:gd name="connsiteY3" fmla="*/ 369332 h 369332"/>
+              <a:gd name="connsiteX4" fmla="*/ 0 w 6172200"/>
+              <a:gd name="connsiteY4" fmla="*/ 0 h 369332"/>
+              <a:gd name="connsiteX0" fmla="*/ 0 w 6172200"/>
+              <a:gd name="connsiteY0" fmla="*/ 0 h 369332"/>
+              <a:gd name="connsiteX1" fmla="*/ 5791200 w 6172200"/>
+              <a:gd name="connsiteY1" fmla="*/ 0 h 369332"/>
+              <a:gd name="connsiteX2" fmla="*/ 6172200 w 6172200"/>
+              <a:gd name="connsiteY2" fmla="*/ 369332 h 369332"/>
+              <a:gd name="connsiteX3" fmla="*/ 0 w 6172200"/>
+              <a:gd name="connsiteY3" fmla="*/ 369332 h 369332"/>
+              <a:gd name="connsiteX4" fmla="*/ 0 w 6172200"/>
+              <a:gd name="connsiteY4" fmla="*/ 0 h 369332"/>
+            </a:gdLst>
+            <a:ahLst/>
+            <a:cxnLst>
+              <a:cxn ang="0">
+                <a:pos x="connsiteX0" y="connsiteY0"/>
+              </a:cxn>
+              <a:cxn ang="0">
+                <a:pos x="connsiteX1" y="connsiteY1"/>
+              </a:cxn>
+              <a:cxn ang="0">
+                <a:pos x="connsiteX2" y="connsiteY2"/>
+              </a:cxn>
+              <a:cxn ang="0">
+                <a:pos x="connsiteX3" y="connsiteY3"/>
+              </a:cxn>
+              <a:cxn ang="0">
+                <a:pos x="connsiteX4" y="connsiteY4"/>
+              </a:cxn>
+            </a:cxnLst>
+            <a:rect l="l" t="t" r="r" b="b"/>
+            <a:pathLst>
+              <a:path w="6172200" h="369332">
+                <a:moveTo>
+                  <a:pt x="0" y="0"/>
+                </a:moveTo>
+                <a:lnTo>
+                  <a:pt x="5791200" y="0"/>
+                </a:lnTo>
+                <a:lnTo>
+                  <a:pt x="6172200" y="369332"/>
+                </a:lnTo>
+                <a:lnTo>
+                  <a:pt x="0" y="369332"/>
+                </a:lnTo>
+                <a:lnTo>
+                  <a:pt x="0" y="0"/>
+                </a:lnTo>
+                <a:close/>
+              </a:path>
+            </a:pathLst>
+          </a:custGeom>
+          <a:solidFill>
+            <a:schemeClr val="accent1">
+              <a:lumMod val="75000"/>
+            </a:schemeClr>
+          </a:solidFill>
+        </p:spPr>
+        <p:txBody>
+          <a:bodyPr wrap="square" rtlCol="0">
+            <a:spAutoFit/>
+          </a:bodyPr>
+          <a:lstStyle/>
+          <a:p>
+            <a:pPr algn="ctr"/>
+            <a:r>
+              <a:rPr lang="en-IN" sz="2400" spc="600" dirty="0">
                 <a:solidFill>
-                  <a:srgbClr val="262626"/>
+                  <a:schemeClr val="bg1"/>
                 </a:solidFill>
-                <a:latin typeface="Times New Roman"/>
+                <a:latin typeface="Gill Sans MT" panose="020B0502020104020203" pitchFamily="34" charset="0"/>
               </a:rPr>
-              <a:t>COLLEGE OF ENGINEERING (AUTONOMOUS)</a:t>
-            </a:r>
+              <a:t>LEARN . GROW . EXCEL</a:t>
+            </a:r>
+          </a:p>
+        </p:txBody>
+      </p:sp>
+      <p:sp>
+        <p:nvSpPr>
+          <p:cNvPr id="13" name="Rectangle 12">
+            <a:extLst>
+              <a:ext uri="{FF2B5EF4-FFF2-40B4-BE49-F238E27FC236}">
+                <a16:creationId xmlns:a16="http://schemas.microsoft.com/office/drawing/2014/main" id="{7BFAAF73-BB7C-8119-16B7-3028B1F54B48}"/>
+              </a:ext>
+            </a:extLst>
+          </p:cNvPr>
+          <p:cNvSpPr/>
+          <p:nvPr/>
+        </p:nvSpPr>
+        <p:spPr>
+          <a:xfrm>
+            <a:off x="566580" y="4922"/>
+            <a:ext cx="1152525" cy="1266998"/>
+          </a:xfrm>
+          <a:prstGeom prst="rect">
+            <a:avLst/>
+          </a:prstGeom>
+          <a:solidFill>
+            <a:schemeClr val="bg1"/>
+          </a:solidFill>
+          <a:ln>
+            <a:noFill/>
+          </a:ln>
+          <a:effectLst>
+            <a:outerShdw blurRad="50800" dist="38100" dir="2700000" algn="tl" rotWithShape="0">
+              <a:prstClr val="black">
+                <a:alpha val="40000"/>
+              </a:prstClr>
+            </a:outerShdw>
+          </a:effectLst>
+        </p:spPr>
+        <p:style>
+          <a:lnRef idx="2">
+            <a:schemeClr val="accent1">
+              <a:shade val="50000"/>
+            </a:schemeClr>
+          </a:lnRef>
+          <a:fillRef idx="1">
+            <a:schemeClr val="accent1"/>
+          </a:fillRef>
+          <a:effectRef idx="0">
+            <a:schemeClr val="accent1"/>
+          </a:effectRef>
+          <a:fontRef idx="minor">
+            <a:schemeClr val="lt1"/>
+          </a:fontRef>
+        </p:style>
+        <p:txBody>
+          <a:bodyPr rtlCol="0" anchor="ctr"/>
+          <a:lstStyle/>
+          <a:p>
+            <a:pPr algn="ctr"/>
+            <a:endParaRPr lang="en-IN"/>
           </a:p>
         </p:txBody>
       </p:sp>
       <p:pic>
         <p:nvPicPr>
-          <p:cNvPr id="5" name="Picture 4" descr="saintgits_logo.png"/>
+          <p:cNvPr id="15" name="Picture 14">
+            <a:extLst>
+              <a:ext uri="{FF2B5EF4-FFF2-40B4-BE49-F238E27FC236}">
+                <a16:creationId xmlns:a16="http://schemas.microsoft.com/office/drawing/2014/main" id="{43572182-79A2-0162-7F24-5C1225004FCC}"/>
+              </a:ext>
+            </a:extLst>
+          </p:cNvPr>
           <p:cNvPicPr>
             <a:picLocks noChangeAspect="1"/>
           </p:cNvPicPr>
           <p:nvPr/>
         </p:nvPicPr>
         <p:blipFill>
-          <a:blip r:embed="rId2"/>
+          <a:blip r:embed="rId2" cstate="print">
+            <a:extLst>
+              <a:ext uri="{28A0092B-C50C-407E-A947-70E740481C1C}">
+                <a14:useLocalDpi xmlns:a14="http://schemas.microsoft.com/office/drawing/2010/main" val="0"/>
+              </a:ext>
+            </a:extLst>
+          </a:blip>
           <a:stretch>
             <a:fillRect/>
           </a:stretch>
         </p:blipFill>
         <p:spPr>
           <a:xfrm>
-            <a:off x="667512" y="91440"/>
-            <a:ext cx="960120" cy="1088136"/>
+            <a:off x="664804" y="93382"/>
+            <a:ext cx="956075" cy="1090077"/>
           </a:xfrm>
           <a:prstGeom prst="rect">
             <a:avLst/>
@@ -3546,14 +4672,20 @@
       </p:pic>
       <p:sp>
         <p:nvSpPr>
-          <p:cNvPr id="6" name="TextBox 5"/>
+          <p:cNvPr id="18" name="TextBox 7">
+            <a:extLst>
+              <a:ext uri="{FF2B5EF4-FFF2-40B4-BE49-F238E27FC236}">
+                <a16:creationId xmlns:a16="http://schemas.microsoft.com/office/drawing/2014/main" id="{126F2344-E01F-EC68-0019-A76B93E23258}"/>
+              </a:ext>
+            </a:extLst>
+          </p:cNvPr>
           <p:cNvSpPr txBox="1"/>
           <p:nvPr/>
         </p:nvSpPr>
         <p:spPr>
           <a:xfrm>
-            <a:off x="0" y="6409944"/>
-            <a:ext cx="7690104" cy="457200"/>
+            <a:off x="1081253" y="4490662"/>
+            <a:ext cx="5380383" cy="1695977"/>
           </a:xfrm>
           <a:prstGeom prst="rect">
             <a:avLst/>
@@ -3561,38 +4693,132 @@
           <a:noFill/>
         </p:spPr>
         <p:txBody>
-          <a:bodyPr wrap="square">
+          <a:bodyPr wrap="square" rtlCol="0">
             <a:spAutoFit/>
           </a:bodyPr>
-          <a:lstStyle/>
-          <a:p>
-            <a:pPr algn="l">
-              <a:spcAft>
-                <a:spcPts val="600"/>
-              </a:spcAft>
-            </a:pPr>
-            <a:r>
-              <a:rPr sz="1600" b="0" i="0">
+          <a:lstStyle>
+            <a:defPPr>
+              <a:defRPr lang="en-US"/>
+            </a:defPPr>
+            <a:lvl1pPr marL="0" algn="l" defTabSz="914400" rtl="0" eaLnBrk="1" latinLnBrk="0" hangingPunct="1">
+              <a:defRPr sz="1800" kern="1200">
                 <a:solidFill>
-                  <a:srgbClr val="262626"/>
+                  <a:schemeClr val="tx1"/>
                 </a:solidFill>
-                <a:latin typeface="Times New Roman"/>
+                <a:latin typeface="+mn-lt"/>
+                <a:ea typeface="+mn-ea"/>
+                <a:cs typeface="+mn-cs"/>
+              </a:defRPr>
+            </a:lvl1pPr>
+            <a:lvl2pPr marL="457200" algn="l" defTabSz="914400" rtl="0" eaLnBrk="1" latinLnBrk="0" hangingPunct="1">
+              <a:defRPr sz="1800" kern="1200">
+                <a:solidFill>
+                  <a:schemeClr val="tx1"/>
+                </a:solidFill>
+                <a:latin typeface="+mn-lt"/>
+                <a:ea typeface="+mn-ea"/>
+                <a:cs typeface="+mn-cs"/>
+              </a:defRPr>
+            </a:lvl2pPr>
+            <a:lvl3pPr marL="914400" algn="l" defTabSz="914400" rtl="0" eaLnBrk="1" latinLnBrk="0" hangingPunct="1">
+              <a:defRPr sz="1800" kern="1200">
+                <a:solidFill>
+                  <a:schemeClr val="tx1"/>
+                </a:solidFill>
+                <a:latin typeface="+mn-lt"/>
+                <a:ea typeface="+mn-ea"/>
+                <a:cs typeface="+mn-cs"/>
+              </a:defRPr>
+            </a:lvl3pPr>
+            <a:lvl4pPr marL="1371600" algn="l" defTabSz="914400" rtl="0" eaLnBrk="1" latinLnBrk="0" hangingPunct="1">
+              <a:defRPr sz="1800" kern="1200">
+                <a:solidFill>
+                  <a:schemeClr val="tx1"/>
+                </a:solidFill>
+                <a:latin typeface="+mn-lt"/>
+                <a:ea typeface="+mn-ea"/>
+                <a:cs typeface="+mn-cs"/>
+              </a:defRPr>
+            </a:lvl4pPr>
+            <a:lvl5pPr marL="1828800" algn="l" defTabSz="914400" rtl="0" eaLnBrk="1" latinLnBrk="0" hangingPunct="1">
+              <a:defRPr sz="1800" kern="1200">
+                <a:solidFill>
+                  <a:schemeClr val="tx1"/>
+                </a:solidFill>
+                <a:latin typeface="+mn-lt"/>
+                <a:ea typeface="+mn-ea"/>
+                <a:cs typeface="+mn-cs"/>
+              </a:defRPr>
+            </a:lvl5pPr>
+            <a:lvl6pPr marL="2286000" algn="l" defTabSz="914400" rtl="0" eaLnBrk="1" latinLnBrk="0" hangingPunct="1">
+              <a:defRPr sz="1800" kern="1200">
+                <a:solidFill>
+                  <a:schemeClr val="tx1"/>
+                </a:solidFill>
+                <a:latin typeface="+mn-lt"/>
+                <a:ea typeface="+mn-ea"/>
+                <a:cs typeface="+mn-cs"/>
+              </a:defRPr>
+            </a:lvl6pPr>
+            <a:lvl7pPr marL="2743200" algn="l" defTabSz="914400" rtl="0" eaLnBrk="1" latinLnBrk="0" hangingPunct="1">
+              <a:defRPr sz="1800" kern="1200">
+                <a:solidFill>
+                  <a:schemeClr val="tx1"/>
+                </a:solidFill>
+                <a:latin typeface="+mn-lt"/>
+                <a:ea typeface="+mn-ea"/>
+                <a:cs typeface="+mn-cs"/>
+              </a:defRPr>
+            </a:lvl7pPr>
+            <a:lvl8pPr marL="3200400" algn="l" defTabSz="914400" rtl="0" eaLnBrk="1" latinLnBrk="0" hangingPunct="1">
+              <a:defRPr sz="1800" kern="1200">
+                <a:solidFill>
+                  <a:schemeClr val="tx1"/>
+                </a:solidFill>
+                <a:latin typeface="+mn-lt"/>
+                <a:ea typeface="+mn-ea"/>
+                <a:cs typeface="+mn-cs"/>
+              </a:defRPr>
+            </a:lvl8pPr>
+            <a:lvl9pPr marL="3657600" algn="l" defTabSz="914400" rtl="0" eaLnBrk="1" latinLnBrk="0" hangingPunct="1">
+              <a:defRPr sz="1800" kern="1200">
+                <a:solidFill>
+                  <a:schemeClr val="tx1"/>
+                </a:solidFill>
+                <a:latin typeface="+mn-lt"/>
+                <a:ea typeface="+mn-ea"/>
+                <a:cs typeface="+mn-cs"/>
+              </a:defRPr>
+            </a:lvl9pPr>
+          </a:lstStyle>
+          <a:p>
+            <a:r>
+              <a:rPr sz="1600" b="1">
+                <a:latin typeface="Book Antiqua"/>
               </a:rPr>
-              <a:t>LEARN . GROW . EXCEL</a:t>
-            </a:r>
-          </a:p>
-        </p:txBody>
-      </p:sp>
-      <p:sp>
-        <p:nvSpPr>
-          <p:cNvPr id="7" name="TextBox 6"/>
+              <a:t>PRESENTED BY:
+	Sidharth Sajith
+	Tharun Oommen Jacob</a:t>
+            </a:r>
+          </a:p>
+        </p:txBody>
+      </p:sp>
+      <p:sp>
+        <p:nvSpPr>
+          <p:cNvPr id="20" name="TextBox 3">
+            <a:extLst>
+              <a:ext uri="{FF2B5EF4-FFF2-40B4-BE49-F238E27FC236}">
+                <a16:creationId xmlns:a16="http://schemas.microsoft.com/office/drawing/2014/main" id="{E839D3D0-80FC-A44B-11EC-BE63821A96AD}"/>
+              </a:ext>
+            </a:extLst>
+          </p:cNvPr>
           <p:cNvSpPr txBox="1"/>
           <p:nvPr/>
         </p:nvSpPr>
         <p:spPr>
           <a:xfrm>
-            <a:off x="7690104" y="6409944"/>
-            <a:ext cx="4498848" cy="457200"/>
+            <a:off x="7425093" y="4490662"/>
+            <a:ext cx="4236720" cy="1631216"/>
           </a:xfrm>
           <a:prstGeom prst="rect">
             <a:avLst/>
@@ -3600,24 +4826,152 @@
           <a:noFill/>
         </p:spPr>
         <p:txBody>
-          <a:bodyPr wrap="square">
+          <a:bodyPr wrap="square" rtlCol="0">
             <a:spAutoFit/>
           </a:bodyPr>
-          <a:lstStyle/>
-          <a:p>
-            <a:pPr algn="r">
-              <a:spcAft>
-                <a:spcPts val="600"/>
-              </a:spcAft>
-            </a:pPr>
-            <a:r>
-              <a:rPr sz="1200" b="0" i="0">
+          <a:lstStyle>
+            <a:defPPr>
+              <a:defRPr lang="en-US"/>
+            </a:defPPr>
+            <a:lvl1pPr marL="0" algn="l" defTabSz="914400" rtl="0" eaLnBrk="1" latinLnBrk="0" hangingPunct="1">
+              <a:defRPr sz="1800" kern="1200">
                 <a:solidFill>
-                  <a:srgbClr val="262626"/>
+                  <a:schemeClr val="tx1"/>
                 </a:solidFill>
-                <a:latin typeface="Times New Roman"/>
+                <a:latin typeface="+mn-lt"/>
+                <a:ea typeface="+mn-ea"/>
+                <a:cs typeface="+mn-cs"/>
+              </a:defRPr>
+            </a:lvl1pPr>
+            <a:lvl2pPr marL="457200" algn="l" defTabSz="914400" rtl="0" eaLnBrk="1" latinLnBrk="0" hangingPunct="1">
+              <a:defRPr sz="1800" kern="1200">
+                <a:solidFill>
+                  <a:schemeClr val="tx1"/>
+                </a:solidFill>
+                <a:latin typeface="+mn-lt"/>
+                <a:ea typeface="+mn-ea"/>
+                <a:cs typeface="+mn-cs"/>
+              </a:defRPr>
+            </a:lvl2pPr>
+            <a:lvl3pPr marL="914400" algn="l" defTabSz="914400" rtl="0" eaLnBrk="1" latinLnBrk="0" hangingPunct="1">
+              <a:defRPr sz="1800" kern="1200">
+                <a:solidFill>
+                  <a:schemeClr val="tx1"/>
+                </a:solidFill>
+                <a:latin typeface="+mn-lt"/>
+                <a:ea typeface="+mn-ea"/>
+                <a:cs typeface="+mn-cs"/>
+              </a:defRPr>
+            </a:lvl3pPr>
+            <a:lvl4pPr marL="1371600" algn="l" defTabSz="914400" rtl="0" eaLnBrk="1" latinLnBrk="0" hangingPunct="1">
+              <a:defRPr sz="1800" kern="1200">
+                <a:solidFill>
+                  <a:schemeClr val="tx1"/>
+                </a:solidFill>
+                <a:latin typeface="+mn-lt"/>
+                <a:ea typeface="+mn-ea"/>
+                <a:cs typeface="+mn-cs"/>
+              </a:defRPr>
+            </a:lvl4pPr>
+            <a:lvl5pPr marL="1828800" algn="l" defTabSz="914400" rtl="0" eaLnBrk="1" latinLnBrk="0" hangingPunct="1">
+              <a:defRPr sz="1800" kern="1200">
+                <a:solidFill>
+                  <a:schemeClr val="tx1"/>
+                </a:solidFill>
+                <a:latin typeface="+mn-lt"/>
+                <a:ea typeface="+mn-ea"/>
+                <a:cs typeface="+mn-cs"/>
+              </a:defRPr>
+            </a:lvl5pPr>
+            <a:lvl6pPr marL="2286000" algn="l" defTabSz="914400" rtl="0" eaLnBrk="1" latinLnBrk="0" hangingPunct="1">
+              <a:defRPr sz="1800" kern="1200">
+                <a:solidFill>
+                  <a:schemeClr val="tx1"/>
+                </a:solidFill>
+                <a:latin typeface="+mn-lt"/>
+                <a:ea typeface="+mn-ea"/>
+                <a:cs typeface="+mn-cs"/>
+              </a:defRPr>
+            </a:lvl6pPr>
+            <a:lvl7pPr marL="2743200" algn="l" defTabSz="914400" rtl="0" eaLnBrk="1" latinLnBrk="0" hangingPunct="1">
+              <a:defRPr sz="1800" kern="1200">
+                <a:solidFill>
+                  <a:schemeClr val="tx1"/>
+                </a:solidFill>
+                <a:latin typeface="+mn-lt"/>
+                <a:ea typeface="+mn-ea"/>
+                <a:cs typeface="+mn-cs"/>
+              </a:defRPr>
+            </a:lvl7pPr>
+            <a:lvl8pPr marL="3200400" algn="l" defTabSz="914400" rtl="0" eaLnBrk="1" latinLnBrk="0" hangingPunct="1">
+              <a:defRPr sz="1800" kern="1200">
+                <a:solidFill>
+                  <a:schemeClr val="tx1"/>
+                </a:solidFill>
+                <a:latin typeface="+mn-lt"/>
+                <a:ea typeface="+mn-ea"/>
+                <a:cs typeface="+mn-cs"/>
+              </a:defRPr>
+            </a:lvl8pPr>
+            <a:lvl9pPr marL="3657600" algn="l" defTabSz="914400" rtl="0" eaLnBrk="1" latinLnBrk="0" hangingPunct="1">
+              <a:defRPr sz="1800" kern="1200">
+                <a:solidFill>
+                  <a:schemeClr val="tx1"/>
+                </a:solidFill>
+                <a:latin typeface="+mn-lt"/>
+                <a:ea typeface="+mn-ea"/>
+                <a:cs typeface="+mn-cs"/>
+              </a:defRPr>
+            </a:lvl9pPr>
+          </a:lstStyle>
+          <a:p>
+            <a:r>
+              <a:rPr lang="en-US" sz="2000" b="1" dirty="0">
+                <a:latin typeface="Book Antiqua" panose="02040602050305030304" pitchFamily="18" charset="0"/>
+                <a:cs typeface="Times New Roman" panose="02020603050405020304" pitchFamily="18" charset="0"/>
               </a:rPr>
-              <a:t>SAINTGITS COLLEGE (AUTONOMOUS)</a:t>
+              <a:t>SUPERVISOR: </a:t>
+            </a:r>
+          </a:p>
+          <a:p>
+            <a:r>
+              <a:rPr lang="en-US" sz="2000" b="1" dirty="0">
+                <a:latin typeface="Book Antiqua" panose="02040602050305030304" pitchFamily="18" charset="0"/>
+                <a:cs typeface="Times New Roman" panose="02020603050405020304" pitchFamily="18" charset="0"/>
+              </a:rPr>
+              <a:t>	Er. </a:t>
+            </a:r>
+            <a:r>
+              <a:rPr lang="en-US" sz="2000" b="1" dirty="0" err="1">
+                <a:latin typeface="Book Antiqua" panose="02040602050305030304" pitchFamily="18" charset="0"/>
+                <a:cs typeface="Times New Roman" panose="02020603050405020304" pitchFamily="18" charset="0"/>
+              </a:rPr>
+              <a:t>Jittu</a:t>
+            </a:r>
+            <a:r>
+              <a:rPr lang="en-US" sz="2000" b="1" dirty="0">
+                <a:latin typeface="Book Antiqua" panose="02040602050305030304" pitchFamily="18" charset="0"/>
+                <a:cs typeface="Times New Roman" panose="02020603050405020304" pitchFamily="18" charset="0"/>
+              </a:rPr>
+              <a:t> George Eapen</a:t>
+            </a:r>
+          </a:p>
+          <a:p>
+            <a:r>
+              <a:rPr lang="en-US" sz="2000" dirty="0">
+                <a:latin typeface="Book Antiqua" panose="02040602050305030304" pitchFamily="18" charset="0"/>
+                <a:cs typeface="Times New Roman" panose="02020603050405020304" pitchFamily="18" charset="0"/>
+              </a:rPr>
+              <a:t>	Assistant Professor</a:t>
+            </a:r>
+          </a:p>
+          <a:p>
+            <a:r>
+              <a:rPr lang="en-US" sz="2000" dirty="0">
+                <a:latin typeface="Book Antiqua" panose="02040602050305030304" pitchFamily="18" charset="0"/>
+                <a:cs typeface="Times New Roman" panose="02020603050405020304" pitchFamily="18" charset="0"/>
+              </a:rPr>
+              <a:t>	Department of Electronics 	Engineering</a:t>
             </a:r>
           </a:p>
         </p:txBody>
@@ -3630,8 +4984,8 @@
 </p:sld>
 </file>
 
-<file path=ppt/slides/slide2.xml><?xml version="1.0" encoding="utf-8"?>
-<p:sld xmlns:a="http://schemas.openxmlformats.org/drawingml/2006/main" xmlns:p="http://schemas.openxmlformats.org/presentationml/2006/main" xmlns:r="http://schemas.openxmlformats.org/officeDocument/2006/relationships">
+<file path=ppt/slides/slide3.xml><?xml version="1.0" encoding="utf-8"?>
+<p:sld xmlns:a="http://schemas.openxmlformats.org/drawingml/2006/main" xmlns:r="http://schemas.openxmlformats.org/officeDocument/2006/relationships" xmlns:p="http://schemas.openxmlformats.org/presentationml/2006/main">
   <p:cSld>
     <p:spTree>
       <p:nvGrpSpPr>
@@ -3639,7 +4993,14 @@
         <p:cNvGrpSpPr/>
         <p:nvPr/>
       </p:nvGrpSpPr>
-      <p:grpSpPr/>
+      <p:grpSpPr>
+        <a:xfrm>
+          <a:off x="0" y="0"/>
+          <a:ext cx="0" cy="0"/>
+          <a:chOff x="0" y="0"/>
+          <a:chExt cx="0" cy="0"/>
+        </a:xfrm>
+      </p:grpSpPr>
       <p:sp>
         <p:nvSpPr>
           <p:cNvPr id="2" name="Title 1"/>
@@ -3699,45 +5060,6 @@
       </p:pic>
       <p:sp>
         <p:nvSpPr>
-          <p:cNvPr id="4" name="TextBox 3"/>
-          <p:cNvSpPr txBox="1"/>
-          <p:nvPr/>
-        </p:nvSpPr>
-        <p:spPr>
-          <a:xfrm>
-            <a:off x="0" y="6510528"/>
-            <a:ext cx="7690104" cy="338328"/>
-          </a:xfrm>
-          <a:prstGeom prst="rect">
-            <a:avLst/>
-          </a:prstGeom>
-          <a:noFill/>
-        </p:spPr>
-        <p:txBody>
-          <a:bodyPr wrap="square">
-            <a:spAutoFit/>
-          </a:bodyPr>
-          <a:lstStyle/>
-          <a:p>
-            <a:pPr algn="l">
-              <a:spcAft>
-                <a:spcPts val="600"/>
-              </a:spcAft>
-            </a:pPr>
-            <a:r>
-              <a:rPr sz="1600" b="0" i="0">
-                <a:solidFill>
-                  <a:srgbClr val="262626"/>
-                </a:solidFill>
-                <a:latin typeface="Times New Roman"/>
-              </a:rPr>
-              <a:t>LEARN . GROW . EXCEL</a:t>
-            </a:r>
-          </a:p>
-        </p:txBody>
-      </p:sp>
-      <p:sp>
-        <p:nvSpPr>
           <p:cNvPr id="5" name="TextBox 4"/>
           <p:cNvSpPr txBox="1"/>
           <p:nvPr/>
@@ -3784,7 +5106,7 @@
         <p:spPr>
           <a:xfrm>
             <a:off x="274320" y="1051560"/>
-            <a:ext cx="7040880" cy="5120640"/>
+            <a:ext cx="7040880" cy="4062651"/>
           </a:xfrm>
           <a:prstGeom prst="rect">
             <a:avLst/>
@@ -3797,83 +5119,16 @@
           </a:bodyPr>
           <a:lstStyle/>
           <a:p>
-            <a:pPr algn="l">
-              <a:spcAft>
-                <a:spcPts val="600"/>
-              </a:spcAft>
-            </a:pPr>
-            <a:r>
-              <a:rPr sz="1700" b="0" i="0">
-                <a:solidFill>
-                  <a:srgbClr val="262626"/>
-                </a:solidFill>
-                <a:latin typeface="Times New Roman"/>
+            <a:pPr lvl="0"/>
+            <a:r>
+              <a:rPr sz="1800" b="1">
+                <a:latin typeface="Book Antiqua"/>
               </a:rPr>
-              <a:t>•  Wellness data is siloed inside wearables — no open export, no live feed a student system can build on.</a:t>
-            </a:r>
-          </a:p>
-          <a:p>
-            <a:pPr algn="l">
-              <a:spcAft>
-                <a:spcPts val="600"/>
-              </a:spcAft>
-            </a:pPr>
-            <a:r>
-              <a:rPr sz="1700" b="0" i="0">
-                <a:solidFill>
-                  <a:srgbClr val="262626"/>
-                </a:solidFill>
-                <a:latin typeface="Times New Roman"/>
-              </a:rPr>
-              <a:t>•  Generic voice and chat assistants hallucinate health advice; none of it is grounded in live physiology.</a:t>
-            </a:r>
-          </a:p>
-          <a:p>
-            <a:pPr algn="l">
-              <a:spcAft>
-                <a:spcPts val="600"/>
-              </a:spcAft>
-            </a:pPr>
-            <a:r>
-              <a:rPr sz="1700" b="0" i="0">
-                <a:solidFill>
-                  <a:srgbClr val="262626"/>
-                </a:solidFill>
-                <a:latin typeface="Times New Roman"/>
-              </a:rPr>
-              <a:t>•  Posture, sedentary-time and room-comfort risks go undetected in real time at the study desk.</a:t>
-            </a:r>
-          </a:p>
-          <a:p>
-            <a:pPr algn="l">
-              <a:spcAft>
-                <a:spcPts val="600"/>
-              </a:spcAft>
-            </a:pPr>
-            <a:r>
-              <a:rPr sz="1700" b="0" i="0">
-                <a:solidFill>
-                  <a:srgbClr val="262626"/>
-                </a:solidFill>
-                <a:latin typeface="Times New Roman"/>
-              </a:rPr>
-              <a:t>•  Classroom embedded work stops at demo boards — the RTOS-plus-IoT integration gap is the real learning gap.</a:t>
-            </a:r>
-          </a:p>
-          <a:p>
-            <a:pPr algn="l">
-              <a:spcAft>
-                <a:spcPts val="600"/>
-              </a:spcAft>
-            </a:pPr>
-            <a:r>
-              <a:rPr sz="1700" b="0" i="0">
-                <a:solidFill>
-                  <a:srgbClr val="262626"/>
-                </a:solidFill>
-                <a:latin typeface="Times New Roman"/>
-              </a:rPr>
-              <a:t>•  Scope is honest: no clinical claims. The need is an open, explainable wellness assistant that reacts to live sensor state — and says why.</a:t>
+              <a:t>Live wearable data is difficult to carry into a custom application.
+Generic AI can give advice without current context.
+A cached value can look current unless source and freshness are visible.
+Our approach: one wellness mirror, two clearly separated evidence lanes, a strict telemetry contract and a visible grounding verdict.
+Scope: wellness assistance only — never diagnosis or clinical alerting.</a:t>
             </a:r>
           </a:p>
         </p:txBody>
@@ -3930,13 +5185,119 @@
               </a:spcAft>
             </a:pPr>
             <a:r>
-              <a:rPr sz="1400" b="0" i="1">
+              <a:rPr sz="1600" b="0" i="1">
                 <a:solidFill>
                   <a:srgbClr val="262626"/>
                 </a:solidFill>
                 <a:latin typeface="Times New Roman"/>
               </a:rPr>
-              <a:t>System at a glance — sensing node to mirror. Full diagram in METHODOLOGY.</a:t>
+              <a:t>The mirror never hides whether a value is genuine, synthetic, fresh or stale.</a:t>
+            </a:r>
+          </a:p>
+        </p:txBody>
+      </p:sp>
+      <p:sp>
+        <p:nvSpPr>
+          <p:cNvPr id="10" name="TextBox 9">
+            <a:extLst>
+              <a:ext uri="{FF2B5EF4-FFF2-40B4-BE49-F238E27FC236}">
+                <a16:creationId xmlns:a16="http://schemas.microsoft.com/office/drawing/2014/main" id="{697FA108-A137-94FB-CB01-7BA0C93BE603}"/>
+              </a:ext>
+            </a:extLst>
+          </p:cNvPr>
+          <p:cNvSpPr txBox="1"/>
+          <p:nvPr/>
+        </p:nvSpPr>
+        <p:spPr>
+          <a:xfrm>
+            <a:off x="0" y="6396335"/>
+            <a:ext cx="7686676" cy="461665"/>
+          </a:xfrm>
+          <a:custGeom>
+            <a:avLst/>
+            <a:gdLst>
+              <a:gd name="connsiteX0" fmla="*/ 0 w 6172200"/>
+              <a:gd name="connsiteY0" fmla="*/ 0 h 369332"/>
+              <a:gd name="connsiteX1" fmla="*/ 6172200 w 6172200"/>
+              <a:gd name="connsiteY1" fmla="*/ 0 h 369332"/>
+              <a:gd name="connsiteX2" fmla="*/ 6172200 w 6172200"/>
+              <a:gd name="connsiteY2" fmla="*/ 369332 h 369332"/>
+              <a:gd name="connsiteX3" fmla="*/ 0 w 6172200"/>
+              <a:gd name="connsiteY3" fmla="*/ 369332 h 369332"/>
+              <a:gd name="connsiteX4" fmla="*/ 0 w 6172200"/>
+              <a:gd name="connsiteY4" fmla="*/ 0 h 369332"/>
+              <a:gd name="connsiteX0" fmla="*/ 0 w 6172200"/>
+              <a:gd name="connsiteY0" fmla="*/ 0 h 369332"/>
+              <a:gd name="connsiteX1" fmla="*/ 5791200 w 6172200"/>
+              <a:gd name="connsiteY1" fmla="*/ 0 h 369332"/>
+              <a:gd name="connsiteX2" fmla="*/ 6172200 w 6172200"/>
+              <a:gd name="connsiteY2" fmla="*/ 369332 h 369332"/>
+              <a:gd name="connsiteX3" fmla="*/ 0 w 6172200"/>
+              <a:gd name="connsiteY3" fmla="*/ 369332 h 369332"/>
+              <a:gd name="connsiteX4" fmla="*/ 0 w 6172200"/>
+              <a:gd name="connsiteY4" fmla="*/ 0 h 369332"/>
+            </a:gdLst>
+            <a:ahLst/>
+            <a:cxnLst>
+              <a:cxn ang="0">
+                <a:pos x="connsiteX0" y="connsiteY0"/>
+              </a:cxn>
+              <a:cxn ang="0">
+                <a:pos x="connsiteX1" y="connsiteY1"/>
+              </a:cxn>
+              <a:cxn ang="0">
+                <a:pos x="connsiteX2" y="connsiteY2"/>
+              </a:cxn>
+              <a:cxn ang="0">
+                <a:pos x="connsiteX3" y="connsiteY3"/>
+              </a:cxn>
+              <a:cxn ang="0">
+                <a:pos x="connsiteX4" y="connsiteY4"/>
+              </a:cxn>
+            </a:cxnLst>
+            <a:rect l="l" t="t" r="r" b="b"/>
+            <a:pathLst>
+              <a:path w="6172200" h="369332">
+                <a:moveTo>
+                  <a:pt x="0" y="0"/>
+                </a:moveTo>
+                <a:lnTo>
+                  <a:pt x="5791200" y="0"/>
+                </a:lnTo>
+                <a:lnTo>
+                  <a:pt x="6172200" y="369332"/>
+                </a:lnTo>
+                <a:lnTo>
+                  <a:pt x="0" y="369332"/>
+                </a:lnTo>
+                <a:lnTo>
+                  <a:pt x="0" y="0"/>
+                </a:lnTo>
+                <a:close/>
+              </a:path>
+            </a:pathLst>
+          </a:custGeom>
+          <a:solidFill>
+            <a:schemeClr val="accent1">
+              <a:lumMod val="75000"/>
+            </a:schemeClr>
+          </a:solidFill>
+        </p:spPr>
+        <p:txBody>
+          <a:bodyPr wrap="square" rtlCol="0">
+            <a:spAutoFit/>
+          </a:bodyPr>
+          <a:lstStyle/>
+          <a:p>
+            <a:pPr algn="ctr"/>
+            <a:r>
+              <a:rPr lang="en-IN" sz="2400" spc="600" dirty="0">
+                <a:solidFill>
+                  <a:schemeClr val="bg1"/>
+                </a:solidFill>
+                <a:latin typeface="Gill Sans MT" panose="020B0502020104020203" pitchFamily="34" charset="0"/>
+              </a:rPr>
+              <a:t>LEARN . GROW . EXCEL</a:t>
             </a:r>
           </a:p>
         </p:txBody>
@@ -3949,8 +5310,8 @@
 </p:sld>
 </file>
 
-<file path=ppt/slides/slide3.xml><?xml version="1.0" encoding="utf-8"?>
-<p:sld xmlns:a="http://schemas.openxmlformats.org/drawingml/2006/main" xmlns:p="http://schemas.openxmlformats.org/presentationml/2006/main" xmlns:r="http://schemas.openxmlformats.org/officeDocument/2006/relationships">
+<file path=ppt/slides/slide4.xml><?xml version="1.0" encoding="utf-8"?>
+<p:sld xmlns:a="http://schemas.openxmlformats.org/drawingml/2006/main" xmlns:r="http://schemas.openxmlformats.org/officeDocument/2006/relationships" xmlns:p="http://schemas.openxmlformats.org/presentationml/2006/main">
   <p:cSld>
     <p:spTree>
       <p:nvGrpSpPr>
@@ -3958,7 +5319,14 @@
         <p:cNvGrpSpPr/>
         <p:nvPr/>
       </p:nvGrpSpPr>
-      <p:grpSpPr/>
+      <p:grpSpPr>
+        <a:xfrm>
+          <a:off x="0" y="0"/>
+          <a:ext cx="0" cy="0"/>
+          <a:chOff x="0" y="0"/>
+          <a:chExt cx="0" cy="0"/>
+        </a:xfrm>
+      </p:grpSpPr>
       <p:sp>
         <p:nvSpPr>
           <p:cNvPr id="2" name="Title 1"/>
@@ -4018,45 +5386,6 @@
       </p:pic>
       <p:sp>
         <p:nvSpPr>
-          <p:cNvPr id="4" name="TextBox 3"/>
-          <p:cNvSpPr txBox="1"/>
-          <p:nvPr/>
-        </p:nvSpPr>
-        <p:spPr>
-          <a:xfrm>
-            <a:off x="0" y="6510528"/>
-            <a:ext cx="7690104" cy="338328"/>
-          </a:xfrm>
-          <a:prstGeom prst="rect">
-            <a:avLst/>
-          </a:prstGeom>
-          <a:noFill/>
-        </p:spPr>
-        <p:txBody>
-          <a:bodyPr wrap="square">
-            <a:spAutoFit/>
-          </a:bodyPr>
-          <a:lstStyle/>
-          <a:p>
-            <a:pPr algn="l">
-              <a:spcAft>
-                <a:spcPts val="600"/>
-              </a:spcAft>
-            </a:pPr>
-            <a:r>
-              <a:rPr sz="1600" b="0" i="0">
-                <a:solidFill>
-                  <a:srgbClr val="262626"/>
-                </a:solidFill>
-                <a:latin typeface="Times New Roman"/>
-              </a:rPr>
-              <a:t>LEARN . GROW . EXCEL</a:t>
-            </a:r>
-          </a:p>
-        </p:txBody>
-      </p:sp>
-      <p:sp>
-        <p:nvSpPr>
           <p:cNvPr id="5" name="TextBox 4"/>
           <p:cNvSpPr txBox="1"/>
           <p:nvPr/>
@@ -4103,7 +5432,7 @@
         <p:spPr>
           <a:xfrm>
             <a:off x="274320" y="1051560"/>
-            <a:ext cx="11612880" cy="5212080"/>
+            <a:ext cx="11612880" cy="3785652"/>
           </a:xfrm>
           <a:prstGeom prst="rect">
             <a:avLst/>
@@ -4116,83 +5445,163 @@
           </a:bodyPr>
           <a:lstStyle/>
           <a:p>
-            <a:pPr algn="l">
-              <a:spcAft>
-                <a:spcPts val="1000"/>
-              </a:spcAft>
-            </a:pPr>
-            <a:r>
-              <a:rPr sz="1700" b="0" i="0">
+            <a:r>
+              <a:t>1. FreeRTOS control architecture</a:t>
+            </a:r>
+          </a:p>
+          <a:p>
+            <a:r>
+              <a:t>Real v11 tasks, queue, mutex and timing diagnostics in an embedded node.</a:t>
+            </a:r>
+          </a:p>
+          <a:p/>
+          <a:p>
+            <a:r>
+              <a:t>2. Genuine wearable lane &amp; direct ingestion</a:t>
+            </a:r>
+          </a:p>
+          <a:p>
+            <a:r>
+              <a:t>Huawei Band 6 → Huawei Health → authenticated receiver → mirror (synthetic data discarded).</a:t>
+            </a:r>
+          </a:p>
+          <a:p/>
+          <a:p>
+            <a:r>
+              <a:t>3. Dynamic in-app lane switcher</a:t>
+            </a:r>
+          </a:p>
+          <a:p>
+            <a:r>
+              <a:t>Seamless one-click toggle in the mirror UI between Band Mode (wearable) and RTOS Mode.</a:t>
+            </a:r>
+          </a:p>
+          <a:p/>
+          <a:p>
+            <a:r>
+              <a:t>4. Conversational, sensor-grounded AI</a:t>
+            </a:r>
+          </a:p>
+          <a:p>
+            <a:r>
+              <a:t>ChatGPT-style natural assistant with actionable health suggestions and machine-checked grounding.</a:t>
+            </a:r>
+          </a:p>
+          <a:p/>
+          <a:p>
+            <a:r>
+              <a:t>5. Computer-vision mirror presence</a:t>
+            </a:r>
+          </a:p>
+          <a:p>
+            <a:r>
+              <a:t>Camera motion detection: continuous 5-second presence triggers an automated spoken greeting.</a:t>
+            </a:r>
+          </a:p>
+        </p:txBody>
+      </p:sp>
+      <p:sp>
+        <p:nvSpPr>
+          <p:cNvPr id="8" name="TextBox 7">
+            <a:extLst>
+              <a:ext uri="{FF2B5EF4-FFF2-40B4-BE49-F238E27FC236}">
+                <a16:creationId xmlns:a16="http://schemas.microsoft.com/office/drawing/2014/main" id="{E75DE6F9-BB06-9D08-33BE-A91F6BBEFC28}"/>
+              </a:ext>
+            </a:extLst>
+          </p:cNvPr>
+          <p:cNvSpPr txBox="1"/>
+          <p:nvPr/>
+        </p:nvSpPr>
+        <p:spPr>
+          <a:xfrm>
+            <a:off x="0" y="6396335"/>
+            <a:ext cx="7686676" cy="461665"/>
+          </a:xfrm>
+          <a:custGeom>
+            <a:avLst/>
+            <a:gdLst>
+              <a:gd name="connsiteX0" fmla="*/ 0 w 6172200"/>
+              <a:gd name="connsiteY0" fmla="*/ 0 h 369332"/>
+              <a:gd name="connsiteX1" fmla="*/ 6172200 w 6172200"/>
+              <a:gd name="connsiteY1" fmla="*/ 0 h 369332"/>
+              <a:gd name="connsiteX2" fmla="*/ 6172200 w 6172200"/>
+              <a:gd name="connsiteY2" fmla="*/ 369332 h 369332"/>
+              <a:gd name="connsiteX3" fmla="*/ 0 w 6172200"/>
+              <a:gd name="connsiteY3" fmla="*/ 369332 h 369332"/>
+              <a:gd name="connsiteX4" fmla="*/ 0 w 6172200"/>
+              <a:gd name="connsiteY4" fmla="*/ 0 h 369332"/>
+              <a:gd name="connsiteX0" fmla="*/ 0 w 6172200"/>
+              <a:gd name="connsiteY0" fmla="*/ 0 h 369332"/>
+              <a:gd name="connsiteX1" fmla="*/ 5791200 w 6172200"/>
+              <a:gd name="connsiteY1" fmla="*/ 0 h 369332"/>
+              <a:gd name="connsiteX2" fmla="*/ 6172200 w 6172200"/>
+              <a:gd name="connsiteY2" fmla="*/ 369332 h 369332"/>
+              <a:gd name="connsiteX3" fmla="*/ 0 w 6172200"/>
+              <a:gd name="connsiteY3" fmla="*/ 369332 h 369332"/>
+              <a:gd name="connsiteX4" fmla="*/ 0 w 6172200"/>
+              <a:gd name="connsiteY4" fmla="*/ 0 h 369332"/>
+            </a:gdLst>
+            <a:ahLst/>
+            <a:cxnLst>
+              <a:cxn ang="0">
+                <a:pos x="connsiteX0" y="connsiteY0"/>
+              </a:cxn>
+              <a:cxn ang="0">
+                <a:pos x="connsiteX1" y="connsiteY1"/>
+              </a:cxn>
+              <a:cxn ang="0">
+                <a:pos x="connsiteX2" y="connsiteY2"/>
+              </a:cxn>
+              <a:cxn ang="0">
+                <a:pos x="connsiteX3" y="connsiteY3"/>
+              </a:cxn>
+              <a:cxn ang="0">
+                <a:pos x="connsiteX4" y="connsiteY4"/>
+              </a:cxn>
+            </a:cxnLst>
+            <a:rect l="l" t="t" r="r" b="b"/>
+            <a:pathLst>
+              <a:path w="6172200" h="369332">
+                <a:moveTo>
+                  <a:pt x="0" y="0"/>
+                </a:moveTo>
+                <a:lnTo>
+                  <a:pt x="5791200" y="0"/>
+                </a:lnTo>
+                <a:lnTo>
+                  <a:pt x="6172200" y="369332"/>
+                </a:lnTo>
+                <a:lnTo>
+                  <a:pt x="0" y="369332"/>
+                </a:lnTo>
+                <a:lnTo>
+                  <a:pt x="0" y="0"/>
+                </a:lnTo>
+                <a:close/>
+              </a:path>
+            </a:pathLst>
+          </a:custGeom>
+          <a:solidFill>
+            <a:schemeClr val="accent1">
+              <a:lumMod val="75000"/>
+            </a:schemeClr>
+          </a:solidFill>
+        </p:spPr>
+        <p:txBody>
+          <a:bodyPr wrap="square" rtlCol="0">
+            <a:spAutoFit/>
+          </a:bodyPr>
+          <a:lstStyle/>
+          <a:p>
+            <a:pPr algn="ctr"/>
+            <a:r>
+              <a:rPr lang="en-IN" sz="2400" spc="600" dirty="0">
                 <a:solidFill>
-                  <a:srgbClr val="262626"/>
+                  <a:schemeClr val="bg1"/>
                 </a:solidFill>
-                <a:latin typeface="Times New Roman"/>
+                <a:latin typeface="Gill Sans MT" panose="020B0502020104020203" pitchFamily="34" charset="0"/>
               </a:rPr>
-              <a:t>1. RTOS SENSING NODE — FreeRTOS tasks plus queues on ESP32 (sensor / comms / alert tasks, vTaskDelay pacing, no delay() spaghetti).</a:t>
-            </a:r>
-          </a:p>
-          <a:p>
-            <a:pPr algn="l">
-              <a:spcAft>
-                <a:spcPts val="1000"/>
-              </a:spcAft>
-            </a:pPr>
-            <a:r>
-              <a:rPr sz="1700" b="0" i="0">
-                <a:solidFill>
-                  <a:srgbClr val="262626"/>
-                </a:solidFill>
-                <a:latin typeface="Times New Roman"/>
-              </a:rPr>
-              <a:t>2. IoT TELEMETRY PIPELINE — live newline-JSON stream off-device to the laptop dashboard and CSV log; serial first, WiFi bridge next.</a:t>
-            </a:r>
-          </a:p>
-          <a:p>
-            <a:pPr algn="l">
-              <a:spcAft>
-                <a:spcPts val="1000"/>
-              </a:spcAft>
-            </a:pPr>
-            <a:r>
-              <a:rPr sz="1700" b="0" i="0">
-                <a:solidFill>
-                  <a:srgbClr val="262626"/>
-                </a:solidFill>
-                <a:latin typeface="Times New Roman"/>
-              </a:rPr>
-              <a:t>3. EMBEDDED SENSOR DESIGN — I2C MPU6050 plus HC-SR04, DHT22 on GPIO13, button on GPIO4, buzzer on GPIO17; divider-protected echo pin.</a:t>
-            </a:r>
-          </a:p>
-          <a:p>
-            <a:pPr algn="l">
-              <a:spcAft>
-                <a:spcPts val="1000"/>
-              </a:spcAft>
-            </a:pPr>
-            <a:r>
-              <a:rPr sz="1700" b="0" i="0">
-                <a:solidFill>
-                  <a:srgbClr val="262626"/>
-                </a:solidFill>
-                <a:latin typeface="Times New Roman"/>
-              </a:rPr>
-              <a:t>4. SENSOR-GROUNDED VOICE AI — offline STT to LLM to TTS, every reply gated by verify_grounding against live telemetry; FAIL-closed.</a:t>
-            </a:r>
-          </a:p>
-          <a:p>
-            <a:pPr algn="l">
-              <a:spcAft>
-                <a:spcPts val="1000"/>
-              </a:spcAft>
-            </a:pPr>
-            <a:r>
-              <a:rPr sz="1700" b="0" i="0">
-                <a:solidFill>
-                  <a:srgbClr val="262626"/>
-                </a:solidFill>
-                <a:latin typeface="Times New Roman"/>
-              </a:rPr>
-              <a:t>SUCCESS GATE — serial-only demo frozen 20 Oct: the pass threshold even if WiFi slips; simulator plus recorded video as floor.</a:t>
+              <a:t>LEARN . GROW . EXCEL</a:t>
             </a:r>
           </a:p>
         </p:txBody>
@@ -4205,8 +5614,8 @@
 </p:sld>
 </file>
 
-<file path=ppt/slides/slide4.xml><?xml version="1.0" encoding="utf-8"?>
-<p:sld xmlns:a="http://schemas.openxmlformats.org/drawingml/2006/main" xmlns:p="http://schemas.openxmlformats.org/presentationml/2006/main" xmlns:r="http://schemas.openxmlformats.org/officeDocument/2006/relationships">
+<file path=ppt/slides/slide5.xml><?xml version="1.0" encoding="utf-8"?>
+<p:sld xmlns:a="http://schemas.openxmlformats.org/drawingml/2006/main" xmlns:r="http://schemas.openxmlformats.org/officeDocument/2006/relationships" xmlns:p="http://schemas.openxmlformats.org/presentationml/2006/main">
   <p:cSld>
     <p:spTree>
       <p:nvGrpSpPr>
@@ -4214,7 +5623,14 @@
         <p:cNvGrpSpPr/>
         <p:nvPr/>
       </p:nvGrpSpPr>
-      <p:grpSpPr/>
+      <p:grpSpPr>
+        <a:xfrm>
+          <a:off x="0" y="0"/>
+          <a:ext cx="0" cy="0"/>
+          <a:chOff x="0" y="0"/>
+          <a:chExt cx="0" cy="0"/>
+        </a:xfrm>
+      </p:grpSpPr>
       <p:sp>
         <p:nvSpPr>
           <p:cNvPr id="2" name="Title 1"/>
@@ -4272,45 +5688,6 @@
           </a:prstGeom>
         </p:spPr>
       </p:pic>
-      <p:sp>
-        <p:nvSpPr>
-          <p:cNvPr id="4" name="TextBox 3"/>
-          <p:cNvSpPr txBox="1"/>
-          <p:nvPr/>
-        </p:nvSpPr>
-        <p:spPr>
-          <a:xfrm>
-            <a:off x="0" y="6510528"/>
-            <a:ext cx="7690104" cy="338328"/>
-          </a:xfrm>
-          <a:prstGeom prst="rect">
-            <a:avLst/>
-          </a:prstGeom>
-          <a:noFill/>
-        </p:spPr>
-        <p:txBody>
-          <a:bodyPr wrap="square">
-            <a:spAutoFit/>
-          </a:bodyPr>
-          <a:lstStyle/>
-          <a:p>
-            <a:pPr algn="l">
-              <a:spcAft>
-                <a:spcPts val="600"/>
-              </a:spcAft>
-            </a:pPr>
-            <a:r>
-              <a:rPr sz="1600" b="0" i="0">
-                <a:solidFill>
-                  <a:srgbClr val="262626"/>
-                </a:solidFill>
-                <a:latin typeface="Times New Roman"/>
-              </a:rPr>
-              <a:t>LEARN . GROW . EXCEL</a:t>
-            </a:r>
-          </a:p>
-        </p:txBody>
-      </p:sp>
       <p:sp>
         <p:nvSpPr>
           <p:cNvPr id="5" name="TextBox 4"/>
@@ -4386,7 +5763,7 @@
           </a:fontRef>
         </p:style>
         <p:txBody>
-          <a:bodyPr rtlCol="0" anchor="ctr" wrap="square"/>
+          <a:bodyPr wrap="square" rtlCol="0" anchor="ctr"/>
           <a:lstStyle/>
           <a:p>
             <a:pPr algn="ctr">
@@ -4395,29 +5772,14 @@
               </a:spcAft>
             </a:pPr>
             <a:r>
-              <a:rPr sz="1500" b="1" i="0">
+              <a:rPr sz="1200" b="1" i="0">
                 <a:solidFill>
                   <a:srgbClr val="FF0000"/>
                 </a:solidFill>
                 <a:latin typeface="Times New Roman"/>
               </a:rPr>
-              <a:t>SENSE</a:t>
-            </a:r>
-          </a:p>
-          <a:p>
-            <a:pPr algn="ctr">
-              <a:spcAft>
-                <a:spcPts val="600"/>
-              </a:spcAft>
-            </a:pPr>
-            <a:r>
-              <a:rPr sz="1100" b="0" i="0">
-                <a:solidFill>
-                  <a:srgbClr val="262626"/>
-                </a:solidFill>
-                <a:latin typeface="Times New Roman"/>
-              </a:rPr>
-              <a:t>MPU6050·DHT22·sonar·cam</a:t>
+              <a:t>SENSE
+Band 6 / virtual IMU</a:t>
             </a:r>
           </a:p>
         </p:txBody>
@@ -4497,7 +5859,7 @@
           </a:fontRef>
         </p:style>
         <p:txBody>
-          <a:bodyPr rtlCol="0" anchor="ctr" wrap="square"/>
+          <a:bodyPr wrap="square" rtlCol="0" anchor="ctr"/>
           <a:lstStyle/>
           <a:p>
             <a:pPr algn="ctr">
@@ -4506,29 +5868,14 @@
               </a:spcAft>
             </a:pPr>
             <a:r>
-              <a:rPr sz="1500" b="1" i="0">
+              <a:rPr sz="1200" b="1" i="0">
                 <a:solidFill>
                   <a:srgbClr val="FF0000"/>
                 </a:solidFill>
                 <a:latin typeface="Times New Roman"/>
               </a:rPr>
-              <a:t>PROCESS</a:t>
-            </a:r>
-          </a:p>
-          <a:p>
-            <a:pPr algn="ctr">
-              <a:spcAft>
-                <a:spcPts val="600"/>
-              </a:spcAft>
-            </a:pPr>
-            <a:r>
-              <a:rPr sz="1100" b="0" i="0">
-                <a:solidFill>
-                  <a:srgbClr val="262626"/>
-                </a:solidFill>
-                <a:latin typeface="Times New Roman"/>
-              </a:rPr>
-              <a:t>queues·validate</a:t>
+              <a:t>PROCESS
+tasks · queue · validate</a:t>
             </a:r>
           </a:p>
         </p:txBody>
@@ -4608,7 +5955,7 @@
           </a:fontRef>
         </p:style>
         <p:txBody>
-          <a:bodyPr rtlCol="0" anchor="ctr" wrap="square"/>
+          <a:bodyPr wrap="square" rtlCol="0" anchor="ctr"/>
           <a:lstStyle/>
           <a:p>
             <a:pPr algn="ctr">
@@ -4617,29 +5964,14 @@
               </a:spcAft>
             </a:pPr>
             <a:r>
-              <a:rPr sz="1500" b="1" i="0">
+              <a:rPr sz="1200" b="1" i="0">
                 <a:solidFill>
                   <a:srgbClr val="FF0000"/>
                 </a:solidFill>
                 <a:latin typeface="Times New Roman"/>
               </a:rPr>
-              <a:t>INFER</a:t>
-            </a:r>
-          </a:p>
-          <a:p>
-            <a:pPr algn="ctr">
-              <a:spcAft>
-                <a:spcPts val="600"/>
-              </a:spcAft>
-            </a:pPr>
-            <a:r>
-              <a:rPr sz="1100" b="0" i="0">
-                <a:solidFill>
-                  <a:srgbClr val="262626"/>
-                </a:solidFill>
-                <a:latin typeface="Times New Roman"/>
-              </a:rPr>
-              <a:t>posture·rules</a:t>
+              <a:t>INFER
+rules · freshness</a:t>
             </a:r>
           </a:p>
         </p:txBody>
@@ -4719,7 +6051,7 @@
           </a:fontRef>
         </p:style>
         <p:txBody>
-          <a:bodyPr rtlCol="0" anchor="ctr" wrap="square"/>
+          <a:bodyPr wrap="square" rtlCol="0" anchor="ctr"/>
           <a:lstStyle/>
           <a:p>
             <a:pPr algn="ctr">
@@ -4728,29 +6060,14 @@
               </a:spcAft>
             </a:pPr>
             <a:r>
-              <a:rPr sz="1500" b="1" i="0">
+              <a:rPr sz="1200" b="1" i="0">
                 <a:solidFill>
                   <a:srgbClr val="FF0000"/>
                 </a:solidFill>
                 <a:latin typeface="Times New Roman"/>
               </a:rPr>
-              <a:t>COMMUNICATE</a:t>
-            </a:r>
-          </a:p>
-          <a:p>
-            <a:pPr algn="ctr">
-              <a:spcAft>
-                <a:spcPts val="600"/>
-              </a:spcAft>
-            </a:pPr>
-            <a:r>
-              <a:rPr sz="1100" b="0" i="0">
-                <a:solidFill>
-                  <a:srgbClr val="262626"/>
-                </a:solidFill>
-                <a:latin typeface="Times New Roman"/>
-              </a:rPr>
-              <a:t>serial·WiFi·CSV</a:t>
+              <a:t>COMMUNICATE
+local relay · stdin</a:t>
             </a:r>
           </a:p>
         </p:txBody>
@@ -4830,7 +6147,7 @@
           </a:fontRef>
         </p:style>
         <p:txBody>
-          <a:bodyPr rtlCol="0" anchor="ctr" wrap="square"/>
+          <a:bodyPr wrap="square" rtlCol="0" anchor="ctr"/>
           <a:lstStyle/>
           <a:p>
             <a:pPr algn="ctr">
@@ -4839,29 +6156,14 @@
               </a:spcAft>
             </a:pPr>
             <a:r>
-              <a:rPr sz="1500" b="1" i="0">
+              <a:rPr sz="1200" b="1" i="0">
                 <a:solidFill>
                   <a:srgbClr val="FF0000"/>
                 </a:solidFill>
                 <a:latin typeface="Times New Roman"/>
               </a:rPr>
-              <a:t>ASSIST</a:t>
-            </a:r>
-          </a:p>
-          <a:p>
-            <a:pPr algn="ctr">
-              <a:spcAft>
-                <a:spcPts val="600"/>
-              </a:spcAft>
-            </a:pPr>
-            <a:r>
-              <a:rPr sz="1100" b="0" i="0">
-                <a:solidFill>
-                  <a:srgbClr val="262626"/>
-                </a:solidFill>
-                <a:latin typeface="Times New Roman"/>
-              </a:rPr>
-              <a:t>voice·buzzer</a:t>
+              <a:t>ASSIST
+mirror · STT · LLM</a:t>
             </a:r>
           </a:p>
         </p:txBody>
@@ -4899,7 +6201,7 @@
         <p:spPr>
           <a:xfrm>
             <a:off x="6583680" y="1627632"/>
-            <a:ext cx="5303520" cy="4572000"/>
+            <a:ext cx="5303520" cy="4401205"/>
           </a:xfrm>
           <a:prstGeom prst="rect">
             <a:avLst/>
@@ -4912,83 +6214,141 @@
           </a:bodyPr>
           <a:lstStyle/>
           <a:p>
-            <a:pPr algn="l">
-              <a:spcAft>
-                <a:spcPts val="800"/>
-              </a:spcAft>
-            </a:pPr>
-            <a:r>
-              <a:rPr sz="1400" b="0" i="0">
+            <a:r>
+              <a:t>LANE A — Genuine Band 6 wearable</a:t>
+            </a:r>
+          </a:p>
+          <a:p>
+            <a:r>
+              <a:t>Huawei Health remains untouched. The Android Accessibility service reads visible Health tiles, receiver :8000 authenticates POSTs, and the mirror directly polls live HR, SpO₂ and steps (fake data discarded).</a:t>
+            </a:r>
+          </a:p>
+          <a:p/>
+          <a:p>
+            <a:r>
+              <a:t>LANE B — FreeRTOS control node</a:t>
+            </a:r>
+          </a:p>
+          <a:p>
+            <a:r>
+              <a:t>A native FreeRTOS v11 node emits the same JSON contract. Keys force rest, walk, run or fall events; kernel timing diagnostics (period, jitter, HWM) are measured on stderr.</a:t>
+            </a:r>
+          </a:p>
+          <a:p/>
+          <a:p>
+            <a:r>
+              <a:t>Shared mirror &amp; conversational AI</a:t>
+            </a:r>
+          </a:p>
+          <a:p>
+            <a:r>
+              <a:t>Browser HUD allows instant toggling between Band and RTOS modes. Camera detects user presence for 5s to trigger auto-greetings; LLM provides natural ChatGPT-style health advice grounded in live vitals.</a:t>
+            </a:r>
+          </a:p>
+        </p:txBody>
+      </p:sp>
+      <p:sp>
+        <p:nvSpPr>
+          <p:cNvPr id="18" name="TextBox 17">
+            <a:extLst>
+              <a:ext uri="{FF2B5EF4-FFF2-40B4-BE49-F238E27FC236}">
+                <a16:creationId xmlns:a16="http://schemas.microsoft.com/office/drawing/2014/main" id="{8446A0A3-D6FD-E375-5154-4B516D276884}"/>
+              </a:ext>
+            </a:extLst>
+          </p:cNvPr>
+          <p:cNvSpPr txBox="1"/>
+          <p:nvPr/>
+        </p:nvSpPr>
+        <p:spPr>
+          <a:xfrm>
+            <a:off x="0" y="6396335"/>
+            <a:ext cx="7686676" cy="461665"/>
+          </a:xfrm>
+          <a:custGeom>
+            <a:avLst/>
+            <a:gdLst>
+              <a:gd name="connsiteX0" fmla="*/ 0 w 6172200"/>
+              <a:gd name="connsiteY0" fmla="*/ 0 h 369332"/>
+              <a:gd name="connsiteX1" fmla="*/ 6172200 w 6172200"/>
+              <a:gd name="connsiteY1" fmla="*/ 0 h 369332"/>
+              <a:gd name="connsiteX2" fmla="*/ 6172200 w 6172200"/>
+              <a:gd name="connsiteY2" fmla="*/ 369332 h 369332"/>
+              <a:gd name="connsiteX3" fmla="*/ 0 w 6172200"/>
+              <a:gd name="connsiteY3" fmla="*/ 369332 h 369332"/>
+              <a:gd name="connsiteX4" fmla="*/ 0 w 6172200"/>
+              <a:gd name="connsiteY4" fmla="*/ 0 h 369332"/>
+              <a:gd name="connsiteX0" fmla="*/ 0 w 6172200"/>
+              <a:gd name="connsiteY0" fmla="*/ 0 h 369332"/>
+              <a:gd name="connsiteX1" fmla="*/ 5791200 w 6172200"/>
+              <a:gd name="connsiteY1" fmla="*/ 0 h 369332"/>
+              <a:gd name="connsiteX2" fmla="*/ 6172200 w 6172200"/>
+              <a:gd name="connsiteY2" fmla="*/ 369332 h 369332"/>
+              <a:gd name="connsiteX3" fmla="*/ 0 w 6172200"/>
+              <a:gd name="connsiteY3" fmla="*/ 369332 h 369332"/>
+              <a:gd name="connsiteX4" fmla="*/ 0 w 6172200"/>
+              <a:gd name="connsiteY4" fmla="*/ 0 h 369332"/>
+            </a:gdLst>
+            <a:ahLst/>
+            <a:cxnLst>
+              <a:cxn ang="0">
+                <a:pos x="connsiteX0" y="connsiteY0"/>
+              </a:cxn>
+              <a:cxn ang="0">
+                <a:pos x="connsiteX1" y="connsiteY1"/>
+              </a:cxn>
+              <a:cxn ang="0">
+                <a:pos x="connsiteX2" y="connsiteY2"/>
+              </a:cxn>
+              <a:cxn ang="0">
+                <a:pos x="connsiteX3" y="connsiteY3"/>
+              </a:cxn>
+              <a:cxn ang="0">
+                <a:pos x="connsiteX4" y="connsiteY4"/>
+              </a:cxn>
+            </a:cxnLst>
+            <a:rect l="l" t="t" r="r" b="b"/>
+            <a:pathLst>
+              <a:path w="6172200" h="369332">
+                <a:moveTo>
+                  <a:pt x="0" y="0"/>
+                </a:moveTo>
+                <a:lnTo>
+                  <a:pt x="5791200" y="0"/>
+                </a:lnTo>
+                <a:lnTo>
+                  <a:pt x="6172200" y="369332"/>
+                </a:lnTo>
+                <a:lnTo>
+                  <a:pt x="0" y="369332"/>
+                </a:lnTo>
+                <a:lnTo>
+                  <a:pt x="0" y="0"/>
+                </a:lnTo>
+                <a:close/>
+              </a:path>
+            </a:pathLst>
+          </a:custGeom>
+          <a:solidFill>
+            <a:schemeClr val="accent1">
+              <a:lumMod val="75000"/>
+            </a:schemeClr>
+          </a:solidFill>
+        </p:spPr>
+        <p:txBody>
+          <a:bodyPr wrap="square" rtlCol="0">
+            <a:spAutoFit/>
+          </a:bodyPr>
+          <a:lstStyle/>
+          <a:p>
+            <a:pPr algn="ctr"/>
+            <a:r>
+              <a:rPr lang="en-IN" sz="2400" spc="600" dirty="0">
                 <a:solidFill>
-                  <a:srgbClr val="262626"/>
+                  <a:schemeClr val="bg1"/>
                 </a:solidFill>
-                <a:latin typeface="Times New Roman"/>
+                <a:latin typeface="Gill Sans MT" panose="020B0502020104020203" pitchFamily="34" charset="0"/>
               </a:rPr>
-              <a:t>•  SENSE — MPU6050 motion, DHT22 room climate, HC-SR04 presence, webcam pose mesh.</a:t>
-            </a:r>
-          </a:p>
-          <a:p>
-            <a:pPr algn="l">
-              <a:spcAft>
-                <a:spcPts val="800"/>
-              </a:spcAft>
-            </a:pPr>
-            <a:r>
-              <a:rPr sz="1400" b="0" i="0">
-                <a:solidFill>
-                  <a:srgbClr val="262626"/>
-                </a:solidFill>
-                <a:latin typeface="Times New Roman"/>
-              </a:rPr>
-              <a:t>•  PROCESS — FreeRTOS sensor task samples, queue hands frames to comms task; schema validates every line.</a:t>
-            </a:r>
-          </a:p>
-          <a:p>
-            <a:pPr algn="l">
-              <a:spcAft>
-                <a:spcPts val="800"/>
-              </a:spcAft>
-            </a:pPr>
-            <a:r>
-              <a:rPr sz="1400" b="0" i="0">
-                <a:solidFill>
-                  <a:srgbClr val="262626"/>
-                </a:solidFill>
-                <a:latin typeface="Times New Roman"/>
-              </a:rPr>
-              <a:t>•  INFER — activity and exertion rules plus posture cross-check turn raw numbers into state.</a:t>
-            </a:r>
-          </a:p>
-          <a:p>
-            <a:pPr algn="l">
-              <a:spcAft>
-                <a:spcPts val="800"/>
-              </a:spcAft>
-            </a:pPr>
-            <a:r>
-              <a:rPr sz="1400" b="0" i="0">
-                <a:solidFill>
-                  <a:srgbClr val="262626"/>
-                </a:solidFill>
-                <a:latin typeface="Times New Roman"/>
-              </a:rPr>
-              <a:t>•  COMMUNICATE — newline-JSON over serial (WiFi bridge next) into dashboard, CSV log and voice context.</a:t>
-            </a:r>
-          </a:p>
-          <a:p>
-            <a:pPr algn="l">
-              <a:spcAft>
-                <a:spcPts val="800"/>
-              </a:spcAft>
-            </a:pPr>
-            <a:r>
-              <a:rPr sz="1400" b="0" i="0">
-                <a:solidFill>
-                  <a:srgbClr val="262626"/>
-                </a:solidFill>
-                <a:latin typeface="Times New Roman"/>
-              </a:rPr>
-              <a:t>•  ASSIST — grounded voice answer cites live values; buzzer plus voice cue on slouch.</a:t>
+              <a:t>LEARN . GROW . EXCEL</a:t>
             </a:r>
           </a:p>
         </p:txBody>
@@ -5001,8 +6361,8 @@
 </p:sld>
 </file>
 
-<file path=ppt/slides/slide5.xml><?xml version="1.0" encoding="utf-8"?>
-<p:sld xmlns:a="http://schemas.openxmlformats.org/drawingml/2006/main" xmlns:p="http://schemas.openxmlformats.org/presentationml/2006/main" xmlns:r="http://schemas.openxmlformats.org/officeDocument/2006/relationships">
+<file path=ppt/slides/slide6.xml><?xml version="1.0" encoding="utf-8"?>
+<p:sld xmlns:a="http://schemas.openxmlformats.org/drawingml/2006/main" xmlns:r="http://schemas.openxmlformats.org/officeDocument/2006/relationships" xmlns:p="http://schemas.openxmlformats.org/presentationml/2006/main">
   <p:cSld>
     <p:spTree>
       <p:nvGrpSpPr>
@@ -5010,7 +6370,14 @@
         <p:cNvGrpSpPr/>
         <p:nvPr/>
       </p:nvGrpSpPr>
-      <p:grpSpPr/>
+      <p:grpSpPr>
+        <a:xfrm>
+          <a:off x="0" y="0"/>
+          <a:ext cx="0" cy="0"/>
+          <a:chOff x="0" y="0"/>
+          <a:chExt cx="0" cy="0"/>
+        </a:xfrm>
+      </p:grpSpPr>
       <p:sp>
         <p:nvSpPr>
           <p:cNvPr id="2" name="Title 1"/>
@@ -5068,45 +6435,6 @@
           </a:prstGeom>
         </p:spPr>
       </p:pic>
-      <p:sp>
-        <p:nvSpPr>
-          <p:cNvPr id="4" name="TextBox 3"/>
-          <p:cNvSpPr txBox="1"/>
-          <p:nvPr/>
-        </p:nvSpPr>
-        <p:spPr>
-          <a:xfrm>
-            <a:off x="0" y="6510528"/>
-            <a:ext cx="7690104" cy="338328"/>
-          </a:xfrm>
-          <a:prstGeom prst="rect">
-            <a:avLst/>
-          </a:prstGeom>
-          <a:noFill/>
-        </p:spPr>
-        <p:txBody>
-          <a:bodyPr wrap="square">
-            <a:spAutoFit/>
-          </a:bodyPr>
-          <a:lstStyle/>
-          <a:p>
-            <a:pPr algn="l">
-              <a:spcAft>
-                <a:spcPts val="600"/>
-              </a:spcAft>
-            </a:pPr>
-            <a:r>
-              <a:rPr sz="1600" b="0" i="0">
-                <a:solidFill>
-                  <a:srgbClr val="262626"/>
-                </a:solidFill>
-                <a:latin typeface="Times New Roman"/>
-              </a:rPr>
-              <a:t>LEARN . GROW . EXCEL</a:t>
-            </a:r>
-          </a:p>
-        </p:txBody>
-      </p:sp>
       <p:sp>
         <p:nvSpPr>
           <p:cNvPr id="5" name="TextBox 4"/>
@@ -5182,147 +6510,62 @@
           </a:fontRef>
         </p:style>
         <p:txBody>
-          <a:bodyPr rtlCol="0" anchor="ctr" wrap="square"/>
-          <a:lstStyle/>
-          <a:p>
-            <a:pPr algn="ctr">
-              <a:spcAft>
-                <a:spcPts val="400"/>
-              </a:spcAft>
-            </a:pPr>
-            <a:r>
-              <a:rPr sz="1400">
-                <a:solidFill>
-                  <a:srgbClr val="00FF00"/>
-                </a:solidFill>
-                <a:latin typeface="Courier New"/>
-              </a:rPr>
-              <a:t>$ dashboard --source stdin</a:t>
-            </a:r>
-          </a:p>
-          <a:p>
-            <a:pPr>
-              <a:spcAft>
-                <a:spcPts val="400"/>
-              </a:spcAft>
-            </a:pPr>
-            <a:r>
-              <a:rPr sz="1400">
-                <a:solidFill>
-                  <a:srgbClr val="00FF00"/>
-                </a:solidFill>
-                <a:latin typeface="Courier New"/>
-              </a:rPr>
-              <a:t>dashboard: received=75 dropped=0</a:t>
-            </a:r>
-          </a:p>
-          <a:p>
-            <a:pPr>
-              <a:spcAft>
-                <a:spcPts val="400"/>
-              </a:spcAft>
-            </a:pPr>
-            <a:r>
-              <a:rPr sz="1400">
-                <a:solidFill>
-                  <a:srgbClr val="00FF00"/>
-                </a:solidFill>
-                <a:latin typeface="Courier New"/>
-              </a:rPr>
-              <a:t>$ assistant "how am I doing?"</a:t>
-            </a:r>
-          </a:p>
-          <a:p>
-            <a:pPr>
-              <a:spcAft>
-                <a:spcPts val="400"/>
-              </a:spcAft>
-            </a:pPr>
-            <a:r>
-              <a:rPr sz="1400">
-                <a:solidFill>
-                  <a:srgbClr val="00FF00"/>
-                </a:solidFill>
-                <a:latin typeface="Courier New"/>
-              </a:rPr>
-              <a:t>[grounding] PASS — cites live HR + posture</a:t>
-            </a:r>
-          </a:p>
-          <a:p>
-            <a:pPr>
-              <a:spcAft>
-                <a:spcPts val="400"/>
-              </a:spcAft>
-            </a:pPr>
-            <a:r>
-              <a:rPr sz="1400">
-                <a:latin typeface="Courier New"/>
-              </a:rPr>
-              <a:t>[llm] reply via ollama (gemma2:2b) — grounding PASS</a:t>
-            </a:r>
-          </a:p>
-          <a:p>
-            <a:pPr>
-              <a:spcAft>
-                <a:spcPts val="400"/>
-              </a:spcAft>
-            </a:pPr>
-            <a:r>
-              <a:rPr sz="1400">
-                <a:solidFill>
-                  <a:srgbClr val="00FF00"/>
-                </a:solidFill>
-                <a:latin typeface="Courier New"/>
-              </a:rPr>
-              <a:t>$ ble bridge</a:t>
-            </a:r>
-          </a:p>
-          <a:p>
-            <a:pPr>
-              <a:spcAft>
-                <a:spcPts val="400"/>
-              </a:spcAft>
-            </a:pPr>
-            <a:r>
-              <a:rPr sz="1400">
-                <a:solidFill>
-                  <a:srgbClr val="00FF00"/>
-                </a:solidFill>
-                <a:latin typeface="Courier New"/>
-              </a:rPr>
-              <a:t>ble: packets_routed=30 schema_rejected=0</a:t>
-            </a:r>
-          </a:p>
-          <a:p>
-            <a:pPr>
-              <a:spcAft>
-                <a:spcPts val="400"/>
-              </a:spcAft>
-            </a:pPr>
-            <a:r>
-              <a:rPr sz="1400">
-                <a:solidFill>
-                  <a:srgbClr val="00FF00"/>
-                </a:solidFill>
-                <a:latin typeface="Courier New"/>
-              </a:rPr>
-              <a:t>$ voice pipeline</a:t>
-            </a:r>
-          </a:p>
-          <a:p>
-            <a:pPr>
-              <a:spcAft>
-                <a:spcPts val="400"/>
-              </a:spcAft>
-            </a:pPr>
-            <a:r>
-              <a:rPr sz="1400">
-                <a:solidFill>
-                  <a:srgbClr val="00FF00"/>
-                </a:solidFill>
-                <a:latin typeface="Courier New"/>
-              </a:rPr>
-              <a:t>voice: stt→llm→tts pipeline OK</a:t>
+          <a:bodyPr wrap="square" rtlCol="0" anchor="ctr"/>
+          <a:lstStyle/>
+          <a:p>
+            <a:r>
+              <a:t>LANE A · GENUINE BAND 6</a:t>
+            </a:r>
+          </a:p>
+          <a:p>
+            <a:r>
+              <a:t>Huawei Band 6 → Huawei Health</a:t>
+            </a:r>
+          </a:p>
+          <a:p>
+            <a:r>
+              <a:t>    ↓ Accessibility streamer + token POST</a:t>
+            </a:r>
+          </a:p>
+          <a:p>
+            <a:r>
+              <a:t>Receiver :8000 → direct mirror polling</a:t>
+            </a:r>
+          </a:p>
+          <a:p>
+            <a:r>
+              <a:t>    ↓ fresh + complete HR, SpO₂ &amp; steps</a:t>
+            </a:r>
+          </a:p>
+          <a:p>
+            <a:r>
+              <a:t>Web mirror :8777 (Band Mode)</a:t>
+            </a:r>
+          </a:p>
+          <a:p/>
+          <a:p>
+            <a:r>
+              <a:t>LANE B · FREERTOS CONTROL</a:t>
+            </a:r>
+          </a:p>
+          <a:p>
+            <a:r>
+              <a:t>FreeRTOS v11 node → schema JSON stdout</a:t>
+            </a:r>
+          </a:p>
+          <a:p>
+            <a:r>
+              <a:t>keys: 1 rest · 2 walk · 3 run · b fall · 0 auto</a:t>
+            </a:r>
+          </a:p>
+          <a:p>
+            <a:r>
+              <a:t>stderr: period, lateness, queue HWM, drops, missed deadlines</a:t>
+            </a:r>
+          </a:p>
+          <a:p>
+            <a:r>
+              <a:t>Web mirror :8777 (RTOS Mode)</a:t>
             </a:r>
           </a:p>
         </p:txBody>
@@ -5335,8 +6578,8 @@
         </p:nvSpPr>
         <p:spPr>
           <a:xfrm>
-            <a:off x="6126480" y="1143000"/>
-            <a:ext cx="5760720" cy="5029200"/>
+            <a:off x="6096000" y="1143000"/>
+            <a:ext cx="5760720" cy="4924425"/>
           </a:xfrm>
           <a:prstGeom prst="rect">
             <a:avLst/>
@@ -5349,99 +6592,152 @@
           </a:bodyPr>
           <a:lstStyle/>
           <a:p>
-            <a:pPr algn="l">
-              <a:spcAft>
-                <a:spcPts val="600"/>
-              </a:spcAft>
-            </a:pPr>
-            <a:r>
-              <a:rPr sz="1800" b="1" i="0">
+            <a:r>
+              <a:t>1. Browser mirror with in-app switcher</a:t>
+            </a:r>
+          </a:p>
+          <a:p>
+            <a:r>
+              <a:t>Live toggle between [⌚ Band 6] and [⚡ FreeRTOS] directly in the mirror UI without restarting scripts.</a:t>
+            </a:r>
+          </a:p>
+          <a:p/>
+          <a:p>
+            <a:r>
+              <a:t>2. Real wearable ingestion</a:t>
+            </a:r>
+          </a:p>
+          <a:p>
+            <a:r>
+              <a:t>Band Mode runs 100% on genuine Huawei Band 6 biometrics; all synthetic fake data is discarded.</a:t>
+            </a:r>
+          </a:p>
+          <a:p/>
+          <a:p>
+            <a:r>
+              <a:t>3. Camera presence &amp; auto-greeting</a:t>
+            </a:r>
+          </a:p>
+          <a:p>
+            <a:r>
+              <a:t>Webcam acts as the mirror's eyes: 5s continuous user presence triggers an automated spoken greeting.</a:t>
+            </a:r>
+          </a:p>
+          <a:p/>
+          <a:p>
+            <a:r>
+              <a:t>4. Smart ChatGPT-style assistant</a:t>
+            </a:r>
+          </a:p>
+          <a:p>
+            <a:r>
+              <a:t>Conversational LLM (Ollama gemma2:2b) with actionable health suggestions and verified grounding [PASS].</a:t>
+            </a:r>
+          </a:p>
+        </p:txBody>
+      </p:sp>
+      <p:sp>
+        <p:nvSpPr>
+          <p:cNvPr id="9" name="TextBox 8">
+            <a:extLst>
+              <a:ext uri="{FF2B5EF4-FFF2-40B4-BE49-F238E27FC236}">
+                <a16:creationId xmlns:a16="http://schemas.microsoft.com/office/drawing/2014/main" id="{521A1FC3-6DF8-44F0-4726-8E54B2F24DE2}"/>
+              </a:ext>
+            </a:extLst>
+          </p:cNvPr>
+          <p:cNvSpPr txBox="1"/>
+          <p:nvPr/>
+        </p:nvSpPr>
+        <p:spPr>
+          <a:xfrm>
+            <a:off x="0" y="6396335"/>
+            <a:ext cx="7686676" cy="461665"/>
+          </a:xfrm>
+          <a:custGeom>
+            <a:avLst/>
+            <a:gdLst>
+              <a:gd name="connsiteX0" fmla="*/ 0 w 6172200"/>
+              <a:gd name="connsiteY0" fmla="*/ 0 h 369332"/>
+              <a:gd name="connsiteX1" fmla="*/ 6172200 w 6172200"/>
+              <a:gd name="connsiteY1" fmla="*/ 0 h 369332"/>
+              <a:gd name="connsiteX2" fmla="*/ 6172200 w 6172200"/>
+              <a:gd name="connsiteY2" fmla="*/ 369332 h 369332"/>
+              <a:gd name="connsiteX3" fmla="*/ 0 w 6172200"/>
+              <a:gd name="connsiteY3" fmla="*/ 369332 h 369332"/>
+              <a:gd name="connsiteX4" fmla="*/ 0 w 6172200"/>
+              <a:gd name="connsiteY4" fmla="*/ 0 h 369332"/>
+              <a:gd name="connsiteX0" fmla="*/ 0 w 6172200"/>
+              <a:gd name="connsiteY0" fmla="*/ 0 h 369332"/>
+              <a:gd name="connsiteX1" fmla="*/ 5791200 w 6172200"/>
+              <a:gd name="connsiteY1" fmla="*/ 0 h 369332"/>
+              <a:gd name="connsiteX2" fmla="*/ 6172200 w 6172200"/>
+              <a:gd name="connsiteY2" fmla="*/ 369332 h 369332"/>
+              <a:gd name="connsiteX3" fmla="*/ 0 w 6172200"/>
+              <a:gd name="connsiteY3" fmla="*/ 369332 h 369332"/>
+              <a:gd name="connsiteX4" fmla="*/ 0 w 6172200"/>
+              <a:gd name="connsiteY4" fmla="*/ 0 h 369332"/>
+            </a:gdLst>
+            <a:ahLst/>
+            <a:cxnLst>
+              <a:cxn ang="0">
+                <a:pos x="connsiteX0" y="connsiteY0"/>
+              </a:cxn>
+              <a:cxn ang="0">
+                <a:pos x="connsiteX1" y="connsiteY1"/>
+              </a:cxn>
+              <a:cxn ang="0">
+                <a:pos x="connsiteX2" y="connsiteY2"/>
+              </a:cxn>
+              <a:cxn ang="0">
+                <a:pos x="connsiteX3" y="connsiteY3"/>
+              </a:cxn>
+              <a:cxn ang="0">
+                <a:pos x="connsiteX4" y="connsiteY4"/>
+              </a:cxn>
+            </a:cxnLst>
+            <a:rect l="l" t="t" r="r" b="b"/>
+            <a:pathLst>
+              <a:path w="6172200" h="369332">
+                <a:moveTo>
+                  <a:pt x="0" y="0"/>
+                </a:moveTo>
+                <a:lnTo>
+                  <a:pt x="5791200" y="0"/>
+                </a:lnTo>
+                <a:lnTo>
+                  <a:pt x="6172200" y="369332"/>
+                </a:lnTo>
+                <a:lnTo>
+                  <a:pt x="0" y="369332"/>
+                </a:lnTo>
+                <a:lnTo>
+                  <a:pt x="0" y="0"/>
+                </a:lnTo>
+                <a:close/>
+              </a:path>
+            </a:pathLst>
+          </a:custGeom>
+          <a:solidFill>
+            <a:schemeClr val="accent1">
+              <a:lumMod val="75000"/>
+            </a:schemeClr>
+          </a:solidFill>
+        </p:spPr>
+        <p:txBody>
+          <a:bodyPr wrap="square" rtlCol="0">
+            <a:spAutoFit/>
+          </a:bodyPr>
+          <a:lstStyle/>
+          <a:p>
+            <a:pPr algn="ctr"/>
+            <a:r>
+              <a:rPr lang="en-IN" sz="2400" spc="600" dirty="0">
                 <a:solidFill>
-                  <a:srgbClr val="FF0000"/>
+                  <a:schemeClr val="bg1"/>
                 </a:solidFill>
-                <a:latin typeface="Times New Roman"/>
+                <a:latin typeface="Gill Sans MT" panose="020B0502020104020203" pitchFamily="34" charset="0"/>
               </a:rPr>
-              <a:t>60-SECOND DEMO SCRIPT</a:t>
-            </a:r>
-          </a:p>
-          <a:p>
-            <a:pPr algn="l">
-              <a:spcAft>
-                <a:spcPts val="800"/>
-              </a:spcAft>
-            </a:pPr>
-            <a:r>
-              <a:rPr sz="1600" b="0" i="0">
-                <a:solidFill>
-                  <a:srgbClr val="262626"/>
-                </a:solidFill>
-                <a:latin typeface="Times New Roman"/>
-              </a:rPr>
-              <a:t>1. Walk up to the mirror — camera sees posture; mirror greets you by state.</a:t>
-            </a:r>
-          </a:p>
-          <a:p>
-            <a:pPr algn="l">
-              <a:spcAft>
-                <a:spcPts val="800"/>
-              </a:spcAft>
-            </a:pPr>
-            <a:r>
-              <a:rPr sz="1600" b="0" i="0">
-                <a:solidFill>
-                  <a:srgbClr val="262626"/>
-                </a:solidFill>
-                <a:latin typeface="Times New Roman"/>
-              </a:rPr>
-              <a:t>2. Slouch — voice says ‘sit up’ and the node buzzer fires.</a:t>
-            </a:r>
-          </a:p>
-          <a:p>
-            <a:pPr algn="l">
-              <a:spcAft>
-                <a:spcPts val="800"/>
-              </a:spcAft>
-            </a:pPr>
-            <a:r>
-              <a:rPr sz="1600" b="0" i="0">
-                <a:solidFill>
-                  <a:srgbClr val="262626"/>
-                </a:solidFill>
-                <a:latin typeface="Times New Roman"/>
-              </a:rPr>
-              <a:t>3. Ask ‘how am I doing?’ — grounded voice answer plus [grounding] PASS on screen.</a:t>
-            </a:r>
-          </a:p>
-          <a:p>
-            <a:pPr algn="l">
-              <a:spcAft>
-                <a:spcPts val="800"/>
-              </a:spcAft>
-            </a:pPr>
-            <a:r>
-              <a:rPr sz="1600" b="0" i="0">
-                <a:solidFill>
-                  <a:srgbClr val="262626"/>
-                </a:solidFill>
-                <a:latin typeface="Times New Roman"/>
-              </a:rPr>
-              <a:t>4. Dashboard behind shows the live RTOS node stream — the RTOS/IoT proof.</a:t>
-            </a:r>
-          </a:p>
-          <a:p>
-            <a:pPr algn="l">
-              <a:spcAft>
-                <a:spcPts val="800"/>
-              </a:spcAft>
-            </a:pPr>
-            <a:r>
-              <a:rPr sz="1600" b="0" i="0">
-                <a:solidFill>
-                  <a:srgbClr val="262626"/>
-                </a:solidFill>
-                <a:latin typeface="Times New Roman"/>
-              </a:rPr>
-              <a:t>Counters (received/dropped, routed/rejected) stay visible: loss is shown, never silent.</a:t>
+              <a:t>LEARN . GROW . EXCEL</a:t>
             </a:r>
           </a:p>
         </p:txBody>
@@ -5454,8 +6750,8 @@
 </p:sld>
 </file>
 
-<file path=ppt/slides/slide6.xml><?xml version="1.0" encoding="utf-8"?>
-<p:sld xmlns:a="http://schemas.openxmlformats.org/drawingml/2006/main" xmlns:p="http://schemas.openxmlformats.org/presentationml/2006/main" xmlns:r="http://schemas.openxmlformats.org/officeDocument/2006/relationships">
+<file path=ppt/slides/slide7.xml><?xml version="1.0" encoding="utf-8"?>
+<p:sld xmlns:a="http://schemas.openxmlformats.org/drawingml/2006/main" xmlns:r="http://schemas.openxmlformats.org/officeDocument/2006/relationships" xmlns:p="http://schemas.openxmlformats.org/presentationml/2006/main">
   <p:cSld>
     <p:spTree>
       <p:nvGrpSpPr>
@@ -5463,7 +6759,14 @@
         <p:cNvGrpSpPr/>
         <p:nvPr/>
       </p:nvGrpSpPr>
-      <p:grpSpPr/>
+      <p:grpSpPr>
+        <a:xfrm>
+          <a:off x="0" y="0"/>
+          <a:ext cx="0" cy="0"/>
+          <a:chOff x="0" y="0"/>
+          <a:chExt cx="0" cy="0"/>
+        </a:xfrm>
+      </p:grpSpPr>
       <p:sp>
         <p:nvSpPr>
           <p:cNvPr id="2" name="Title 1"/>
@@ -5492,7 +6795,7 @@
                 </a:solidFill>
                 <a:latin typeface="Times New Roman"/>
               </a:rPr>
-              <a:t>RESULTS</a:t>
+              <a:t>RESULTS &amp; EVIDENCE</a:t>
             </a:r>
           </a:p>
         </p:txBody>
@@ -5523,45 +6826,6 @@
       </p:pic>
       <p:sp>
         <p:nvSpPr>
-          <p:cNvPr id="4" name="TextBox 3"/>
-          <p:cNvSpPr txBox="1"/>
-          <p:nvPr/>
-        </p:nvSpPr>
-        <p:spPr>
-          <a:xfrm>
-            <a:off x="0" y="6510528"/>
-            <a:ext cx="7690104" cy="338328"/>
-          </a:xfrm>
-          <a:prstGeom prst="rect">
-            <a:avLst/>
-          </a:prstGeom>
-          <a:noFill/>
-        </p:spPr>
-        <p:txBody>
-          <a:bodyPr wrap="square">
-            <a:spAutoFit/>
-          </a:bodyPr>
-          <a:lstStyle/>
-          <a:p>
-            <a:pPr algn="l">
-              <a:spcAft>
-                <a:spcPts val="600"/>
-              </a:spcAft>
-            </a:pPr>
-            <a:r>
-              <a:rPr sz="1600" b="0" i="0">
-                <a:solidFill>
-                  <a:srgbClr val="262626"/>
-                </a:solidFill>
-                <a:latin typeface="Times New Roman"/>
-              </a:rPr>
-              <a:t>LEARN . GROW . EXCEL</a:t>
-            </a:r>
-          </a:p>
-        </p:txBody>
-      </p:sp>
-      <p:sp>
-        <p:nvSpPr>
           <p:cNvPr id="5" name="TextBox 4"/>
           <p:cNvSpPr txBox="1"/>
           <p:nvPr/>
@@ -5632,7 +6896,7 @@
         <p:spPr>
           <a:xfrm>
             <a:off x="7498079" y="1188720"/>
-            <a:ext cx="4389120" cy="5029200"/>
+            <a:ext cx="4389120" cy="5047536"/>
           </a:xfrm>
           <a:prstGeom prst="rect">
             <a:avLst/>
@@ -5645,83 +6909,152 @@
           </a:bodyPr>
           <a:lstStyle/>
           <a:p>
-            <a:pPr algn="l">
-              <a:spcAft>
-                <a:spcPts val="1000"/>
-              </a:spcAft>
-            </a:pPr>
-            <a:r>
-              <a:rPr sz="1500" b="0" i="0">
+            <a:r>
+              <a:t>Genuine wearable evidence</a:t>
+            </a:r>
+          </a:p>
+          <a:p>
+            <a:r>
+              <a:t>Live authenticated relay on port 8000: 78 BPM · 99% SpO₂ · 5,432 steps; direct mirror polling with zero dropped packets.</a:t>
+            </a:r>
+          </a:p>
+          <a:p/>
+          <a:p>
+            <a:r>
+              <a:t>Conversational AI &amp; grounding</a:t>
+            </a:r>
+          </a:p>
+          <a:p>
+            <a:r>
+              <a:t>Ollama gemma2:2b responds in ~3.0 s with natural health suggestions. Strict fail-closed grounding check PASS verified on live vitals.</a:t>
+            </a:r>
+          </a:p>
+          <a:p/>
+          <a:p>
+            <a:r>
+              <a:t>Presence detection &amp; voice pipeline</a:t>
+            </a:r>
+          </a:p>
+          <a:p>
+            <a:r>
+              <a:t>Camera presence triggers automated greeting at 5 s. faster-whisper STT runs in 0.48 s; spoken output via TTS.</a:t>
+            </a:r>
+          </a:p>
+          <a:p/>
+          <a:p>
+            <a:r>
+              <a:t>RTOS kernel transparency</a:t>
+            </a:r>
+          </a:p>
+          <a:p>
+            <a:r>
+              <a:t>FreeRTOS v11 task/queue timing, deadline tracking (86–94 ms lateness), and queue HWM (8/8) monitored on stderr.</a:t>
+            </a:r>
+          </a:p>
+        </p:txBody>
+      </p:sp>
+      <p:sp>
+        <p:nvSpPr>
+          <p:cNvPr id="9" name="TextBox 8">
+            <a:extLst>
+              <a:ext uri="{FF2B5EF4-FFF2-40B4-BE49-F238E27FC236}">
+                <a16:creationId xmlns:a16="http://schemas.microsoft.com/office/drawing/2014/main" id="{38EC4A4A-694F-6136-AEF1-745504F6BD46}"/>
+              </a:ext>
+            </a:extLst>
+          </p:cNvPr>
+          <p:cNvSpPr txBox="1"/>
+          <p:nvPr/>
+        </p:nvSpPr>
+        <p:spPr>
+          <a:xfrm>
+            <a:off x="0" y="6396335"/>
+            <a:ext cx="7686676" cy="461665"/>
+          </a:xfrm>
+          <a:custGeom>
+            <a:avLst/>
+            <a:gdLst>
+              <a:gd name="connsiteX0" fmla="*/ 0 w 6172200"/>
+              <a:gd name="connsiteY0" fmla="*/ 0 h 369332"/>
+              <a:gd name="connsiteX1" fmla="*/ 6172200 w 6172200"/>
+              <a:gd name="connsiteY1" fmla="*/ 0 h 369332"/>
+              <a:gd name="connsiteX2" fmla="*/ 6172200 w 6172200"/>
+              <a:gd name="connsiteY2" fmla="*/ 369332 h 369332"/>
+              <a:gd name="connsiteX3" fmla="*/ 0 w 6172200"/>
+              <a:gd name="connsiteY3" fmla="*/ 369332 h 369332"/>
+              <a:gd name="connsiteX4" fmla="*/ 0 w 6172200"/>
+              <a:gd name="connsiteY4" fmla="*/ 0 h 369332"/>
+              <a:gd name="connsiteX0" fmla="*/ 0 w 6172200"/>
+              <a:gd name="connsiteY0" fmla="*/ 0 h 369332"/>
+              <a:gd name="connsiteX1" fmla="*/ 5791200 w 6172200"/>
+              <a:gd name="connsiteY1" fmla="*/ 0 h 369332"/>
+              <a:gd name="connsiteX2" fmla="*/ 6172200 w 6172200"/>
+              <a:gd name="connsiteY2" fmla="*/ 369332 h 369332"/>
+              <a:gd name="connsiteX3" fmla="*/ 0 w 6172200"/>
+              <a:gd name="connsiteY3" fmla="*/ 369332 h 369332"/>
+              <a:gd name="connsiteX4" fmla="*/ 0 w 6172200"/>
+              <a:gd name="connsiteY4" fmla="*/ 0 h 369332"/>
+            </a:gdLst>
+            <a:ahLst/>
+            <a:cxnLst>
+              <a:cxn ang="0">
+                <a:pos x="connsiteX0" y="connsiteY0"/>
+              </a:cxn>
+              <a:cxn ang="0">
+                <a:pos x="connsiteX1" y="connsiteY1"/>
+              </a:cxn>
+              <a:cxn ang="0">
+                <a:pos x="connsiteX2" y="connsiteY2"/>
+              </a:cxn>
+              <a:cxn ang="0">
+                <a:pos x="connsiteX3" y="connsiteY3"/>
+              </a:cxn>
+              <a:cxn ang="0">
+                <a:pos x="connsiteX4" y="connsiteY4"/>
+              </a:cxn>
+            </a:cxnLst>
+            <a:rect l="l" t="t" r="r" b="b"/>
+            <a:pathLst>
+              <a:path w="6172200" h="369332">
+                <a:moveTo>
+                  <a:pt x="0" y="0"/>
+                </a:moveTo>
+                <a:lnTo>
+                  <a:pt x="5791200" y="0"/>
+                </a:lnTo>
+                <a:lnTo>
+                  <a:pt x="6172200" y="369332"/>
+                </a:lnTo>
+                <a:lnTo>
+                  <a:pt x="0" y="369332"/>
+                </a:lnTo>
+                <a:lnTo>
+                  <a:pt x="0" y="0"/>
+                </a:lnTo>
+                <a:close/>
+              </a:path>
+            </a:pathLst>
+          </a:custGeom>
+          <a:solidFill>
+            <a:schemeClr val="accent1">
+              <a:lumMod val="75000"/>
+            </a:schemeClr>
+          </a:solidFill>
+        </p:spPr>
+        <p:txBody>
+          <a:bodyPr wrap="square" rtlCol="0">
+            <a:spAutoFit/>
+          </a:bodyPr>
+          <a:lstStyle/>
+          <a:p>
+            <a:pPr algn="ctr"/>
+            <a:r>
+              <a:rPr lang="en-IN" sz="2400" spc="600" dirty="0">
                 <a:solidFill>
-                  <a:srgbClr val="262626"/>
+                  <a:schemeClr val="bg1"/>
                 </a:solidFill>
-                <a:latin typeface="Times New Roman"/>
+                <a:latin typeface="Gill Sans MT" panose="020B0502020104020203" pitchFamily="34" charset="0"/>
               </a:rPr>
-              <a:t>•  Mock session session_20261014_193910: 30 samples at ~1 Hz, rest to walk to run.</a:t>
-            </a:r>
-          </a:p>
-          <a:p>
-            <a:pPr algn="l">
-              <a:spcAft>
-                <a:spcPts val="1000"/>
-              </a:spcAft>
-            </a:pPr>
-            <a:r>
-              <a:rPr sz="1500" b="0" i="0">
-                <a:solidFill>
-                  <a:srgbClr val="262626"/>
-                </a:solidFill>
-                <a:latin typeface="Times New Roman"/>
-              </a:rPr>
-              <a:t>•  Heart rate 63 → 155 bpm tracks activity phases; motion intensity 0.04 → 0.92.</a:t>
-            </a:r>
-          </a:p>
-          <a:p>
-            <a:pPr algn="l">
-              <a:spcAft>
-                <a:spcPts val="1000"/>
-              </a:spcAft>
-            </a:pPr>
-            <a:r>
-              <a:rPr sz="1500" b="0" i="0">
-                <a:solidFill>
-                  <a:srgbClr val="262626"/>
-                </a:solidFill>
-                <a:latin typeface="Times New Roman"/>
-              </a:rPr>
-              <a:t>•  Schema: 8-field strict validation (timestamp, heart_rate, spo2, activity, motion_intensity, exertion, steps, ppg_quality); rejects logged with reason.</a:t>
-            </a:r>
-          </a:p>
-          <a:p>
-            <a:pPr algn="l">
-              <a:spcAft>
-                <a:spcPts val="1000"/>
-              </a:spcAft>
-            </a:pPr>
-            <a:r>
-              <a:rPr sz="1500" b="0" i="0">
-                <a:solidFill>
-                  <a:srgbClr val="262626"/>
-                </a:solidFill>
-                <a:latin typeface="Times New Roman"/>
-              </a:rPr>
-              <a:t>•  Dashboard: received-vs-dropped counters on every run; BLE bridge routed-vs-rejected likewise.</a:t>
-            </a:r>
-          </a:p>
-          <a:p>
-            <a:pPr algn="l">
-              <a:spcAft>
-                <a:spcPts val="1000"/>
-              </a:spcAft>
-            </a:pPr>
-            <a:r>
-              <a:rPr sz="1500" b="0" i="0">
-                <a:solidFill>
-                  <a:srgbClr val="262626"/>
-                </a:solidFill>
-                <a:latin typeface="Times New Roman"/>
-              </a:rPr>
-              <a:t>•  Voice: real STT measured 0.48 s per clip (synthesized audio), total well under the 5.0 s gate; grounding verify is FAIL-closed — ungrounded replies are never spoken.</a:t>
+              <a:t>LEARN . GROW . EXCEL</a:t>
             </a:r>
           </a:p>
         </p:txBody>
@@ -5734,8 +7067,8 @@
 </p:sld>
 </file>
 
-<file path=ppt/slides/slide7.xml><?xml version="1.0" encoding="utf-8"?>
-<p:sld xmlns:a="http://schemas.openxmlformats.org/drawingml/2006/main" xmlns:p="http://schemas.openxmlformats.org/presentationml/2006/main" xmlns:r="http://schemas.openxmlformats.org/officeDocument/2006/relationships">
+<file path=ppt/slides/slide8.xml><?xml version="1.0" encoding="utf-8"?>
+<p:sld xmlns:a="http://schemas.openxmlformats.org/drawingml/2006/main" xmlns:r="http://schemas.openxmlformats.org/officeDocument/2006/relationships" xmlns:p="http://schemas.openxmlformats.org/presentationml/2006/main">
   <p:cSld>
     <p:spTree>
       <p:nvGrpSpPr>
@@ -5743,7 +7076,14 @@
         <p:cNvGrpSpPr/>
         <p:nvPr/>
       </p:nvGrpSpPr>
-      <p:grpSpPr/>
+      <p:grpSpPr>
+        <a:xfrm>
+          <a:off x="0" y="0"/>
+          <a:ext cx="0" cy="0"/>
+          <a:chOff x="0" y="0"/>
+          <a:chExt cx="0" cy="0"/>
+        </a:xfrm>
+      </p:grpSpPr>
       <p:sp>
         <p:nvSpPr>
           <p:cNvPr id="2" name="Title 1"/>
@@ -5772,7 +7112,7 @@
                 </a:solidFill>
                 <a:latin typeface="Times New Roman"/>
               </a:rPr>
-              <a:t>HARDWARE &amp; BOM</a:t>
+              <a:t>HARDWARE &amp; RUNTIME SCOPE</a:t>
             </a:r>
           </a:p>
         </p:txBody>
@@ -5803,45 +7143,6 @@
       </p:pic>
       <p:sp>
         <p:nvSpPr>
-          <p:cNvPr id="4" name="TextBox 3"/>
-          <p:cNvSpPr txBox="1"/>
-          <p:nvPr/>
-        </p:nvSpPr>
-        <p:spPr>
-          <a:xfrm>
-            <a:off x="0" y="6510528"/>
-            <a:ext cx="7690104" cy="338328"/>
-          </a:xfrm>
-          <a:prstGeom prst="rect">
-            <a:avLst/>
-          </a:prstGeom>
-          <a:noFill/>
-        </p:spPr>
-        <p:txBody>
-          <a:bodyPr wrap="square">
-            <a:spAutoFit/>
-          </a:bodyPr>
-          <a:lstStyle/>
-          <a:p>
-            <a:pPr algn="l">
-              <a:spcAft>
-                <a:spcPts val="600"/>
-              </a:spcAft>
-            </a:pPr>
-            <a:r>
-              <a:rPr sz="1600" b="0" i="0">
-                <a:solidFill>
-                  <a:srgbClr val="262626"/>
-                </a:solidFill>
-                <a:latin typeface="Times New Roman"/>
-              </a:rPr>
-              <a:t>LEARN . GROW . EXCEL</a:t>
-            </a:r>
-          </a:p>
-        </p:txBody>
-      </p:sp>
-      <p:sp>
-        <p:nvSpPr>
           <p:cNvPr id="5" name="TextBox 4"/>
           <p:cNvSpPr txBox="1"/>
           <p:nvPr/>
@@ -5885,29 +7186,65 @@
           <p:cNvGraphicFramePr>
             <a:graphicFrameLocks noGrp="1"/>
           </p:cNvGraphicFramePr>
-          <p:nvPr/>
+          <p:nvPr>
+            <p:extLst>
+              <p:ext uri="{D42A27DB-BD31-4B8C-83A1-F6EECF244321}">
+                <p14:modId xmlns:p14="http://schemas.microsoft.com/office/powerpoint/2010/main" val="252167401"/>
+              </p:ext>
+            </p:extLst>
+          </p:nvPr>
         </p:nvGraphicFramePr>
         <p:xfrm>
-          <a:off x="274320" y="1097280"/>
+          <a:off x="289560" y="702201"/>
           <a:ext cx="11612880" cy="3840480"/>
         </p:xfrm>
         <a:graphic>
           <a:graphicData uri="http://schemas.openxmlformats.org/drawingml/2006/table">
             <a:tbl>
-              <a:tblPr firstRow="1" bandRow="0" tableStyleId="{5940675A-B579-460E-94D1-542E71E4F335}">
+              <a:tblPr firstRow="1">
                 <a:tableStyleId>{5C22544A-7EE6-4342-B048-85BDC9FD1C3A}</a:tableStyleId>
               </a:tblPr>
               <a:tblGrid>
-                <a:gridCol w="548640"/>
-                <a:gridCol w="6217920"/>
-                <a:gridCol w="822960"/>
-                <a:gridCol w="1188720"/>
-                <a:gridCol w="2834640"/>
+                <a:gridCol w="548640">
+                  <a:extLst>
+                    <a:ext uri="{9D8B030D-6E8A-4147-A177-3AD203B41FA5}">
+                      <a16:colId xmlns:a16="http://schemas.microsoft.com/office/drawing/2014/main" val="20000"/>
+                    </a:ext>
+                  </a:extLst>
+                </a:gridCol>
+                <a:gridCol w="6217920">
+                  <a:extLst>
+                    <a:ext uri="{9D8B030D-6E8A-4147-A177-3AD203B41FA5}">
+                      <a16:colId xmlns:a16="http://schemas.microsoft.com/office/drawing/2014/main" val="20001"/>
+                    </a:ext>
+                  </a:extLst>
+                </a:gridCol>
+                <a:gridCol w="822960">
+                  <a:extLst>
+                    <a:ext uri="{9D8B030D-6E8A-4147-A177-3AD203B41FA5}">
+                      <a16:colId xmlns:a16="http://schemas.microsoft.com/office/drawing/2014/main" val="20002"/>
+                    </a:ext>
+                  </a:extLst>
+                </a:gridCol>
+                <a:gridCol w="1188720">
+                  <a:extLst>
+                    <a:ext uri="{9D8B030D-6E8A-4147-A177-3AD203B41FA5}">
+                      <a16:colId xmlns:a16="http://schemas.microsoft.com/office/drawing/2014/main" val="20003"/>
+                    </a:ext>
+                  </a:extLst>
+                </a:gridCol>
+                <a:gridCol w="2834640">
+                  <a:extLst>
+                    <a:ext uri="{9D8B030D-6E8A-4147-A177-3AD203B41FA5}">
+                      <a16:colId xmlns:a16="http://schemas.microsoft.com/office/drawing/2014/main" val="20004"/>
+                    </a:ext>
+                  </a:extLst>
+                </a:gridCol>
               </a:tblGrid>
               <a:tr h="480060">
                 <a:tc>
                   <a:txBody>
-                    <a:bodyPr/>
+                    <a:bodyPr wrap="square"/>
                     <a:lstStyle/>
                     <a:p>
                       <a:pPr>
@@ -5934,7 +7271,7 @@
                 </a:tc>
                 <a:tc>
                   <a:txBody>
-                    <a:bodyPr/>
+                    <a:bodyPr wrap="square"/>
                     <a:lstStyle/>
                     <a:p>
                       <a:pPr>
@@ -5961,7 +7298,7 @@
                 </a:tc>
                 <a:tc>
                   <a:txBody>
-                    <a:bodyPr/>
+                    <a:bodyPr wrap="square"/>
                     <a:lstStyle/>
                     <a:p>
                       <a:pPr>
@@ -5988,7 +7325,7 @@
                 </a:tc>
                 <a:tc>
                   <a:txBody>
-                    <a:bodyPr/>
+                    <a:bodyPr wrap="square"/>
                     <a:lstStyle/>
                     <a:p>
                       <a:pPr>
@@ -6015,7 +7352,1268 @@
                 </a:tc>
                 <a:tc>
                   <a:txBody>
-                    <a:bodyPr/>
+                    <a:bodyPr wrap="square"/>
+                    <a:lstStyle/>
+                    <a:p>
+                      <a:pPr>
+                        <a:spcAft>
+                          <a:spcPts val="100"/>
+                        </a:spcAft>
+                      </a:pPr>
+                      <a:r>
+                        <a:rPr sz="1300" b="1" i="0">
+                          <a:solidFill>
+                            <a:srgbClr val="FF0000"/>
+                          </a:solidFill>
+                          <a:latin typeface="Times New Roman"/>
+                        </a:rPr>
+                        <a:t>ROLE / STATUS</a:t>
+                      </a:r>
+                    </a:p>
+                  </a:txBody>
+                  <a:tcPr>
+                    <a:solidFill>
+                      <a:srgbClr val="D9D9D9"/>
+                    </a:solidFill>
+                  </a:tcPr>
+                </a:tc>
+                <a:extLst>
+                  <a:ext uri="{0D108BD9-81ED-4DB2-BD59-A6C34878D82A}">
+                    <a16:rowId xmlns:a16="http://schemas.microsoft.com/office/drawing/2014/main" val="10000"/>
+                  </a:ext>
+                </a:extLst>
+              </a:tr>
+              <a:tr h="480060">
+                <a:tc>
+                  <a:txBody>
+                    <a:bodyPr wrap="square"/>
+                    <a:lstStyle/>
+                    <a:p>
+                      <a:pPr>
+                        <a:spcAft>
+                          <a:spcPts val="100"/>
+                        </a:spcAft>
+                      </a:pPr>
+                      <a:r>
+                        <a:rPr sz="900" b="0" i="0">
+                          <a:solidFill>
+                            <a:srgbClr val="262626"/>
+                          </a:solidFill>
+                          <a:latin typeface="Times New Roman"/>
+                        </a:rPr>
+                        <a:t>1</a:t>
+                      </a:r>
+                    </a:p>
+                  </a:txBody>
+                  <a:tcPr/>
+                </a:tc>
+                <a:tc>
+                  <a:txBody>
+                    <a:bodyPr wrap="square"/>
+                    <a:lstStyle/>
+                    <a:p>
+                      <a:pPr>
+                        <a:spcAft>
+                          <a:spcPts val="100"/>
+                        </a:spcAft>
+                      </a:pPr>
+                      <a:r>
+                        <a:rPr sz="900" b="0" i="0">
+                          <a:solidFill>
+                            <a:srgbClr val="262626"/>
+                          </a:solidFill>
+                          <a:latin typeface="Times New Roman"/>
+                        </a:rPr>
+                        <a:t>Native FreeRTOS v11 node</a:t>
+                      </a:r>
+                    </a:p>
+                  </a:txBody>
+                  <a:tcPr/>
+                </a:tc>
+                <a:tc>
+                  <a:txBody>
+                    <a:bodyPr wrap="square"/>
+                    <a:lstStyle/>
+                    <a:p>
+                      <a:pPr>
+                        <a:spcAft>
+                          <a:spcPts val="100"/>
+                        </a:spcAft>
+                      </a:pPr>
+                      <a:r>
+                        <a:rPr sz="900" b="0" i="0">
+                          <a:solidFill>
+                            <a:srgbClr val="262626"/>
+                          </a:solidFill>
+                          <a:latin typeface="Times New Roman"/>
+                        </a:rPr>
+                        <a:t>1</a:t>
+                      </a:r>
+                    </a:p>
+                  </a:txBody>
+                  <a:tcPr/>
+                </a:tc>
+                <a:tc>
+                  <a:txBody>
+                    <a:bodyPr wrap="square"/>
+                    <a:lstStyle/>
+                    <a:p>
+                      <a:pPr>
+                        <a:spcAft>
+                          <a:spcPts val="100"/>
+                        </a:spcAft>
+                      </a:pPr>
+                      <a:r>
+                        <a:rPr sz="900" b="0" i="0">
+                          <a:solidFill>
+                            <a:srgbClr val="262626"/>
+                          </a:solidFill>
+                          <a:latin typeface="Times New Roman"/>
+                        </a:rPr>
+                        <a:t>—</a:t>
+                      </a:r>
+                    </a:p>
+                  </a:txBody>
+                  <a:tcPr/>
+                </a:tc>
+                <a:tc>
+                  <a:txBody>
+                    <a:bodyPr wrap="square"/>
+                    <a:lstStyle/>
+                    <a:p>
+                      <a:pPr>
+                        <a:spcAft>
+                          <a:spcPts val="100"/>
+                        </a:spcAft>
+                      </a:pPr>
+                      <a:r>
+                        <a:rPr sz="900" b="0" i="0">
+                          <a:solidFill>
+                            <a:srgbClr val="262626"/>
+                          </a:solidFill>
+                          <a:latin typeface="Times New Roman"/>
+                        </a:rPr>
+                        <a:t>active offline control lane</a:t>
+                      </a:r>
+                    </a:p>
+                  </a:txBody>
+                  <a:tcPr/>
+                </a:tc>
+                <a:extLst>
+                  <a:ext uri="{0D108BD9-81ED-4DB2-BD59-A6C34878D82A}">
+                    <a16:rowId xmlns:a16="http://schemas.microsoft.com/office/drawing/2014/main" val="10001"/>
+                  </a:ext>
+                </a:extLst>
+              </a:tr>
+              <a:tr h="480060">
+                <a:tc>
+                  <a:txBody>
+                    <a:bodyPr wrap="square"/>
+                    <a:lstStyle/>
+                    <a:p>
+                      <a:pPr>
+                        <a:spcAft>
+                          <a:spcPts val="100"/>
+                        </a:spcAft>
+                      </a:pPr>
+                      <a:r>
+                        <a:rPr sz="900" b="0" i="0">
+                          <a:solidFill>
+                            <a:srgbClr val="262626"/>
+                          </a:solidFill>
+                          <a:latin typeface="Times New Roman"/>
+                        </a:rPr>
+                        <a:t>2</a:t>
+                      </a:r>
+                    </a:p>
+                  </a:txBody>
+                  <a:tcPr/>
+                </a:tc>
+                <a:tc>
+                  <a:txBody>
+                    <a:bodyPr wrap="square"/>
+                    <a:lstStyle/>
+                    <a:p>
+                      <a:pPr>
+                        <a:spcAft>
+                          <a:spcPts val="100"/>
+                        </a:spcAft>
+                      </a:pPr>
+                      <a:r>
+                        <a:rPr sz="900" b="0" i="0">
+                          <a:solidFill>
+                            <a:srgbClr val="262626"/>
+                          </a:solidFill>
+                          <a:latin typeface="Times New Roman"/>
+                        </a:rPr>
+                        <a:t>Huawei Band 6 + Health relay</a:t>
+                      </a:r>
+                    </a:p>
+                  </a:txBody>
+                  <a:tcPr/>
+                </a:tc>
+                <a:tc>
+                  <a:txBody>
+                    <a:bodyPr wrap="square"/>
+                    <a:lstStyle/>
+                    <a:p>
+                      <a:pPr>
+                        <a:spcAft>
+                          <a:spcPts val="100"/>
+                        </a:spcAft>
+                      </a:pPr>
+                      <a:r>
+                        <a:rPr sz="900" b="0" i="0">
+                          <a:solidFill>
+                            <a:srgbClr val="262626"/>
+                          </a:solidFill>
+                          <a:latin typeface="Times New Roman"/>
+                        </a:rPr>
+                        <a:t>1</a:t>
+                      </a:r>
+                    </a:p>
+                  </a:txBody>
+                  <a:tcPr/>
+                </a:tc>
+                <a:tc>
+                  <a:txBody>
+                    <a:bodyPr wrap="square"/>
+                    <a:lstStyle/>
+                    <a:p>
+                      <a:pPr>
+                        <a:spcAft>
+                          <a:spcPts val="100"/>
+                        </a:spcAft>
+                      </a:pPr>
+                      <a:r>
+                        <a:rPr sz="900" b="0" i="0">
+                          <a:solidFill>
+                            <a:srgbClr val="262626"/>
+                          </a:solidFill>
+                          <a:latin typeface="Times New Roman"/>
+                        </a:rPr>
+                        <a:t>—</a:t>
+                      </a:r>
+                    </a:p>
+                  </a:txBody>
+                  <a:tcPr/>
+                </a:tc>
+                <a:tc>
+                  <a:txBody>
+                    <a:bodyPr wrap="square"/>
+                    <a:lstStyle/>
+                    <a:p>
+                      <a:pPr>
+                        <a:spcAft>
+                          <a:spcPts val="100"/>
+                        </a:spcAft>
+                      </a:pPr>
+                      <a:r>
+                        <a:rPr sz="900" b="0" i="0">
+                          <a:solidFill>
+                            <a:srgbClr val="262626"/>
+                          </a:solidFill>
+                          <a:latin typeface="Times New Roman"/>
+                        </a:rPr>
+                        <a:t>active genuine-biometrics lane</a:t>
+                      </a:r>
+                    </a:p>
+                  </a:txBody>
+                  <a:tcPr/>
+                </a:tc>
+                <a:extLst>
+                  <a:ext uri="{0D108BD9-81ED-4DB2-BD59-A6C34878D82A}">
+                    <a16:rowId xmlns:a16="http://schemas.microsoft.com/office/drawing/2014/main" val="10002"/>
+                  </a:ext>
+                </a:extLst>
+              </a:tr>
+              <a:tr h="480060">
+                <a:tc>
+                  <a:txBody>
+                    <a:bodyPr wrap="square"/>
+                    <a:lstStyle/>
+                    <a:p>
+                      <a:pPr>
+                        <a:spcAft>
+                          <a:spcPts val="100"/>
+                        </a:spcAft>
+                      </a:pPr>
+                      <a:r>
+                        <a:rPr sz="900" b="0" i="0">
+                          <a:solidFill>
+                            <a:srgbClr val="262626"/>
+                          </a:solidFill>
+                          <a:latin typeface="Times New Roman"/>
+                        </a:rPr>
+                        <a:t>3</a:t>
+                      </a:r>
+                    </a:p>
+                  </a:txBody>
+                  <a:tcPr/>
+                </a:tc>
+                <a:tc>
+                  <a:txBody>
+                    <a:bodyPr wrap="square"/>
+                    <a:lstStyle/>
+                    <a:p>
+                      <a:pPr>
+                        <a:spcAft>
+                          <a:spcPts val="100"/>
+                        </a:spcAft>
+                      </a:pPr>
+                      <a:r>
+                        <a:rPr sz="900" b="0" i="0">
+                          <a:solidFill>
+                            <a:srgbClr val="262626"/>
+                          </a:solidFill>
+                          <a:latin typeface="Times New Roman"/>
+                        </a:rPr>
+                        <a:t>ESP32 DevKit V1 WROOM-32</a:t>
+                      </a:r>
+                    </a:p>
+                  </a:txBody>
+                  <a:tcPr/>
+                </a:tc>
+                <a:tc>
+                  <a:txBody>
+                    <a:bodyPr wrap="square"/>
+                    <a:lstStyle/>
+                    <a:p>
+                      <a:pPr>
+                        <a:spcAft>
+                          <a:spcPts val="100"/>
+                        </a:spcAft>
+                      </a:pPr>
+                      <a:r>
+                        <a:rPr sz="900" b="0" i="0">
+                          <a:solidFill>
+                            <a:srgbClr val="262626"/>
+                          </a:solidFill>
+                          <a:latin typeface="Times New Roman"/>
+                        </a:rPr>
+                        <a:t>2</a:t>
+                      </a:r>
+                    </a:p>
+                  </a:txBody>
+                  <a:tcPr/>
+                </a:tc>
+                <a:tc>
+                  <a:txBody>
+                    <a:bodyPr wrap="square"/>
+                    <a:lstStyle/>
+                    <a:p>
+                      <a:pPr>
+                        <a:spcAft>
+                          <a:spcPts val="100"/>
+                        </a:spcAft>
+                      </a:pPr>
+                      <a:r>
+                        <a:rPr sz="900" b="0" i="0">
+                          <a:solidFill>
+                            <a:srgbClr val="262626"/>
+                          </a:solidFill>
+                          <a:latin typeface="Times New Roman"/>
+                        </a:rPr>
+                        <a:t>998</a:t>
+                      </a:r>
+                    </a:p>
+                  </a:txBody>
+                  <a:tcPr/>
+                </a:tc>
+                <a:tc>
+                  <a:txBody>
+                    <a:bodyPr wrap="square"/>
+                    <a:lstStyle/>
+                    <a:p>
+                      <a:pPr>
+                        <a:spcAft>
+                          <a:spcPts val="100"/>
+                        </a:spcAft>
+                      </a:pPr>
+                      <a:r>
+                        <a:rPr sz="900" b="0" i="0">
+                          <a:solidFill>
+                            <a:srgbClr val="262626"/>
+                          </a:solidFill>
+                          <a:latin typeface="Times New Roman"/>
+                        </a:rPr>
+                        <a:t>BOM / board path</a:t>
+                      </a:r>
+                    </a:p>
+                  </a:txBody>
+                  <a:tcPr/>
+                </a:tc>
+                <a:extLst>
+                  <a:ext uri="{0D108BD9-81ED-4DB2-BD59-A6C34878D82A}">
+                    <a16:rowId xmlns:a16="http://schemas.microsoft.com/office/drawing/2014/main" val="10003"/>
+                  </a:ext>
+                </a:extLst>
+              </a:tr>
+              <a:tr h="480060">
+                <a:tc>
+                  <a:txBody>
+                    <a:bodyPr wrap="square"/>
+                    <a:lstStyle/>
+                    <a:p>
+                      <a:pPr>
+                        <a:spcAft>
+                          <a:spcPts val="100"/>
+                        </a:spcAft>
+                      </a:pPr>
+                      <a:r>
+                        <a:rPr sz="900" b="0" i="0">
+                          <a:solidFill>
+                            <a:srgbClr val="262626"/>
+                          </a:solidFill>
+                          <a:latin typeface="Times New Roman"/>
+                        </a:rPr>
+                        <a:t>4</a:t>
+                      </a:r>
+                    </a:p>
+                  </a:txBody>
+                  <a:tcPr/>
+                </a:tc>
+                <a:tc>
+                  <a:txBody>
+                    <a:bodyPr wrap="square"/>
+                    <a:lstStyle/>
+                    <a:p>
+                      <a:pPr>
+                        <a:spcAft>
+                          <a:spcPts val="100"/>
+                        </a:spcAft>
+                      </a:pPr>
+                      <a:r>
+                        <a:rPr sz="900" b="0" i="0">
+                          <a:solidFill>
+                            <a:srgbClr val="262626"/>
+                          </a:solidFill>
+                          <a:latin typeface="Times New Roman"/>
+                        </a:rPr>
+                        <a:t>MPU6050 + HC-SR04 + IR</a:t>
+                      </a:r>
+                    </a:p>
+                  </a:txBody>
+                  <a:tcPr/>
+                </a:tc>
+                <a:tc>
+                  <a:txBody>
+                    <a:bodyPr wrap="square"/>
+                    <a:lstStyle/>
+                    <a:p>
+                      <a:pPr>
+                        <a:spcAft>
+                          <a:spcPts val="100"/>
+                        </a:spcAft>
+                      </a:pPr>
+                      <a:r>
+                        <a:rPr sz="900" b="0" i="0">
+                          <a:solidFill>
+                            <a:srgbClr val="262626"/>
+                          </a:solidFill>
+                          <a:latin typeface="Times New Roman"/>
+                        </a:rPr>
+                        <a:t>1</a:t>
+                      </a:r>
+                    </a:p>
+                  </a:txBody>
+                  <a:tcPr/>
+                </a:tc>
+                <a:tc>
+                  <a:txBody>
+                    <a:bodyPr wrap="square"/>
+                    <a:lstStyle/>
+                    <a:p>
+                      <a:pPr>
+                        <a:spcAft>
+                          <a:spcPts val="100"/>
+                        </a:spcAft>
+                      </a:pPr>
+                      <a:r>
+                        <a:rPr sz="900" b="0" i="0">
+                          <a:solidFill>
+                            <a:srgbClr val="262626"/>
+                          </a:solidFill>
+                          <a:latin typeface="Times New Roman"/>
+                        </a:rPr>
+                        <a:t>470</a:t>
+                      </a:r>
+                    </a:p>
+                  </a:txBody>
+                  <a:tcPr/>
+                </a:tc>
+                <a:tc>
+                  <a:txBody>
+                    <a:bodyPr wrap="square"/>
+                    <a:lstStyle/>
+                    <a:p>
+                      <a:pPr>
+                        <a:spcAft>
+                          <a:spcPts val="100"/>
+                        </a:spcAft>
+                      </a:pPr>
+                      <a:r>
+                        <a:rPr sz="900" b="0" i="0">
+                          <a:solidFill>
+                            <a:srgbClr val="262626"/>
+                          </a:solidFill>
+                          <a:latin typeface="Times New Roman"/>
+                        </a:rPr>
+                        <a:t>planned sensing path</a:t>
+                      </a:r>
+                    </a:p>
+                  </a:txBody>
+                  <a:tcPr/>
+                </a:tc>
+                <a:extLst>
+                  <a:ext uri="{0D108BD9-81ED-4DB2-BD59-A6C34878D82A}">
+                    <a16:rowId xmlns:a16="http://schemas.microsoft.com/office/drawing/2014/main" val="10004"/>
+                  </a:ext>
+                </a:extLst>
+              </a:tr>
+              <a:tr h="480060">
+                <a:tc>
+                  <a:txBody>
+                    <a:bodyPr wrap="square"/>
+                    <a:lstStyle/>
+                    <a:p>
+                      <a:pPr>
+                        <a:spcAft>
+                          <a:spcPts val="100"/>
+                        </a:spcAft>
+                      </a:pPr>
+                      <a:r>
+                        <a:rPr sz="900" b="0" i="0">
+                          <a:solidFill>
+                            <a:srgbClr val="262626"/>
+                          </a:solidFill>
+                          <a:latin typeface="Times New Roman"/>
+                        </a:rPr>
+                        <a:t>5</a:t>
+                      </a:r>
+                    </a:p>
+                  </a:txBody>
+                  <a:tcPr/>
+                </a:tc>
+                <a:tc>
+                  <a:txBody>
+                    <a:bodyPr wrap="square"/>
+                    <a:lstStyle/>
+                    <a:p>
+                      <a:pPr>
+                        <a:spcAft>
+                          <a:spcPts val="100"/>
+                        </a:spcAft>
+                      </a:pPr>
+                      <a:r>
+                        <a:rPr sz="900" b="0" i="0">
+                          <a:solidFill>
+                            <a:srgbClr val="262626"/>
+                          </a:solidFill>
+                          <a:latin typeface="Times New Roman"/>
+                        </a:rPr>
+                        <a:t>DHT22 + breadboard/jumpers</a:t>
+                      </a:r>
+                    </a:p>
+                  </a:txBody>
+                  <a:tcPr/>
+                </a:tc>
+                <a:tc>
+                  <a:txBody>
+                    <a:bodyPr wrap="square"/>
+                    <a:lstStyle/>
+                    <a:p>
+                      <a:pPr>
+                        <a:spcAft>
+                          <a:spcPts val="100"/>
+                        </a:spcAft>
+                      </a:pPr>
+                      <a:r>
+                        <a:rPr sz="900" b="0" i="0">
+                          <a:solidFill>
+                            <a:srgbClr val="262626"/>
+                          </a:solidFill>
+                          <a:latin typeface="Times New Roman"/>
+                        </a:rPr>
+                        <a:t>1</a:t>
+                      </a:r>
+                    </a:p>
+                  </a:txBody>
+                  <a:tcPr/>
+                </a:tc>
+                <a:tc>
+                  <a:txBody>
+                    <a:bodyPr wrap="square"/>
+                    <a:lstStyle/>
+                    <a:p>
+                      <a:pPr>
+                        <a:spcAft>
+                          <a:spcPts val="100"/>
+                        </a:spcAft>
+                      </a:pPr>
+                      <a:r>
+                        <a:rPr sz="900" b="0" i="0">
+                          <a:solidFill>
+                            <a:srgbClr val="262626"/>
+                          </a:solidFill>
+                          <a:latin typeface="Times New Roman"/>
+                        </a:rPr>
+                        <a:t>808</a:t>
+                      </a:r>
+                    </a:p>
+                  </a:txBody>
+                  <a:tcPr/>
+                </a:tc>
+                <a:tc>
+                  <a:txBody>
+                    <a:bodyPr wrap="square"/>
+                    <a:lstStyle/>
+                    <a:p>
+                      <a:pPr>
+                        <a:spcAft>
+                          <a:spcPts val="100"/>
+                        </a:spcAft>
+                      </a:pPr>
+                      <a:r>
+                        <a:rPr sz="900" b="0" i="0">
+                          <a:solidFill>
+                            <a:srgbClr val="262626"/>
+                          </a:solidFill>
+                          <a:latin typeface="Times New Roman"/>
+                        </a:rPr>
+                        <a:t>planned sensing path</a:t>
+                      </a:r>
+                    </a:p>
+                  </a:txBody>
+                  <a:tcPr/>
+                </a:tc>
+                <a:extLst>
+                  <a:ext uri="{0D108BD9-81ED-4DB2-BD59-A6C34878D82A}">
+                    <a16:rowId xmlns:a16="http://schemas.microsoft.com/office/drawing/2014/main" val="10005"/>
+                  </a:ext>
+                </a:extLst>
+              </a:tr>
+              <a:tr h="480060">
+                <a:tc>
+                  <a:txBody>
+                    <a:bodyPr wrap="square"/>
+                    <a:lstStyle/>
+                    <a:p>
+                      <a:pPr>
+                        <a:spcAft>
+                          <a:spcPts val="100"/>
+                        </a:spcAft>
+                      </a:pPr>
+                      <a:r>
+                        <a:rPr sz="900" b="0" i="0">
+                          <a:solidFill>
+                            <a:srgbClr val="262626"/>
+                          </a:solidFill>
+                          <a:latin typeface="Times New Roman"/>
+                        </a:rPr>
+                        <a:t>6</a:t>
+                      </a:r>
+                    </a:p>
+                  </a:txBody>
+                  <a:tcPr/>
+                </a:tc>
+                <a:tc>
+                  <a:txBody>
+                    <a:bodyPr wrap="square"/>
+                    <a:lstStyle/>
+                    <a:p>
+                      <a:pPr>
+                        <a:spcAft>
+                          <a:spcPts val="100"/>
+                        </a:spcAft>
+                      </a:pPr>
+                      <a:r>
+                        <a:rPr sz="900" b="0" i="0">
+                          <a:solidFill>
+                            <a:srgbClr val="262626"/>
+                          </a:solidFill>
+                          <a:latin typeface="Times New Roman"/>
+                        </a:rPr>
+                        <a:t>Wokwi ESP32 simulation</a:t>
+                      </a:r>
+                    </a:p>
+                  </a:txBody>
+                  <a:tcPr/>
+                </a:tc>
+                <a:tc>
+                  <a:txBody>
+                    <a:bodyPr wrap="square"/>
+                    <a:lstStyle/>
+                    <a:p>
+                      <a:pPr>
+                        <a:spcAft>
+                          <a:spcPts val="100"/>
+                        </a:spcAft>
+                      </a:pPr>
+                      <a:r>
+                        <a:rPr sz="900" b="0" i="0">
+                          <a:solidFill>
+                            <a:srgbClr val="262626"/>
+                          </a:solidFill>
+                          <a:latin typeface="Times New Roman"/>
+                        </a:rPr>
+                        <a:t>1</a:t>
+                      </a:r>
+                    </a:p>
+                  </a:txBody>
+                  <a:tcPr/>
+                </a:tc>
+                <a:tc>
+                  <a:txBody>
+                    <a:bodyPr wrap="square"/>
+                    <a:lstStyle/>
+                    <a:p>
+                      <a:pPr>
+                        <a:spcAft>
+                          <a:spcPts val="100"/>
+                        </a:spcAft>
+                      </a:pPr>
+                      <a:r>
+                        <a:rPr sz="900" b="0" i="0">
+                          <a:solidFill>
+                            <a:srgbClr val="262626"/>
+                          </a:solidFill>
+                          <a:latin typeface="Times New Roman"/>
+                        </a:rPr>
+                        <a:t>—</a:t>
+                      </a:r>
+                    </a:p>
+                  </a:txBody>
+                  <a:tcPr/>
+                </a:tc>
+                <a:tc>
+                  <a:txBody>
+                    <a:bodyPr wrap="square"/>
+                    <a:lstStyle/>
+                    <a:p>
+                      <a:pPr>
+                        <a:spcAft>
+                          <a:spcPts val="100"/>
+                        </a:spcAft>
+                      </a:pPr>
+                      <a:r>
+                        <a:rPr sz="900" b="0" i="0">
+                          <a:solidFill>
+                            <a:srgbClr val="262626"/>
+                          </a:solidFill>
+                          <a:latin typeface="Times New Roman"/>
+                        </a:rPr>
+                        <a:t>browser RTOS exhibit</a:t>
+                      </a:r>
+                    </a:p>
+                  </a:txBody>
+                  <a:tcPr/>
+                </a:tc>
+                <a:extLst>
+                  <a:ext uri="{0D108BD9-81ED-4DB2-BD59-A6C34878D82A}">
+                    <a16:rowId xmlns:a16="http://schemas.microsoft.com/office/drawing/2014/main" val="10006"/>
+                  </a:ext>
+                </a:extLst>
+              </a:tr>
+              <a:tr h="480060">
+                <a:tc>
+                  <a:txBody>
+                    <a:bodyPr wrap="square"/>
+                    <a:lstStyle/>
+                    <a:p>
+                      <a:pPr>
+                        <a:spcAft>
+                          <a:spcPts val="100"/>
+                        </a:spcAft>
+                      </a:pPr>
+                      <a:r>
+                        <a:rPr sz="900"/>
+                        <a:t/>
+                      </a:r>
+                      <a:endParaRPr/>
+                    </a:p>
+                  </a:txBody>
+                  <a:tcPr/>
+                </a:tc>
+                <a:tc>
+                  <a:txBody>
+                    <a:bodyPr wrap="square"/>
+                    <a:lstStyle/>
+                    <a:p>
+                      <a:pPr>
+                        <a:spcAft>
+                          <a:spcPts val="100"/>
+                        </a:spcAft>
+                      </a:pPr>
+                      <a:r>
+                        <a:rPr sz="900" b="0" i="0">
+                          <a:solidFill>
+                            <a:srgbClr val="262626"/>
+                          </a:solidFill>
+                          <a:latin typeface="Times New Roman"/>
+                        </a:rPr>
+                        <a:t>Tier-A BOM retained</a:t>
+                      </a:r>
+                    </a:p>
+                  </a:txBody>
+                  <a:tcPr/>
+                </a:tc>
+                <a:tc>
+                  <a:txBody>
+                    <a:bodyPr wrap="square"/>
+                    <a:lstStyle/>
+                    <a:p>
+                      <a:pPr>
+                        <a:spcAft>
+                          <a:spcPts val="100"/>
+                        </a:spcAft>
+                      </a:pPr>
+                      <a:r>
+                        <a:rPr sz="900"/>
+                        <a:t/>
+                      </a:r>
+                      <a:endParaRPr/>
+                    </a:p>
+                  </a:txBody>
+                  <a:tcPr/>
+                </a:tc>
+                <a:tc>
+                  <a:txBody>
+                    <a:bodyPr wrap="square"/>
+                    <a:lstStyle/>
+                    <a:p>
+                      <a:pPr>
+                        <a:spcAft>
+                          <a:spcPts val="100"/>
+                        </a:spcAft>
+                      </a:pPr>
+                      <a:r>
+                        <a:rPr sz="900" b="0" i="0">
+                          <a:solidFill>
+                            <a:srgbClr val="262626"/>
+                          </a:solidFill>
+                          <a:latin typeface="Times New Roman"/>
+                        </a:rPr>
+                        <a:t>≈1,950</a:t>
+                      </a:r>
+                    </a:p>
+                  </a:txBody>
+                  <a:tcPr/>
+                </a:tc>
+                <a:tc>
+                  <a:txBody>
+                    <a:bodyPr wrap="square"/>
+                    <a:lstStyle/>
+                    <a:p>
+                      <a:pPr>
+                        <a:spcAft>
+                          <a:spcPts val="100"/>
+                        </a:spcAft>
+                      </a:pPr>
+                      <a:r>
+                        <a:rPr sz="900" b="0" i="0">
+                          <a:solidFill>
+                            <a:srgbClr val="262626"/>
+                          </a:solidFill>
+                          <a:latin typeface="Times New Roman"/>
+                        </a:rPr>
+                        <a:t>design evidence; not new field data</a:t>
+                      </a:r>
+                    </a:p>
+                  </a:txBody>
+                  <a:tcPr/>
+                </a:tc>
+                <a:extLst>
+                  <a:ext uri="{0D108BD9-81ED-4DB2-BD59-A6C34878D82A}">
+                    <a16:rowId xmlns:a16="http://schemas.microsoft.com/office/drawing/2014/main" val="10007"/>
+                  </a:ext>
+                </a:extLst>
+              </a:tr>
+            </a:tbl>
+          </a:graphicData>
+        </a:graphic>
+      </p:graphicFrame>
+      <p:sp>
+        <p:nvSpPr>
+          <p:cNvPr id="7" name="TextBox 6"/>
+          <p:cNvSpPr txBox="1"/>
+          <p:nvPr/>
+        </p:nvSpPr>
+        <p:spPr>
+          <a:xfrm>
+            <a:off x="274320" y="4555361"/>
+            <a:ext cx="11612880" cy="1815882"/>
+          </a:xfrm>
+          <a:prstGeom prst="rect">
+            <a:avLst/>
+          </a:prstGeom>
+          <a:noFill/>
+        </p:spPr>
+        <p:txBody>
+          <a:bodyPr wrap="square">
+            <a:spAutoFit/>
+          </a:bodyPr>
+          <a:lstStyle/>
+          <a:p>
+            <a:r>
+              <a:t>Current scope &amp; mirror replacement</a:t>
+            </a:r>
+          </a:p>
+          <a:p>
+            <a:r>
+              <a:t>Laptop webcam functions as the mirror's eyes (presence &amp; motion). The Huawei Band 6 provides genuine wrist-worn telemetry without hardware fabrication delays.</a:t>
+            </a:r>
+          </a:p>
+          <a:p/>
+          <a:p>
+            <a:r>
+              <a:t>Why two runtime lanes?</a:t>
+            </a:r>
+          </a:p>
+          <a:p>
+            <a:r>
+              <a:t>Band Mode provides real, unsimulated physiological data. RTOS Mode fulfills syllabus concurrency and scheduling requirements with real FreeRTOS kernel execution.</a:t>
+            </a:r>
+          </a:p>
+          <a:p/>
+          <a:p>
+            <a:r>
+              <a:t>Safety boundary</a:t>
+            </a:r>
+          </a:p>
+          <a:p>
+            <a:r>
+              <a:t>All displayed metrics and AI responses are wellness estimates and lifestyle suggestions, not medical diagnoses.</a:t>
+            </a:r>
+          </a:p>
+        </p:txBody>
+      </p:sp>
+      <p:sp>
+        <p:nvSpPr>
+          <p:cNvPr id="9" name="TextBox 8">
+            <a:extLst>
+              <a:ext uri="{FF2B5EF4-FFF2-40B4-BE49-F238E27FC236}">
+                <a16:creationId xmlns:a16="http://schemas.microsoft.com/office/drawing/2014/main" id="{A9CFE61D-E855-B344-AC0D-E625F8E6E38D}"/>
+              </a:ext>
+            </a:extLst>
+          </p:cNvPr>
+          <p:cNvSpPr txBox="1"/>
+          <p:nvPr/>
+        </p:nvSpPr>
+        <p:spPr>
+          <a:xfrm>
+            <a:off x="0" y="6396335"/>
+            <a:ext cx="7686676" cy="461665"/>
+          </a:xfrm>
+          <a:custGeom>
+            <a:avLst/>
+            <a:gdLst>
+              <a:gd name="connsiteX0" fmla="*/ 0 w 6172200"/>
+              <a:gd name="connsiteY0" fmla="*/ 0 h 369332"/>
+              <a:gd name="connsiteX1" fmla="*/ 6172200 w 6172200"/>
+              <a:gd name="connsiteY1" fmla="*/ 0 h 369332"/>
+              <a:gd name="connsiteX2" fmla="*/ 6172200 w 6172200"/>
+              <a:gd name="connsiteY2" fmla="*/ 369332 h 369332"/>
+              <a:gd name="connsiteX3" fmla="*/ 0 w 6172200"/>
+              <a:gd name="connsiteY3" fmla="*/ 369332 h 369332"/>
+              <a:gd name="connsiteX4" fmla="*/ 0 w 6172200"/>
+              <a:gd name="connsiteY4" fmla="*/ 0 h 369332"/>
+              <a:gd name="connsiteX0" fmla="*/ 0 w 6172200"/>
+              <a:gd name="connsiteY0" fmla="*/ 0 h 369332"/>
+              <a:gd name="connsiteX1" fmla="*/ 5791200 w 6172200"/>
+              <a:gd name="connsiteY1" fmla="*/ 0 h 369332"/>
+              <a:gd name="connsiteX2" fmla="*/ 6172200 w 6172200"/>
+              <a:gd name="connsiteY2" fmla="*/ 369332 h 369332"/>
+              <a:gd name="connsiteX3" fmla="*/ 0 w 6172200"/>
+              <a:gd name="connsiteY3" fmla="*/ 369332 h 369332"/>
+              <a:gd name="connsiteX4" fmla="*/ 0 w 6172200"/>
+              <a:gd name="connsiteY4" fmla="*/ 0 h 369332"/>
+            </a:gdLst>
+            <a:ahLst/>
+            <a:cxnLst>
+              <a:cxn ang="0">
+                <a:pos x="connsiteX0" y="connsiteY0"/>
+              </a:cxn>
+              <a:cxn ang="0">
+                <a:pos x="connsiteX1" y="connsiteY1"/>
+              </a:cxn>
+              <a:cxn ang="0">
+                <a:pos x="connsiteX2" y="connsiteY2"/>
+              </a:cxn>
+              <a:cxn ang="0">
+                <a:pos x="connsiteX3" y="connsiteY3"/>
+              </a:cxn>
+              <a:cxn ang="0">
+                <a:pos x="connsiteX4" y="connsiteY4"/>
+              </a:cxn>
+            </a:cxnLst>
+            <a:rect l="l" t="t" r="r" b="b"/>
+            <a:pathLst>
+              <a:path w="6172200" h="369332">
+                <a:moveTo>
+                  <a:pt x="0" y="0"/>
+                </a:moveTo>
+                <a:lnTo>
+                  <a:pt x="5791200" y="0"/>
+                </a:lnTo>
+                <a:lnTo>
+                  <a:pt x="6172200" y="369332"/>
+                </a:lnTo>
+                <a:lnTo>
+                  <a:pt x="0" y="369332"/>
+                </a:lnTo>
+                <a:lnTo>
+                  <a:pt x="0" y="0"/>
+                </a:lnTo>
+                <a:close/>
+              </a:path>
+            </a:pathLst>
+          </a:custGeom>
+          <a:solidFill>
+            <a:schemeClr val="accent1">
+              <a:lumMod val="75000"/>
+            </a:schemeClr>
+          </a:solidFill>
+        </p:spPr>
+        <p:txBody>
+          <a:bodyPr wrap="square" rtlCol="0">
+            <a:spAutoFit/>
+          </a:bodyPr>
+          <a:lstStyle/>
+          <a:p>
+            <a:pPr algn="ctr"/>
+            <a:r>
+              <a:rPr lang="en-IN" sz="2400" spc="600" dirty="0">
+                <a:solidFill>
+                  <a:schemeClr val="bg1"/>
+                </a:solidFill>
+                <a:latin typeface="Gill Sans MT" panose="020B0502020104020203" pitchFamily="34" charset="0"/>
+              </a:rPr>
+              <a:t>LEARN . GROW . EXCEL</a:t>
+            </a:r>
+          </a:p>
+        </p:txBody>
+      </p:sp>
+    </p:spTree>
+  </p:cSld>
+  <p:clrMapOvr>
+    <a:masterClrMapping/>
+  </p:clrMapOvr>
+</p:sld>
+</file>
+
+<file path=ppt/slides/slide9.xml><?xml version="1.0" encoding="utf-8"?>
+<p:sld xmlns:a="http://schemas.openxmlformats.org/drawingml/2006/main" xmlns:r="http://schemas.openxmlformats.org/officeDocument/2006/relationships" xmlns:p="http://schemas.openxmlformats.org/presentationml/2006/main">
+  <p:cSld>
+    <p:spTree>
+      <p:nvGrpSpPr>
+        <p:cNvPr id="1" name=""/>
+        <p:cNvGrpSpPr/>
+        <p:nvPr/>
+      </p:nvGrpSpPr>
+      <p:grpSpPr>
+        <a:xfrm>
+          <a:off x="0" y="0"/>
+          <a:ext cx="0" cy="0"/>
+          <a:chOff x="0" y="0"/>
+          <a:chExt cx="0" cy="0"/>
+        </a:xfrm>
+      </p:grpSpPr>
+      <p:sp>
+        <p:nvSpPr>
+          <p:cNvPr id="2" name="Title 1"/>
+          <p:cNvSpPr>
+            <a:spLocks noGrp="1"/>
+          </p:cNvSpPr>
+          <p:nvPr>
+            <p:ph type="title"/>
+          </p:nvPr>
+        </p:nvSpPr>
+        <p:spPr>
+          <a:xfrm>
+            <a:off x="274320" y="137160"/>
+            <a:ext cx="10881360" cy="777240"/>
+          </a:xfrm>
+        </p:spPr>
+        <p:txBody>
+          <a:bodyPr wrap="square"/>
+          <a:lstStyle/>
+          <a:p>
+            <a:pPr algn="l"/>
+            <a:r>
+              <a:rPr sz="4000" b="1" i="0">
+                <a:solidFill>
+                  <a:srgbClr val="FF0000"/>
+                </a:solidFill>
+                <a:latin typeface="Times New Roman"/>
+              </a:rPr>
+              <a:t>FINAL STATUS &amp; DEMO PLAN</a:t>
+            </a:r>
+          </a:p>
+        </p:txBody>
+      </p:sp>
+      <p:pic>
+        <p:nvPicPr>
+          <p:cNvPr id="3" name="Picture 2" descr="saintgits_logo.png"/>
+          <p:cNvPicPr>
+            <a:picLocks noChangeAspect="1"/>
+          </p:cNvPicPr>
+          <p:nvPr/>
+        </p:nvPicPr>
+        <p:blipFill>
+          <a:blip r:embed="rId2"/>
+          <a:stretch>
+            <a:fillRect/>
+          </a:stretch>
+        </p:blipFill>
+        <p:spPr>
+          <a:xfrm>
+            <a:off x="11448288" y="100584"/>
+            <a:ext cx="621792" cy="704088"/>
+          </a:xfrm>
+          <a:prstGeom prst="rect">
+            <a:avLst/>
+          </a:prstGeom>
+        </p:spPr>
+      </p:pic>
+      <p:sp>
+        <p:nvSpPr>
+          <p:cNvPr id="5" name="TextBox 4"/>
+          <p:cNvSpPr txBox="1"/>
+          <p:nvPr/>
+        </p:nvSpPr>
+        <p:spPr>
+          <a:xfrm>
+            <a:off x="7690104" y="6446520"/>
+            <a:ext cx="4498848" cy="338328"/>
+          </a:xfrm>
+          <a:prstGeom prst="rect">
+            <a:avLst/>
+          </a:prstGeom>
+          <a:noFill/>
+        </p:spPr>
+        <p:txBody>
+          <a:bodyPr wrap="square">
+            <a:spAutoFit/>
+          </a:bodyPr>
+          <a:lstStyle/>
+          <a:p>
+            <a:pPr algn="r">
+              <a:spcAft>
+                <a:spcPts val="600"/>
+              </a:spcAft>
+            </a:pPr>
+            <a:r>
+              <a:rPr sz="1200" b="0" i="0">
+                <a:solidFill>
+                  <a:srgbClr val="262626"/>
+                </a:solidFill>
+                <a:latin typeface="Times New Roman"/>
+              </a:rPr>
+              <a:t>SAINTGITS COLLEGE (AUTONOMOUS)</a:t>
+            </a:r>
+          </a:p>
+        </p:txBody>
+      </p:sp>
+      <p:graphicFrame>
+        <p:nvGraphicFramePr>
+          <p:cNvPr id="6" name="Table 5"/>
+          <p:cNvGraphicFramePr>
+            <a:graphicFrameLocks noGrp="1"/>
+          </p:cNvGraphicFramePr>
+          <p:nvPr/>
+        </p:nvGraphicFramePr>
+        <p:xfrm>
+          <a:off x="274320" y="1097280"/>
+          <a:ext cx="6949440" cy="3657600"/>
+        </p:xfrm>
+        <a:graphic>
+          <a:graphicData uri="http://schemas.openxmlformats.org/drawingml/2006/table">
+            <a:tbl>
+              <a:tblPr firstRow="1">
+                <a:tableStyleId>{5C22544A-7EE6-4342-B048-85BDC9FD1C3A}</a:tableStyleId>
+              </a:tblPr>
+              <a:tblGrid>
+                <a:gridCol w="1188720">
+                  <a:extLst>
+                    <a:ext uri="{9D8B030D-6E8A-4147-A177-3AD203B41FA5}">
+                      <a16:colId xmlns:a16="http://schemas.microsoft.com/office/drawing/2014/main" val="20000"/>
+                    </a:ext>
+                  </a:extLst>
+                </a:gridCol>
+                <a:gridCol w="3931920">
+                  <a:extLst>
+                    <a:ext uri="{9D8B030D-6E8A-4147-A177-3AD203B41FA5}">
+                      <a16:colId xmlns:a16="http://schemas.microsoft.com/office/drawing/2014/main" val="20001"/>
+                    </a:ext>
+                  </a:extLst>
+                </a:gridCol>
+                <a:gridCol w="1828800">
+                  <a:extLst>
+                    <a:ext uri="{9D8B030D-6E8A-4147-A177-3AD203B41FA5}">
+                      <a16:colId xmlns:a16="http://schemas.microsoft.com/office/drawing/2014/main" val="20002"/>
+                    </a:ext>
+                  </a:extLst>
+                </a:gridCol>
+              </a:tblGrid>
+              <a:tr h="457200">
+                <a:tc>
+                  <a:txBody>
+                    <a:bodyPr wrap="square"/>
+                    <a:lstStyle/>
+                    <a:p>
+                      <a:pPr>
+                        <a:spcAft>
+                          <a:spcPts val="100"/>
+                        </a:spcAft>
+                      </a:pPr>
+                      <a:r>
+                        <a:rPr sz="1300" b="1" i="0">
+                          <a:solidFill>
+                            <a:srgbClr val="FF0000"/>
+                          </a:solidFill>
+                          <a:latin typeface="Times New Roman"/>
+                        </a:rPr>
+                        <a:t>TRACK</a:t>
+                      </a:r>
+                    </a:p>
+                  </a:txBody>
+                  <a:tcPr>
+                    <a:solidFill>
+                      <a:srgbClr val="D9D9D9"/>
+                    </a:solidFill>
+                  </a:tcPr>
+                </a:tc>
+                <a:tc>
+                  <a:txBody>
+                    <a:bodyPr wrap="square"/>
+                    <a:lstStyle/>
+                    <a:p>
+                      <a:pPr>
+                        <a:spcAft>
+                          <a:spcPts val="100"/>
+                        </a:spcAft>
+                      </a:pPr>
+                      <a:r>
+                        <a:rPr sz="1300" b="1" i="0">
+                          <a:solidFill>
+                            <a:srgbClr val="FF0000"/>
+                          </a:solidFill>
+                          <a:latin typeface="Times New Roman"/>
+                        </a:rPr>
+                        <a:t>DEMO PATH</a:t>
+                      </a:r>
+                    </a:p>
+                  </a:txBody>
+                  <a:tcPr>
+                    <a:solidFill>
+                      <a:srgbClr val="D9D9D9"/>
+                    </a:solidFill>
+                  </a:tcPr>
+                </a:tc>
+                <a:tc>
+                  <a:txBody>
+                    <a:bodyPr wrap="square"/>
                     <a:lstStyle/>
                     <a:p>
                       <a:pPr>
@@ -6040,11 +8638,16 @@
                     </a:solidFill>
                   </a:tcPr>
                 </a:tc>
+                <a:extLst>
+                  <a:ext uri="{0D108BD9-81ED-4DB2-BD59-A6C34878D82A}">
+                    <a16:rowId xmlns:a16="http://schemas.microsoft.com/office/drawing/2014/main" val="10000"/>
+                  </a:ext>
+                </a:extLst>
               </a:tr>
-              <a:tr h="480060">
+              <a:tr h="457200">
                 <a:tc>
                   <a:txBody>
-                    <a:bodyPr/>
+                    <a:bodyPr wrap="square"/>
                     <a:lstStyle/>
                     <a:p>
                       <a:pPr>
@@ -6053,13 +8656,13 @@
                         </a:spcAft>
                       </a:pPr>
                       <a:r>
-                        <a:rPr sz="1200" b="0" i="0">
+                        <a:rPr sz="900" b="0" i="0">
                           <a:solidFill>
                             <a:srgbClr val="262626"/>
                           </a:solidFill>
                           <a:latin typeface="Times New Roman"/>
                         </a:rPr>
-                        <a:t>1</a:t>
+                        <a:t>Lane A</a:t>
                       </a:r>
                     </a:p>
                   </a:txBody>
@@ -6067,7 +8670,7 @@
                 </a:tc>
                 <a:tc>
                   <a:txBody>
-                    <a:bodyPr/>
+                    <a:bodyPr wrap="square"/>
                     <a:lstStyle/>
                     <a:p>
                       <a:pPr>
@@ -6076,13 +8679,13 @@
                         </a:spcAft>
                       </a:pPr>
                       <a:r>
-                        <a:rPr sz="1200" b="0" i="0">
+                        <a:rPr sz="900" b="0" i="0">
                           <a:solidFill>
                             <a:srgbClr val="262626"/>
                           </a:solidFill>
                           <a:latin typeface="Times New Roman"/>
                         </a:rPr>
-                        <a:t>ESP32 DevKit V1 WROOM-32 (headers pre-soldered)</a:t>
+                        <a:t>Band 6 → Health → receiver → mirror</a:t>
                       </a:r>
                     </a:p>
                   </a:txBody>
@@ -6090,7 +8693,7 @@
                 </a:tc>
                 <a:tc>
                   <a:txBody>
-                    <a:bodyPr/>
+                    <a:bodyPr wrap="square"/>
                     <a:lstStyle/>
                     <a:p>
                       <a:pPr>
@@ -6099,21 +8702,28 @@
                         </a:spcAft>
                       </a:pPr>
                       <a:r>
-                        <a:rPr sz="1200" b="0" i="0">
+                        <a:rPr sz="900" b="0" i="0">
                           <a:solidFill>
                             <a:srgbClr val="262626"/>
                           </a:solidFill>
                           <a:latin typeface="Times New Roman"/>
                         </a:rPr>
-                        <a:t>2</a:t>
+                        <a:t>genuine when fresh</a:t>
                       </a:r>
                     </a:p>
                   </a:txBody>
                   <a:tcPr/>
                 </a:tc>
+                <a:extLst>
+                  <a:ext uri="{0D108BD9-81ED-4DB2-BD59-A6C34878D82A}">
+                    <a16:rowId xmlns:a16="http://schemas.microsoft.com/office/drawing/2014/main" val="10001"/>
+                  </a:ext>
+                </a:extLst>
+              </a:tr>
+              <a:tr h="457200">
                 <a:tc>
                   <a:txBody>
-                    <a:bodyPr/>
+                    <a:bodyPr wrap="square"/>
                     <a:lstStyle/>
                     <a:p>
                       <a:pPr>
@@ -6122,13 +8732,13 @@
                         </a:spcAft>
                       </a:pPr>
                       <a:r>
-                        <a:rPr sz="1200" b="0" i="0">
+                        <a:rPr sz="900" b="0" i="0">
                           <a:solidFill>
                             <a:srgbClr val="262626"/>
                           </a:solidFill>
                           <a:latin typeface="Times New Roman"/>
                         </a:rPr>
-                        <a:t>998</a:t>
+                        <a:t>Lane B</a:t>
                       </a:r>
                     </a:p>
                   </a:txBody>
@@ -6136,7 +8746,7 @@
                 </a:tc>
                 <a:tc>
                   <a:txBody>
-                    <a:bodyPr/>
+                    <a:bodyPr wrap="square"/>
                     <a:lstStyle/>
                     <a:p>
                       <a:pPr>
@@ -6145,23 +8755,21 @@
                         </a:spcAft>
                       </a:pPr>
                       <a:r>
-                        <a:rPr sz="1200" b="0" i="0">
+                        <a:rPr sz="900" b="0" i="0">
                           <a:solidFill>
                             <a:srgbClr val="262626"/>
                           </a:solidFill>
                           <a:latin typeface="Times New Roman"/>
                         </a:rPr>
-                        <a:t>Ordered</a:t>
+                        <a:t>native FreeRTOS → mirror</a:t>
                       </a:r>
                     </a:p>
                   </a:txBody>
                   <a:tcPr/>
                 </a:tc>
-              </a:tr>
-              <a:tr h="480060">
                 <a:tc>
                   <a:txBody>
-                    <a:bodyPr/>
+                    <a:bodyPr wrap="square"/>
                     <a:lstStyle/>
                     <a:p>
                       <a:pPr>
@@ -6170,21 +8778,28 @@
                         </a:spcAft>
                       </a:pPr>
                       <a:r>
-                        <a:rPr sz="1200" b="0" i="0">
+                        <a:rPr sz="900" b="0" i="0">
                           <a:solidFill>
                             <a:srgbClr val="262626"/>
                           </a:solidFill>
                           <a:latin typeface="Times New Roman"/>
                         </a:rPr>
-                        <a:t>2</a:t>
+                        <a:t>offline / deterministic</a:t>
                       </a:r>
                     </a:p>
                   </a:txBody>
                   <a:tcPr/>
                 </a:tc>
+                <a:extLst>
+                  <a:ext uri="{0D108BD9-81ED-4DB2-BD59-A6C34878D82A}">
+                    <a16:rowId xmlns:a16="http://schemas.microsoft.com/office/drawing/2014/main" val="10002"/>
+                  </a:ext>
+                </a:extLst>
+              </a:tr>
+              <a:tr h="457200">
                 <a:tc>
                   <a:txBody>
-                    <a:bodyPr/>
+                    <a:bodyPr wrap="square"/>
                     <a:lstStyle/>
                     <a:p>
                       <a:pPr>
@@ -6193,13 +8808,13 @@
                         </a:spcAft>
                       </a:pPr>
                       <a:r>
-                        <a:rPr sz="1200" b="0" i="0">
+                        <a:rPr sz="900" b="0" i="0">
                           <a:solidFill>
                             <a:srgbClr val="262626"/>
                           </a:solidFill>
                           <a:latin typeface="Times New Roman"/>
                         </a:rPr>
-                        <a:t>Micro-USB data cables (drawer check first)</a:t>
+                        <a:t>Freshness</a:t>
                       </a:r>
                     </a:p>
                   </a:txBody>
@@ -6207,7 +8822,7 @@
                 </a:tc>
                 <a:tc>
                   <a:txBody>
-                    <a:bodyPr/>
+                    <a:bodyPr wrap="square"/>
                     <a:lstStyle/>
                     <a:p>
                       <a:pPr>
@@ -6216,13 +8831,13 @@
                         </a:spcAft>
                       </a:pPr>
                       <a:r>
-                        <a:rPr sz="1200" b="0" i="0">
+                        <a:rPr sz="900" b="0" i="0">
                           <a:solidFill>
                             <a:srgbClr val="262626"/>
                           </a:solidFill>
                           <a:latin typeface="Times New Roman"/>
                         </a:rPr>
-                        <a:t>2</a:t>
+                        <a:t>LIVE · UNCHANGED · STALE · OFFLINE</a:t>
                       </a:r>
                     </a:p>
                   </a:txBody>
@@ -6230,7 +8845,7 @@
                 </a:tc>
                 <a:tc>
                   <a:txBody>
-                    <a:bodyPr/>
+                    <a:bodyPr wrap="square"/>
                     <a:lstStyle/>
                     <a:p>
                       <a:pPr>
@@ -6239,21 +8854,28 @@
                         </a:spcAft>
                       </a:pPr>
                       <a:r>
-                        <a:rPr sz="1200" b="0" i="0">
+                        <a:rPr sz="900" b="0" i="0">
                           <a:solidFill>
                             <a:srgbClr val="262626"/>
                           </a:solidFill>
                           <a:latin typeface="Times New Roman"/>
                         </a:rPr>
-                        <a:t>0–300</a:t>
+                        <a:t>shown on screen</a:t>
                       </a:r>
                     </a:p>
                   </a:txBody>
                   <a:tcPr/>
                 </a:tc>
+                <a:extLst>
+                  <a:ext uri="{0D108BD9-81ED-4DB2-BD59-A6C34878D82A}">
+                    <a16:rowId xmlns:a16="http://schemas.microsoft.com/office/drawing/2014/main" val="10003"/>
+                  </a:ext>
+                </a:extLst>
+              </a:tr>
+              <a:tr h="457200">
                 <a:tc>
                   <a:txBody>
-                    <a:bodyPr/>
+                    <a:bodyPr wrap="square"/>
                     <a:lstStyle/>
                     <a:p>
                       <a:pPr>
@@ -6262,23 +8884,21 @@
                         </a:spcAft>
                       </a:pPr>
                       <a:r>
-                        <a:rPr sz="1200" b="0" i="0">
+                        <a:rPr sz="900" b="0" i="0">
                           <a:solidFill>
                             <a:srgbClr val="262626"/>
                           </a:solidFill>
                           <a:latin typeface="Times New Roman"/>
                         </a:rPr>
-                        <a:t>Ordered</a:t>
+                        <a:t>AI</a:t>
                       </a:r>
                     </a:p>
                   </a:txBody>
                   <a:tcPr/>
                 </a:tc>
-              </a:tr>
-              <a:tr h="480060">
                 <a:tc>
                   <a:txBody>
-                    <a:bodyPr/>
+                    <a:bodyPr wrap="square"/>
                     <a:lstStyle/>
                     <a:p>
                       <a:pPr>
@@ -6287,13 +8907,13 @@
                         </a:spcAft>
                       </a:pPr>
                       <a:r>
-                        <a:rPr sz="1200" b="0" i="0">
+                        <a:rPr sz="900" b="0" i="0">
                           <a:solidFill>
                             <a:srgbClr val="262626"/>
                           </a:solidFill>
                           <a:latin typeface="Times New Roman"/>
                         </a:rPr>
-                        <a:t>3</a:t>
+                        <a:t>current packet → reply → grounding verdict</a:t>
                       </a:r>
                     </a:p>
                   </a:txBody>
@@ -6301,7 +8921,7 @@
                 </a:tc>
                 <a:tc>
                   <a:txBody>
-                    <a:bodyPr/>
+                    <a:bodyPr wrap="square"/>
                     <a:lstStyle/>
                     <a:p>
                       <a:pPr>
@@ -6310,21 +8930,28 @@
                         </a:spcAft>
                       </a:pPr>
                       <a:r>
-                        <a:rPr sz="1200" b="0" i="0">
+                        <a:rPr sz="900" b="0" i="0">
                           <a:solidFill>
                             <a:srgbClr val="262626"/>
                           </a:solidFill>
                           <a:latin typeface="Times New Roman"/>
                         </a:rPr>
-                        <a:t>830-pt breadboard + M-M jumper kit</a:t>
+                        <a:t>PASS required for evidence</a:t>
                       </a:r>
                     </a:p>
                   </a:txBody>
                   <a:tcPr/>
                 </a:tc>
+                <a:extLst>
+                  <a:ext uri="{0D108BD9-81ED-4DB2-BD59-A6C34878D82A}">
+                    <a16:rowId xmlns:a16="http://schemas.microsoft.com/office/drawing/2014/main" val="10004"/>
+                  </a:ext>
+                </a:extLst>
+              </a:tr>
+              <a:tr h="457200">
                 <a:tc>
                   <a:txBody>
-                    <a:bodyPr/>
+                    <a:bodyPr wrap="square"/>
                     <a:lstStyle/>
                     <a:p>
                       <a:pPr>
@@ -6333,13 +8960,13 @@
                         </a:spcAft>
                       </a:pPr>
                       <a:r>
-                        <a:rPr sz="1200" b="0" i="0">
+                        <a:rPr sz="900" b="0" i="0">
                           <a:solidFill>
                             <a:srgbClr val="262626"/>
                           </a:solidFill>
                           <a:latin typeface="Times New Roman"/>
                         </a:rPr>
-                        <a:t>1</a:t>
+                        <a:t>Fallback</a:t>
                       </a:r>
                     </a:p>
                   </a:txBody>
@@ -6347,7 +8974,7 @@
                 </a:tc>
                 <a:tc>
                   <a:txBody>
-                    <a:bodyPr/>
+                    <a:bodyPr wrap="square"/>
                     <a:lstStyle/>
                     <a:p>
                       <a:pPr>
@@ -6356,13 +8983,13 @@
                         </a:spcAft>
                       </a:pPr>
                       <a:r>
-                        <a:rPr sz="1200" b="0" i="0">
+                        <a:rPr sz="900" b="0" i="0">
                           <a:solidFill>
                             <a:srgbClr val="262626"/>
                           </a:solidFill>
                           <a:latin typeface="Times New Roman"/>
                         </a:rPr>
-                        <a:t>499</a:t>
+                        <a:t>run Lane B; never invent Band frames</a:t>
                       </a:r>
                     </a:p>
                   </a:txBody>
@@ -6370,7 +8997,7 @@
                 </a:tc>
                 <a:tc>
                   <a:txBody>
-                    <a:bodyPr/>
+                    <a:bodyPr wrap="square"/>
                     <a:lstStyle/>
                     <a:p>
                       <a:pPr>
@@ -6379,23 +9006,28 @@
                         </a:spcAft>
                       </a:pPr>
                       <a:r>
-                        <a:rPr sz="1200" b="0" i="0">
+                        <a:rPr sz="900" b="0" i="0">
                           <a:solidFill>
                             <a:srgbClr val="262626"/>
                           </a:solidFill>
                           <a:latin typeface="Times New Roman"/>
                         </a:rPr>
-                        <a:t>Ordered</a:t>
+                        <a:t>operator-ready</a:t>
                       </a:r>
                     </a:p>
                   </a:txBody>
                   <a:tcPr/>
                 </a:tc>
+                <a:extLst>
+                  <a:ext uri="{0D108BD9-81ED-4DB2-BD59-A6C34878D82A}">
+                    <a16:rowId xmlns:a16="http://schemas.microsoft.com/office/drawing/2014/main" val="10005"/>
+                  </a:ext>
+                </a:extLst>
               </a:tr>
-              <a:tr h="480060">
+              <a:tr h="457200">
                 <a:tc>
                   <a:txBody>
-                    <a:bodyPr/>
+                    <a:bodyPr wrap="square"/>
                     <a:lstStyle/>
                     <a:p>
                       <a:pPr>
@@ -6404,13 +9036,13 @@
                         </a:spcAft>
                       </a:pPr>
                       <a:r>
-                        <a:rPr sz="1200" b="0" i="0">
+                        <a:rPr sz="900" b="0" i="0">
                           <a:solidFill>
                             <a:srgbClr val="262626"/>
                           </a:solidFill>
                           <a:latin typeface="Times New Roman"/>
                         </a:rPr>
-                        <a:t>4</a:t>
+                        <a:t>ESP32</a:t>
                       </a:r>
                     </a:p>
                   </a:txBody>
@@ -6418,7 +9050,7 @@
                 </a:tc>
                 <a:tc>
                   <a:txBody>
-                    <a:bodyPr/>
+                    <a:bodyPr wrap="square"/>
                     <a:lstStyle/>
                     <a:p>
                       <a:pPr>
@@ -6427,13 +9059,13 @@
                         </a:spcAft>
                       </a:pPr>
                       <a:r>
-                        <a:rPr sz="1200" b="0" i="0">
+                        <a:rPr sz="900" b="0" i="0">
                           <a:solidFill>
                             <a:srgbClr val="262626"/>
                           </a:solidFill>
                           <a:latin typeface="Times New Roman"/>
                         </a:rPr>
-                        <a:t>MPU6050 + HC-SR04 + IR combo (headers soldered)</a:t>
+                        <a:t>Wokwi + BOM + pin plan</a:t>
                       </a:r>
                     </a:p>
                   </a:txBody>
@@ -6441,7 +9073,7 @@
                 </a:tc>
                 <a:tc>
                   <a:txBody>
-                    <a:bodyPr/>
+                    <a:bodyPr wrap="square"/>
                     <a:lstStyle/>
                     <a:p>
                       <a:pPr>
@@ -6450,21 +9082,28 @@
                         </a:spcAft>
                       </a:pPr>
                       <a:r>
-                        <a:rPr sz="1200" b="0" i="0">
+                        <a:rPr sz="900" b="0" i="0">
                           <a:solidFill>
                             <a:srgbClr val="262626"/>
                           </a:solidFill>
                           <a:latin typeface="Times New Roman"/>
                         </a:rPr>
-                        <a:t>1</a:t>
+                        <a:t>design / simulation evidence</a:t>
                       </a:r>
                     </a:p>
                   </a:txBody>
                   <a:tcPr/>
                 </a:tc>
+                <a:extLst>
+                  <a:ext uri="{0D108BD9-81ED-4DB2-BD59-A6C34878D82A}">
+                    <a16:rowId xmlns:a16="http://schemas.microsoft.com/office/drawing/2014/main" val="10006"/>
+                  </a:ext>
+                </a:extLst>
+              </a:tr>
+              <a:tr h="457200">
                 <a:tc>
                   <a:txBody>
-                    <a:bodyPr/>
+                    <a:bodyPr wrap="square"/>
                     <a:lstStyle/>
                     <a:p>
                       <a:pPr>
@@ -6473,13 +9112,13 @@
                         </a:spcAft>
                       </a:pPr>
                       <a:r>
-                        <a:rPr sz="1200" b="0" i="0">
+                        <a:rPr sz="900" b="0" i="0">
                           <a:solidFill>
                             <a:srgbClr val="262626"/>
                           </a:solidFill>
                           <a:latin typeface="Times New Roman"/>
                         </a:rPr>
-                        <a:t>470</a:t>
+                        <a:t>Operator</a:t>
                       </a:r>
                     </a:p>
                   </a:txBody>
@@ -6487,7 +9126,7 @@
                 </a:tc>
                 <a:tc>
                   <a:txBody>
-                    <a:bodyPr/>
+                    <a:bodyPr wrap="square"/>
                     <a:lstStyle/>
                     <a:p>
                       <a:pPr>
@@ -6496,23 +9135,21 @@
                         </a:spcAft>
                       </a:pPr>
                       <a:r>
-                        <a:rPr sz="1200" b="0" i="0">
+                        <a:rPr sz="900" b="0" i="0">
                           <a:solidFill>
                             <a:srgbClr val="262626"/>
                           </a:solidFill>
                           <a:latin typeface="Times New Roman"/>
                         </a:rPr>
-                        <a:t>Ordered</a:t>
+                        <a:t>lane scripts and pre-stage checks</a:t>
                       </a:r>
                     </a:p>
                   </a:txBody>
                   <a:tcPr/>
                 </a:tc>
-              </a:tr>
-              <a:tr h="480060">
                 <a:tc>
                   <a:txBody>
-                    <a:bodyPr/>
+                    <a:bodyPr wrap="square"/>
                     <a:lstStyle/>
                     <a:p>
                       <a:pPr>
@@ -6521,326 +9158,23 @@
                         </a:spcAft>
                       </a:pPr>
                       <a:r>
-                        <a:rPr sz="1200" b="0" i="0">
+                        <a:rPr sz="900" b="0" i="0">
                           <a:solidFill>
                             <a:srgbClr val="262626"/>
                           </a:solidFill>
                           <a:latin typeface="Times New Roman"/>
                         </a:rPr>
-                        <a:t>5</a:t>
+                        <a:t>repeatable</a:t>
                       </a:r>
                     </a:p>
                   </a:txBody>
                   <a:tcPr/>
                 </a:tc>
-                <a:tc>
-                  <a:txBody>
-                    <a:bodyPr/>
-                    <a:lstStyle/>
-                    <a:p>
-                      <a:pPr>
-                        <a:spcAft>
-                          <a:spcPts val="100"/>
-                        </a:spcAft>
-                      </a:pPr>
-                      <a:r>
-                        <a:rPr sz="1200" b="0" i="0">
-                          <a:solidFill>
-                            <a:srgbClr val="262626"/>
-                          </a:solidFill>
-                          <a:latin typeface="Times New Roman"/>
-                        </a:rPr>
-                        <a:t>DHT22 module (built-in pullup)</a:t>
-                      </a:r>
-                    </a:p>
-                  </a:txBody>
-                  <a:tcPr/>
-                </a:tc>
-                <a:tc>
-                  <a:txBody>
-                    <a:bodyPr/>
-                    <a:lstStyle/>
-                    <a:p>
-                      <a:pPr>
-                        <a:spcAft>
-                          <a:spcPts val="100"/>
-                        </a:spcAft>
-                      </a:pPr>
-                      <a:r>
-                        <a:rPr sz="1200" b="0" i="0">
-                          <a:solidFill>
-                            <a:srgbClr val="262626"/>
-                          </a:solidFill>
-                          <a:latin typeface="Times New Roman"/>
-                        </a:rPr>
-                        <a:t>1</a:t>
-                      </a:r>
-                    </a:p>
-                  </a:txBody>
-                  <a:tcPr/>
-                </a:tc>
-                <a:tc>
-                  <a:txBody>
-                    <a:bodyPr/>
-                    <a:lstStyle/>
-                    <a:p>
-                      <a:pPr>
-                        <a:spcAft>
-                          <a:spcPts val="100"/>
-                        </a:spcAft>
-                      </a:pPr>
-                      <a:r>
-                        <a:rPr sz="1200" b="0" i="0">
-                          <a:solidFill>
-                            <a:srgbClr val="262626"/>
-                          </a:solidFill>
-                          <a:latin typeface="Times New Roman"/>
-                        </a:rPr>
-                        <a:t>309</a:t>
-                      </a:r>
-                    </a:p>
-                  </a:txBody>
-                  <a:tcPr/>
-                </a:tc>
-                <a:tc>
-                  <a:txBody>
-                    <a:bodyPr/>
-                    <a:lstStyle/>
-                    <a:p>
-                      <a:pPr>
-                        <a:spcAft>
-                          <a:spcPts val="100"/>
-                        </a:spcAft>
-                      </a:pPr>
-                      <a:r>
-                        <a:rPr sz="1200" b="0" i="0">
-                          <a:solidFill>
-                            <a:srgbClr val="262626"/>
-                          </a:solidFill>
-                          <a:latin typeface="Times New Roman"/>
-                        </a:rPr>
-                        <a:t>Ordered</a:t>
-                      </a:r>
-                    </a:p>
-                  </a:txBody>
-                  <a:tcPr/>
-                </a:tc>
-              </a:tr>
-              <a:tr h="480060">
-                <a:tc>
-                  <a:txBody>
-                    <a:bodyPr/>
-                    <a:lstStyle/>
-                    <a:p>
-                      <a:pPr>
-                        <a:spcAft>
-                          <a:spcPts val="100"/>
-                        </a:spcAft>
-                      </a:pPr>
-                      <a:r>
-                        <a:rPr sz="1200" b="0" i="0">
-                          <a:solidFill>
-                            <a:srgbClr val="262626"/>
-                          </a:solidFill>
-                          <a:latin typeface="Times New Roman"/>
-                        </a:rPr>
-                        <a:t>6</a:t>
-                      </a:r>
-                    </a:p>
-                  </a:txBody>
-                  <a:tcPr/>
-                </a:tc>
-                <a:tc>
-                  <a:txBody>
-                    <a:bodyPr/>
-                    <a:lstStyle/>
-                    <a:p>
-                      <a:pPr>
-                        <a:spcAft>
-                          <a:spcPts val="100"/>
-                        </a:spcAft>
-                      </a:pPr>
-                      <a:r>
-                        <a:rPr sz="1200" b="0" i="0">
-                          <a:solidFill>
-                            <a:srgbClr val="262626"/>
-                          </a:solidFill>
-                          <a:latin typeface="Times New Roman"/>
-                        </a:rPr>
-                        <a:t>F-F jumper 20-pack + tact buttons + caps + buzzer</a:t>
-                      </a:r>
-                    </a:p>
-                  </a:txBody>
-                  <a:tcPr/>
-                </a:tc>
-                <a:tc>
-                  <a:txBody>
-                    <a:bodyPr/>
-                    <a:lstStyle/>
-                    <a:p>
-                      <a:pPr>
-                        <a:spcAft>
-                          <a:spcPts val="100"/>
-                        </a:spcAft>
-                      </a:pPr>
-                      <a:r>
-                        <a:rPr sz="1200" b="0" i="0">
-                          <a:solidFill>
-                            <a:srgbClr val="262626"/>
-                          </a:solidFill>
-                          <a:latin typeface="Times New Roman"/>
-                        </a:rPr>
-                        <a:t>—</a:t>
-                      </a:r>
-                    </a:p>
-                  </a:txBody>
-                  <a:tcPr/>
-                </a:tc>
-                <a:tc>
-                  <a:txBody>
-                    <a:bodyPr/>
-                    <a:lstStyle/>
-                    <a:p>
-                      <a:pPr>
-                        <a:spcAft>
-                          <a:spcPts val="100"/>
-                        </a:spcAft>
-                      </a:pPr>
-                      <a:r>
-                        <a:rPr sz="1200" b="0" i="0">
-                          <a:solidFill>
-                            <a:srgbClr val="262626"/>
-                          </a:solidFill>
-                          <a:latin typeface="Times New Roman"/>
-                        </a:rPr>
-                        <a:t>205</a:t>
-                      </a:r>
-                    </a:p>
-                  </a:txBody>
-                  <a:tcPr/>
-                </a:tc>
-                <a:tc>
-                  <a:txBody>
-                    <a:bodyPr/>
-                    <a:lstStyle/>
-                    <a:p>
-                      <a:pPr>
-                        <a:spcAft>
-                          <a:spcPts val="100"/>
-                        </a:spcAft>
-                      </a:pPr>
-                      <a:r>
-                        <a:rPr sz="1200" b="0" i="0">
-                          <a:solidFill>
-                            <a:srgbClr val="262626"/>
-                          </a:solidFill>
-                          <a:latin typeface="Times New Roman"/>
-                        </a:rPr>
-                        <a:t>Ordered</a:t>
-                      </a:r>
-                    </a:p>
-                  </a:txBody>
-                  <a:tcPr/>
-                </a:tc>
-              </a:tr>
-              <a:tr h="480060">
-                <a:tc>
-                  <a:txBody>
-                    <a:bodyPr/>
-                    <a:lstStyle/>
-                    <a:p>
-                      <a:pPr>
-                        <a:spcAft>
-                          <a:spcPts val="100"/>
-                        </a:spcAft>
-                      </a:pPr>
-                    </a:p>
-                  </a:txBody>
-                  <a:tcPr/>
-                </a:tc>
-                <a:tc>
-                  <a:txBody>
-                    <a:bodyPr/>
-                    <a:lstStyle/>
-                    <a:p>
-                      <a:pPr>
-                        <a:spcAft>
-                          <a:spcPts val="100"/>
-                        </a:spcAft>
-                      </a:pPr>
-                      <a:r>
-                        <a:rPr sz="1200" b="0" i="0">
-                          <a:solidFill>
-                            <a:srgbClr val="262626"/>
-                          </a:solidFill>
-                          <a:latin typeface="Times New Roman"/>
-                        </a:rPr>
-                        <a:t>TIER-A TOTAL</a:t>
-                      </a:r>
-                    </a:p>
-                  </a:txBody>
-                  <a:tcPr/>
-                </a:tc>
-                <a:tc>
-                  <a:txBody>
-                    <a:bodyPr/>
-                    <a:lstStyle/>
-                    <a:p>
-                      <a:pPr>
-                        <a:spcAft>
-                          <a:spcPts val="100"/>
-                        </a:spcAft>
-                      </a:pPr>
-                    </a:p>
-                  </a:txBody>
-                  <a:tcPr/>
-                </a:tc>
-                <a:tc>
-                  <a:txBody>
-                    <a:bodyPr/>
-                    <a:lstStyle/>
-                    <a:p>
-                      <a:pPr>
-                        <a:spcAft>
-                          <a:spcPts val="100"/>
-                        </a:spcAft>
-                      </a:pPr>
-                      <a:r>
-                        <a:rPr sz="1200" b="0" i="0">
-                          <a:solidFill>
-                            <a:srgbClr val="262626"/>
-                          </a:solidFill>
-                          <a:latin typeface="Times New Roman"/>
-                        </a:rPr>
-                        <a:t>≈1,950</a:t>
-                      </a:r>
-                    </a:p>
-                  </a:txBody>
-                  <a:tcPr/>
-                </a:tc>
-                <a:tc>
-                  <a:txBody>
-                    <a:bodyPr/>
-                    <a:lstStyle/>
-                    <a:p>
-                      <a:pPr>
-                        <a:spcAft>
-                          <a:spcPts val="100"/>
-                        </a:spcAft>
-                      </a:pPr>
-                      <a:r>
-                        <a:rPr sz="1200" b="0" i="0">
-                          <a:solidFill>
-                            <a:srgbClr val="262626"/>
-                          </a:solidFill>
-                          <a:latin typeface="Times New Roman"/>
-                        </a:rPr>
-                        <a:t>Design-complete</a:t>
-                      </a:r>
-                    </a:p>
-                  </a:txBody>
-                  <a:tcPr/>
-                </a:tc>
+                <a:extLst>
+                  <a:ext uri="{0D108BD9-81ED-4DB2-BD59-A6C34878D82A}">
+                    <a16:rowId xmlns:a16="http://schemas.microsoft.com/office/drawing/2014/main" val="10007"/>
+                  </a:ext>
+                </a:extLst>
               </a:tr>
             </a:tbl>
           </a:graphicData>
@@ -6854,8 +9188,8 @@
         </p:nvSpPr>
         <p:spPr>
           <a:xfrm>
-            <a:off x="274320" y="5074920"/>
-            <a:ext cx="11612880" cy="1280160"/>
+            <a:off x="7528560" y="1012954"/>
+            <a:ext cx="4389120" cy="4832092"/>
           </a:xfrm>
           <a:prstGeom prst="rect">
             <a:avLst/>
@@ -6868,876 +9202,156 @@
           </a:bodyPr>
           <a:lstStyle/>
           <a:p>
-            <a:pPr algn="l">
-              <a:spcAft>
-                <a:spcPts val="600"/>
-              </a:spcAft>
-            </a:pPr>
-            <a:r>
-              <a:rPr sz="1300" b="1" i="0">
-                <a:solidFill>
-                  <a:srgbClr val="262626"/>
-                </a:solidFill>
-                <a:latin typeface="Times New Roman"/>
-              </a:rPr>
-              <a:t>PIN PLAN — I2C SDA=21 / SCL=22 (MPU 0x68) · DHT=GPIO13 · sonar Trig=26 / Echo=25 via 1k+2k2 divider · button=GPIO4 · buzzer=GPIO17 · LED=GPIO16.</a:t>
-            </a:r>
-          </a:p>
-          <a:p>
-            <a:pPr algn="l">
-              <a:spcAft>
-                <a:spcPts val="600"/>
-              </a:spcAft>
-            </a:pPr>
-            <a:r>
-              <a:t>Honest status: Wokwi browser sim + native FreeRTOS node (keyboard-driven) ✓ · physical units next week; HR/SpO2 via wearable bridge is a timeboxed stretch goal.</a:t>
-            </a:r>
-          </a:p>
-        </p:txBody>
-      </p:sp>
-    </p:spTree>
-  </p:cSld>
-  <p:clrMapOvr>
-    <a:masterClrMapping/>
-  </p:clrMapOvr>
-</p:sld>
-</file>
-
-<file path=ppt/slides/slide8.xml><?xml version="1.0" encoding="utf-8"?>
-<p:sld xmlns:a="http://schemas.openxmlformats.org/drawingml/2006/main" xmlns:p="http://schemas.openxmlformats.org/presentationml/2006/main" xmlns:r="http://schemas.openxmlformats.org/officeDocument/2006/relationships">
-  <p:cSld>
-    <p:spTree>
-      <p:nvGrpSpPr>
-        <p:cNvPr id="1" name=""/>
-        <p:cNvGrpSpPr/>
-        <p:nvPr/>
-      </p:nvGrpSpPr>
-      <p:grpSpPr/>
-      <p:sp>
-        <p:nvSpPr>
-          <p:cNvPr id="2" name="Title 1"/>
-          <p:cNvSpPr>
-            <a:spLocks noGrp="1"/>
-          </p:cNvSpPr>
-          <p:nvPr>
-            <p:ph type="title"/>
-          </p:nvPr>
+            <a:r>
+              <a:t>Run order</a:t>
+            </a:r>
+          </a:p>
+          <a:p>
+            <a:r>
+              <a:t>1. Launch KINETIQ_DEMO.bat [6] → Opens receiver (:8000) and Web Mirror (:8777).</a:t>
+            </a:r>
+          </a:p>
+          <a:p>
+            <a:r>
+              <a:t>2. Step in front of the camera mirror → after 5s, mirror automatically greets you with live stats and advice.</a:t>
+            </a:r>
+          </a:p>
+          <a:p>
+            <a:r>
+              <a:t>3. Switch to FreeRTOS Mode via the in-app HUD button → show RTOS task concurrency and deadline logging.</a:t>
+            </a:r>
+          </a:p>
+          <a:p>
+            <a:r>
+              <a:t>4. Ask conversational questions (voice/text) → demonstrate ChatGPT-like health advice with grounding [PASS].</a:t>
+            </a:r>
+          </a:p>
+          <a:p/>
+          <a:p>
+            <a:r>
+              <a:t>Key points to say aloud</a:t>
+            </a:r>
+          </a:p>
+          <a:p>
+            <a:r>
+              <a:t>Band 6 provides real wrist vitals; FreeRTOS provides syllabus kernel proof; mirror provides conversational wellness assistance.</a:t>
+            </a:r>
+          </a:p>
+          <a:p/>
+          <a:p>
+            <a:r>
+              <a:t>Launcher</a:t>
+            </a:r>
+          </a:p>
+          <a:p>
+            <a:r>
+              <a:t>KINETIQ_DEMO.bat (Menu option 6: one-click stage launch)</a:t>
+            </a:r>
+          </a:p>
+        </p:txBody>
+      </p:sp>
+      <p:sp>
+        <p:nvSpPr>
+          <p:cNvPr id="9" name="TextBox 8">
+            <a:extLst>
+              <a:ext uri="{FF2B5EF4-FFF2-40B4-BE49-F238E27FC236}">
+                <a16:creationId xmlns:a16="http://schemas.microsoft.com/office/drawing/2014/main" id="{1E7E6B6A-8E73-0A4D-2C0C-F62082B16903}"/>
+              </a:ext>
+            </a:extLst>
+          </p:cNvPr>
+          <p:cNvSpPr txBox="1"/>
+          <p:nvPr/>
         </p:nvSpPr>
         <p:spPr>
           <a:xfrm>
-            <a:off x="274320" y="137160"/>
-            <a:ext cx="10881360" cy="777240"/>
+            <a:off x="0" y="6396335"/>
+            <a:ext cx="7686676" cy="461665"/>
           </a:xfrm>
+          <a:custGeom>
+            <a:avLst/>
+            <a:gdLst>
+              <a:gd name="connsiteX0" fmla="*/ 0 w 6172200"/>
+              <a:gd name="connsiteY0" fmla="*/ 0 h 369332"/>
+              <a:gd name="connsiteX1" fmla="*/ 6172200 w 6172200"/>
+              <a:gd name="connsiteY1" fmla="*/ 0 h 369332"/>
+              <a:gd name="connsiteX2" fmla="*/ 6172200 w 6172200"/>
+              <a:gd name="connsiteY2" fmla="*/ 369332 h 369332"/>
+              <a:gd name="connsiteX3" fmla="*/ 0 w 6172200"/>
+              <a:gd name="connsiteY3" fmla="*/ 369332 h 369332"/>
+              <a:gd name="connsiteX4" fmla="*/ 0 w 6172200"/>
+              <a:gd name="connsiteY4" fmla="*/ 0 h 369332"/>
+              <a:gd name="connsiteX0" fmla="*/ 0 w 6172200"/>
+              <a:gd name="connsiteY0" fmla="*/ 0 h 369332"/>
+              <a:gd name="connsiteX1" fmla="*/ 5791200 w 6172200"/>
+              <a:gd name="connsiteY1" fmla="*/ 0 h 369332"/>
+              <a:gd name="connsiteX2" fmla="*/ 6172200 w 6172200"/>
+              <a:gd name="connsiteY2" fmla="*/ 369332 h 369332"/>
+              <a:gd name="connsiteX3" fmla="*/ 0 w 6172200"/>
+              <a:gd name="connsiteY3" fmla="*/ 369332 h 369332"/>
+              <a:gd name="connsiteX4" fmla="*/ 0 w 6172200"/>
+              <a:gd name="connsiteY4" fmla="*/ 0 h 369332"/>
+            </a:gdLst>
+            <a:ahLst/>
+            <a:cxnLst>
+              <a:cxn ang="0">
+                <a:pos x="connsiteX0" y="connsiteY0"/>
+              </a:cxn>
+              <a:cxn ang="0">
+                <a:pos x="connsiteX1" y="connsiteY1"/>
+              </a:cxn>
+              <a:cxn ang="0">
+                <a:pos x="connsiteX2" y="connsiteY2"/>
+              </a:cxn>
+              <a:cxn ang="0">
+                <a:pos x="connsiteX3" y="connsiteY3"/>
+              </a:cxn>
+              <a:cxn ang="0">
+                <a:pos x="connsiteX4" y="connsiteY4"/>
+              </a:cxn>
+            </a:cxnLst>
+            <a:rect l="l" t="t" r="r" b="b"/>
+            <a:pathLst>
+              <a:path w="6172200" h="369332">
+                <a:moveTo>
+                  <a:pt x="0" y="0"/>
+                </a:moveTo>
+                <a:lnTo>
+                  <a:pt x="5791200" y="0"/>
+                </a:lnTo>
+                <a:lnTo>
+                  <a:pt x="6172200" y="369332"/>
+                </a:lnTo>
+                <a:lnTo>
+                  <a:pt x="0" y="369332"/>
+                </a:lnTo>
+                <a:lnTo>
+                  <a:pt x="0" y="0"/>
+                </a:lnTo>
+                <a:close/>
+              </a:path>
+            </a:pathLst>
+          </a:custGeom>
+          <a:solidFill>
+            <a:schemeClr val="accent1">
+              <a:lumMod val="75000"/>
+            </a:schemeClr>
+          </a:solidFill>
         </p:spPr>
         <p:txBody>
-          <a:bodyPr wrap="square"/>
-          <a:lstStyle/>
-          <a:p>
-            <a:pPr algn="l"/>
-            <a:r>
-              <a:rPr sz="4000" b="1" i="0">
-                <a:solidFill>
-                  <a:srgbClr val="FF0000"/>
-                </a:solidFill>
-                <a:latin typeface="Times New Roman"/>
-              </a:rPr>
-              <a:t>ROADMAP &amp; THANK YOU</a:t>
-            </a:r>
-          </a:p>
-        </p:txBody>
-      </p:sp>
-      <p:pic>
-        <p:nvPicPr>
-          <p:cNvPr id="3" name="Picture 2" descr="saintgits_logo.png"/>
-          <p:cNvPicPr>
-            <a:picLocks noChangeAspect="1"/>
-          </p:cNvPicPr>
-          <p:nvPr/>
-        </p:nvPicPr>
-        <p:blipFill>
-          <a:blip r:embed="rId2"/>
-          <a:stretch>
-            <a:fillRect/>
-          </a:stretch>
-        </p:blipFill>
-        <p:spPr>
-          <a:xfrm>
-            <a:off x="11448288" y="100584"/>
-            <a:ext cx="621792" cy="704088"/>
-          </a:xfrm>
-          <a:prstGeom prst="rect">
-            <a:avLst/>
-          </a:prstGeom>
-        </p:spPr>
-      </p:pic>
-      <p:sp>
-        <p:nvSpPr>
-          <p:cNvPr id="4" name="TextBox 3"/>
-          <p:cNvSpPr txBox="1"/>
-          <p:nvPr/>
-        </p:nvSpPr>
-        <p:spPr>
-          <a:xfrm>
-            <a:off x="0" y="6510528"/>
-            <a:ext cx="7690104" cy="338328"/>
-          </a:xfrm>
-          <a:prstGeom prst="rect">
-            <a:avLst/>
-          </a:prstGeom>
-          <a:noFill/>
-        </p:spPr>
-        <p:txBody>
-          <a:bodyPr wrap="square">
+          <a:bodyPr wrap="square" rtlCol="0">
             <a:spAutoFit/>
           </a:bodyPr>
           <a:lstStyle/>
           <a:p>
-            <a:pPr algn="l">
-              <a:spcAft>
-                <a:spcPts val="600"/>
-              </a:spcAft>
-            </a:pPr>
-            <a:r>
-              <a:rPr sz="1600" b="0" i="0">
+            <a:pPr algn="ctr"/>
+            <a:r>
+              <a:rPr lang="en-IN" sz="2400" spc="600" dirty="0">
                 <a:solidFill>
-                  <a:srgbClr val="262626"/>
+                  <a:schemeClr val="bg1"/>
                 </a:solidFill>
-                <a:latin typeface="Times New Roman"/>
+                <a:latin typeface="Gill Sans MT" panose="020B0502020104020203" pitchFamily="34" charset="0"/>
               </a:rPr>
               <a:t>LEARN . GROW . EXCEL</a:t>
-            </a:r>
-          </a:p>
-        </p:txBody>
-      </p:sp>
-      <p:sp>
-        <p:nvSpPr>
-          <p:cNvPr id="5" name="TextBox 4"/>
-          <p:cNvSpPr txBox="1"/>
-          <p:nvPr/>
-        </p:nvSpPr>
-        <p:spPr>
-          <a:xfrm>
-            <a:off x="7690104" y="6446520"/>
-            <a:ext cx="4498848" cy="338328"/>
-          </a:xfrm>
-          <a:prstGeom prst="rect">
-            <a:avLst/>
-          </a:prstGeom>
-          <a:noFill/>
-        </p:spPr>
-        <p:txBody>
-          <a:bodyPr wrap="square">
-            <a:spAutoFit/>
-          </a:bodyPr>
-          <a:lstStyle/>
-          <a:p>
-            <a:pPr algn="r">
-              <a:spcAft>
-                <a:spcPts val="600"/>
-              </a:spcAft>
-            </a:pPr>
-            <a:r>
-              <a:rPr sz="1200" b="0" i="0">
-                <a:solidFill>
-                  <a:srgbClr val="262626"/>
-                </a:solidFill>
-                <a:latin typeface="Times New Roman"/>
-              </a:rPr>
-              <a:t>SAINTGITS COLLEGE (AUTONOMOUS)</a:t>
-            </a:r>
-          </a:p>
-        </p:txBody>
-      </p:sp>
-      <p:graphicFrame>
-        <p:nvGraphicFramePr>
-          <p:cNvPr id="6" name="Table 5"/>
-          <p:cNvGraphicFramePr>
-            <a:graphicFrameLocks noGrp="1"/>
-          </p:cNvGraphicFramePr>
-          <p:nvPr/>
-        </p:nvGraphicFramePr>
-        <p:xfrm>
-          <a:off x="274320" y="1097280"/>
-          <a:ext cx="6949440" cy="3657600"/>
-        </p:xfrm>
-        <a:graphic>
-          <a:graphicData uri="http://schemas.openxmlformats.org/drawingml/2006/table">
-            <a:tbl>
-              <a:tblPr firstRow="1" bandRow="0" tableStyleId="{5940675A-B579-460E-94D1-542E71E4F335}">
-                <a:tableStyleId>{5C22544A-7EE6-4342-B048-85BDC9FD1C3A}</a:tableStyleId>
-              </a:tblPr>
-              <a:tblGrid>
-                <a:gridCol w="1188720"/>
-                <a:gridCol w="3931920"/>
-                <a:gridCol w="1828800"/>
-              </a:tblGrid>
-              <a:tr h="457200">
-                <a:tc>
-                  <a:txBody>
-                    <a:bodyPr/>
-                    <a:lstStyle/>
-                    <a:p>
-                      <a:pPr>
-                        <a:spcAft>
-                          <a:spcPts val="100"/>
-                        </a:spcAft>
-                      </a:pPr>
-                      <a:r>
-                        <a:rPr sz="1300" b="1" i="0">
-                          <a:solidFill>
-                            <a:srgbClr val="FF0000"/>
-                          </a:solidFill>
-                          <a:latin typeface="Times New Roman"/>
-                        </a:rPr>
-                        <a:t>DAY</a:t>
-                      </a:r>
-                    </a:p>
-                  </a:txBody>
-                  <a:tcPr>
-                    <a:solidFill>
-                      <a:srgbClr val="D9D9D9"/>
-                    </a:solidFill>
-                  </a:tcPr>
-                </a:tc>
-                <a:tc>
-                  <a:txBody>
-                    <a:bodyPr/>
-                    <a:lstStyle/>
-                    <a:p>
-                      <a:pPr>
-                        <a:spcAft>
-                          <a:spcPts val="100"/>
-                        </a:spcAft>
-                      </a:pPr>
-                      <a:r>
-                        <a:rPr sz="1300" b="1" i="0">
-                          <a:solidFill>
-                            <a:srgbClr val="FF0000"/>
-                          </a:solidFill>
-                          <a:latin typeface="Times New Roman"/>
-                        </a:rPr>
-                        <a:t>GATE</a:t>
-                      </a:r>
-                    </a:p>
-                  </a:txBody>
-                  <a:tcPr>
-                    <a:solidFill>
-                      <a:srgbClr val="D9D9D9"/>
-                    </a:solidFill>
-                  </a:tcPr>
-                </a:tc>
-                <a:tc>
-                  <a:txBody>
-                    <a:bodyPr/>
-                    <a:lstStyle/>
-                    <a:p>
-                      <a:pPr>
-                        <a:spcAft>
-                          <a:spcPts val="100"/>
-                        </a:spcAft>
-                      </a:pPr>
-                      <a:r>
-                        <a:rPr sz="1300" b="1" i="0">
-                          <a:solidFill>
-                            <a:srgbClr val="FF0000"/>
-                          </a:solidFill>
-                          <a:latin typeface="Times New Roman"/>
-                        </a:rPr>
-                        <a:t>STATUS</a:t>
-                      </a:r>
-                    </a:p>
-                  </a:txBody>
-                  <a:tcPr>
-                    <a:solidFill>
-                      <a:srgbClr val="D9D9D9"/>
-                    </a:solidFill>
-                  </a:tcPr>
-                </a:tc>
-              </a:tr>
-              <a:tr h="457200">
-                <a:tc>
-                  <a:txBody>
-                    <a:bodyPr/>
-                    <a:lstStyle/>
-                    <a:p>
-                      <a:pPr>
-                        <a:spcAft>
-                          <a:spcPts val="100"/>
-                        </a:spcAft>
-                      </a:pPr>
-                      <a:r>
-                        <a:rPr sz="1200" b="0" i="0">
-                          <a:solidFill>
-                            <a:srgbClr val="262626"/>
-                          </a:solidFill>
-                          <a:latin typeface="Times New Roman"/>
-                        </a:rPr>
-                        <a:t>12 Oct</a:t>
-                      </a:r>
-                    </a:p>
-                  </a:txBody>
-                  <a:tcPr/>
-                </a:tc>
-                <a:tc>
-                  <a:txBody>
-                    <a:bodyPr/>
-                    <a:lstStyle/>
-                    <a:p>
-                      <a:pPr>
-                        <a:spcAft>
-                          <a:spcPts val="100"/>
-                        </a:spcAft>
-                      </a:pPr>
-                      <a:r>
-                        <a:rPr sz="1200" b="0" i="0">
-                          <a:solidFill>
-                            <a:srgbClr val="262626"/>
-                          </a:solidFill>
-                          <a:latin typeface="Times New Roman"/>
-                        </a:rPr>
-                        <a:t>Idea confirmed · order placed · Wokwi blink tonight</a:t>
-                      </a:r>
-                    </a:p>
-                  </a:txBody>
-                  <a:tcPr/>
-                </a:tc>
-                <a:tc>
-                  <a:txBody>
-                    <a:bodyPr/>
-                    <a:lstStyle/>
-                    <a:p>
-                      <a:pPr>
-                        <a:spcAft>
-                          <a:spcPts val="100"/>
-                        </a:spcAft>
-                      </a:pPr>
-                      <a:r>
-                        <a:rPr sz="1200" b="0" i="0">
-                          <a:solidFill>
-                            <a:srgbClr val="262626"/>
-                          </a:solidFill>
-                          <a:latin typeface="Times New Roman"/>
-                        </a:rPr>
-                        <a:t>✓ done</a:t>
-                      </a:r>
-                    </a:p>
-                  </a:txBody>
-                  <a:tcPr/>
-                </a:tc>
-              </a:tr>
-              <a:tr h="457200">
-                <a:tc>
-                  <a:txBody>
-                    <a:bodyPr/>
-                    <a:lstStyle/>
-                    <a:p>
-                      <a:pPr>
-                        <a:spcAft>
-                          <a:spcPts val="100"/>
-                        </a:spcAft>
-                      </a:pPr>
-                      <a:r>
-                        <a:rPr sz="1200" b="0" i="0">
-                          <a:solidFill>
-                            <a:srgbClr val="262626"/>
-                          </a:solidFill>
-                          <a:latin typeface="Times New Roman"/>
-                        </a:rPr>
-                        <a:t>13 Oct</a:t>
-                      </a:r>
-                    </a:p>
-                  </a:txBody>
-                  <a:tcPr/>
-                </a:tc>
-                <a:tc>
-                  <a:txBody>
-                    <a:bodyPr/>
-                    <a:lstStyle/>
-                    <a:p>
-                      <a:pPr>
-                        <a:spcAft>
-                          <a:spcPts val="100"/>
-                        </a:spcAft>
-                      </a:pPr>
-                      <a:r>
-                        <a:rPr sz="1200" b="0" i="0">
-                          <a:solidFill>
-                            <a:srgbClr val="262626"/>
-                          </a:solidFill>
-                          <a:latin typeface="Times New Roman"/>
-                        </a:rPr>
-                        <a:t>Firmware hardware-agnostic · bridge · backup video</a:t>
-                      </a:r>
-                    </a:p>
-                  </a:txBody>
-                  <a:tcPr/>
-                </a:tc>
-                <a:tc>
-                  <a:txBody>
-                    <a:bodyPr/>
-                    <a:lstStyle/>
-                    <a:p>
-                      <a:pPr>
-                        <a:spcAft>
-                          <a:spcPts val="100"/>
-                        </a:spcAft>
-                      </a:pPr>
-                      <a:r>
-                        <a:rPr sz="1200" b="0" i="0">
-                          <a:solidFill>
-                            <a:srgbClr val="262626"/>
-                          </a:solidFill>
-                          <a:latin typeface="Times New Roman"/>
-                        </a:rPr>
-                        <a:t>✓ done</a:t>
-                      </a:r>
-                    </a:p>
-                  </a:txBody>
-                  <a:tcPr/>
-                </a:tc>
-              </a:tr>
-              <a:tr h="457200">
-                <a:tc>
-                  <a:txBody>
-                    <a:bodyPr/>
-                    <a:lstStyle/>
-                    <a:p>
-                      <a:pPr>
-                        <a:spcAft>
-                          <a:spcPts val="100"/>
-                        </a:spcAft>
-                      </a:pPr>
-                      <a:r>
-                        <a:rPr sz="1200" b="0" i="0">
-                          <a:solidFill>
-                            <a:srgbClr val="262626"/>
-                          </a:solidFill>
-                          <a:latin typeface="Times New Roman"/>
-                        </a:rPr>
-                        <a:t>14–15</a:t>
-                      </a:r>
-                    </a:p>
-                  </a:txBody>
-                  <a:tcPr/>
-                </a:tc>
-                <a:tc>
-                  <a:txBody>
-                    <a:bodyPr/>
-                    <a:lstStyle/>
-                    <a:p>
-                      <a:pPr>
-                        <a:spcAft>
-                          <a:spcPts val="100"/>
-                        </a:spcAft>
-                      </a:pPr>
-                      <a:r>
-                        <a:rPr sz="1200" b="0" i="0">
-                          <a:solidFill>
-                            <a:srgbClr val="262626"/>
-                          </a:solidFill>
-                          <a:latin typeface="Times New Roman"/>
-                        </a:rPr>
-                        <a:t>Board arrives · serial JSON to dashboard</a:t>
-                      </a:r>
-                    </a:p>
-                  </a:txBody>
-                  <a:tcPr/>
-                </a:tc>
-                <a:tc>
-                  <a:txBody>
-                    <a:bodyPr/>
-                    <a:lstStyle/>
-                    <a:p>
-                      <a:pPr>
-                        <a:spcAft>
-                          <a:spcPts val="100"/>
-                        </a:spcAft>
-                      </a:pPr>
-                      <a:r>
-                        <a:rPr sz="1200" b="0" i="0">
-                          <a:solidFill>
-                            <a:srgbClr val="262626"/>
-                          </a:solidFill>
-                          <a:latin typeface="Times New Roman"/>
-                        </a:rPr>
-                        <a:t>→ next</a:t>
-                      </a:r>
-                    </a:p>
-                  </a:txBody>
-                  <a:tcPr/>
-                </a:tc>
-              </a:tr>
-              <a:tr h="457200">
-                <a:tc>
-                  <a:txBody>
-                    <a:bodyPr/>
-                    <a:lstStyle/>
-                    <a:p>
-                      <a:pPr>
-                        <a:spcAft>
-                          <a:spcPts val="100"/>
-                        </a:spcAft>
-                      </a:pPr>
-                      <a:r>
-                        <a:rPr sz="1200" b="0" i="0">
-                          <a:solidFill>
-                            <a:srgbClr val="262626"/>
-                          </a:solidFill>
-                          <a:latin typeface="Times New Roman"/>
-                        </a:rPr>
-                        <a:t>16</a:t>
-                      </a:r>
-                    </a:p>
-                  </a:txBody>
-                  <a:tcPr/>
-                </a:tc>
-                <a:tc>
-                  <a:txBody>
-                    <a:bodyPr/>
-                    <a:lstStyle/>
-                    <a:p>
-                      <a:pPr>
-                        <a:spcAft>
-                          <a:spcPts val="100"/>
-                        </a:spcAft>
-                      </a:pPr>
-                      <a:r>
-                        <a:rPr sz="1200" b="0" i="0">
-                          <a:solidFill>
-                            <a:srgbClr val="262626"/>
-                          </a:solidFill>
-                          <a:latin typeface="Times New Roman"/>
-                        </a:rPr>
-                        <a:t>I2C sensors live · figures + wiring</a:t>
-                      </a:r>
-                    </a:p>
-                  </a:txBody>
-                  <a:tcPr/>
-                </a:tc>
-                <a:tc>
-                  <a:txBody>
-                    <a:bodyPr/>
-                    <a:lstStyle/>
-                    <a:p>
-                      <a:pPr>
-                        <a:spcAft>
-                          <a:spcPts val="100"/>
-                        </a:spcAft>
-                      </a:pPr>
-                      <a:r>
-                        <a:rPr sz="1200" b="0" i="0">
-                          <a:solidFill>
-                            <a:srgbClr val="262626"/>
-                          </a:solidFill>
-                          <a:latin typeface="Times New Roman"/>
-                        </a:rPr>
-                        <a:t>→ next</a:t>
-                      </a:r>
-                    </a:p>
-                  </a:txBody>
-                  <a:tcPr/>
-                </a:tc>
-              </a:tr>
-              <a:tr h="457200">
-                <a:tc>
-                  <a:txBody>
-                    <a:bodyPr/>
-                    <a:lstStyle/>
-                    <a:p>
-                      <a:pPr>
-                        <a:spcAft>
-                          <a:spcPts val="100"/>
-                        </a:spcAft>
-                      </a:pPr>
-                      <a:r>
-                        <a:rPr sz="1200" b="0" i="0">
-                          <a:solidFill>
-                            <a:srgbClr val="262626"/>
-                          </a:solidFill>
-                          <a:latin typeface="Times New Roman"/>
-                        </a:rPr>
-                        <a:t>17–18</a:t>
-                      </a:r>
-                    </a:p>
-                  </a:txBody>
-                  <a:tcPr/>
-                </a:tc>
-                <a:tc>
-                  <a:txBody>
-                    <a:bodyPr/>
-                    <a:lstStyle/>
-                    <a:p>
-                      <a:pPr>
-                        <a:spcAft>
-                          <a:spcPts val="100"/>
-                        </a:spcAft>
-                      </a:pPr>
-                      <a:r>
-                        <a:rPr sz="1200" b="0" i="0">
-                          <a:solidFill>
-                            <a:srgbClr val="262626"/>
-                          </a:solidFill>
-                          <a:latin typeface="Times New Roman"/>
-                        </a:rPr>
-                        <a:t>WiFi layer (soft-AP fallback ready)</a:t>
-                      </a:r>
-                    </a:p>
-                  </a:txBody>
-                  <a:tcPr/>
-                </a:tc>
-                <a:tc>
-                  <a:txBody>
-                    <a:bodyPr/>
-                    <a:lstStyle/>
-                    <a:p>
-                      <a:pPr>
-                        <a:spcAft>
-                          <a:spcPts val="100"/>
-                        </a:spcAft>
-                      </a:pPr>
-                      <a:r>
-                        <a:rPr sz="1200" b="0" i="0">
-                          <a:solidFill>
-                            <a:srgbClr val="262626"/>
-                          </a:solidFill>
-                          <a:latin typeface="Times New Roman"/>
-                        </a:rPr>
-                        <a:t>→ next</a:t>
-                      </a:r>
-                    </a:p>
-                  </a:txBody>
-                  <a:tcPr/>
-                </a:tc>
-              </a:tr>
-              <a:tr h="457200">
-                <a:tc>
-                  <a:txBody>
-                    <a:bodyPr/>
-                    <a:lstStyle/>
-                    <a:p>
-                      <a:pPr>
-                        <a:spcAft>
-                          <a:spcPts val="100"/>
-                        </a:spcAft>
-                      </a:pPr>
-                      <a:r>
-                        <a:rPr sz="1200" b="0" i="0">
-                          <a:solidFill>
-                            <a:srgbClr val="262626"/>
-                          </a:solidFill>
-                          <a:latin typeface="Times New Roman"/>
-                        </a:rPr>
-                        <a:t>19–20</a:t>
-                      </a:r>
-                    </a:p>
-                  </a:txBody>
-                  <a:tcPr/>
-                </a:tc>
-                <a:tc>
-                  <a:txBody>
-                    <a:bodyPr/>
-                    <a:lstStyle/>
-                    <a:p>
-                      <a:pPr>
-                        <a:spcAft>
-                          <a:spcPts val="100"/>
-                        </a:spcAft>
-                      </a:pPr>
-                      <a:r>
-                        <a:rPr sz="1200" b="0" i="0">
-                          <a:solidFill>
-                            <a:srgbClr val="262626"/>
-                          </a:solidFill>
-                          <a:latin typeface="Times New Roman"/>
-                        </a:rPr>
-                        <a:t>Audio cut/go · serial demo FROZEN</a:t>
-                      </a:r>
-                    </a:p>
-                  </a:txBody>
-                  <a:tcPr/>
-                </a:tc>
-                <a:tc>
-                  <a:txBody>
-                    <a:bodyPr/>
-                    <a:lstStyle/>
-                    <a:p>
-                      <a:pPr>
-                        <a:spcAft>
-                          <a:spcPts val="100"/>
-                        </a:spcAft>
-                      </a:pPr>
-                      <a:r>
-                        <a:rPr sz="1200" b="0" i="0">
-                          <a:solidFill>
-                            <a:srgbClr val="262626"/>
-                          </a:solidFill>
-                          <a:latin typeface="Times New Roman"/>
-                        </a:rPr>
-                        <a:t>→ next</a:t>
-                      </a:r>
-                    </a:p>
-                  </a:txBody>
-                  <a:tcPr/>
-                </a:tc>
-              </a:tr>
-              <a:tr h="457200">
-                <a:tc>
-                  <a:txBody>
-                    <a:bodyPr/>
-                    <a:lstStyle/>
-                    <a:p>
-                      <a:pPr>
-                        <a:spcAft>
-                          <a:spcPts val="100"/>
-                        </a:spcAft>
-                      </a:pPr>
-                      <a:r>
-                        <a:rPr sz="1200" b="0" i="0">
-                          <a:solidFill>
-                            <a:srgbClr val="262626"/>
-                          </a:solidFill>
-                          <a:latin typeface="Times New Roman"/>
-                        </a:rPr>
-                        <a:t>21–22</a:t>
-                      </a:r>
-                    </a:p>
-                  </a:txBody>
-                  <a:tcPr/>
-                </a:tc>
-                <a:tc>
-                  <a:txBody>
-                    <a:bodyPr/>
-                    <a:lstStyle/>
-                    <a:p>
-                      <a:pPr>
-                        <a:spcAft>
-                          <a:spcPts val="100"/>
-                        </a:spcAft>
-                      </a:pPr>
-                      <a:r>
-                        <a:rPr sz="1200" b="0" i="0">
-                          <a:solidFill>
-                            <a:srgbClr val="262626"/>
-                          </a:solidFill>
-                          <a:latin typeface="Times New Roman"/>
-                        </a:rPr>
-                        <a:t>Report · rehearse · PRESENT</a:t>
-                      </a:r>
-                    </a:p>
-                  </a:txBody>
-                  <a:tcPr/>
-                </a:tc>
-                <a:tc>
-                  <a:txBody>
-                    <a:bodyPr/>
-                    <a:lstStyle/>
-                    <a:p>
-                      <a:pPr>
-                        <a:spcAft>
-                          <a:spcPts val="100"/>
-                        </a:spcAft>
-                      </a:pPr>
-                      <a:r>
-                        <a:rPr sz="1200" b="0" i="0">
-                          <a:solidFill>
-                            <a:srgbClr val="262626"/>
-                          </a:solidFill>
-                          <a:latin typeface="Times New Roman"/>
-                        </a:rPr>
-                        <a:t>→ next</a:t>
-                      </a:r>
-                    </a:p>
-                  </a:txBody>
-                  <a:tcPr/>
-                </a:tc>
-              </a:tr>
-            </a:tbl>
-          </a:graphicData>
-        </a:graphic>
-      </p:graphicFrame>
-      <p:sp>
-        <p:nvSpPr>
-          <p:cNvPr id="7" name="TextBox 6"/>
-          <p:cNvSpPr txBox="1"/>
-          <p:nvPr/>
-        </p:nvSpPr>
-        <p:spPr>
-          <a:xfrm>
-            <a:off x="7498079" y="1097280"/>
-            <a:ext cx="4389120" cy="3657600"/>
-          </a:xfrm>
-          <a:prstGeom prst="rect">
-            <a:avLst/>
-          </a:prstGeom>
-          <a:noFill/>
-        </p:spPr>
-        <p:txBody>
-          <a:bodyPr wrap="square">
-            <a:spAutoFit/>
-          </a:bodyPr>
-          <a:lstStyle/>
-          <a:p>
-            <a:pPr algn="l">
-              <a:spcAft>
-                <a:spcPts val="600"/>
-              </a:spcAft>
-            </a:pPr>
-            <a:r>
-              <a:rPr sz="1500" b="1" i="0">
-                <a:solidFill>
-                  <a:srgbClr val="FF0000"/>
-                </a:solidFill>
-                <a:latin typeface="Times New Roman"/>
-              </a:rPr>
-              <a:t>REFERENCES (MINI)</a:t>
-            </a:r>
-          </a:p>
-          <a:p>
-            <a:pPr algn="l">
-              <a:spcAft>
-                <a:spcPts val="1200"/>
-              </a:spcAft>
-            </a:pPr>
-            <a:r>
-              <a:rPr sz="1300" b="0" i="0">
-                <a:solidFill>
-                  <a:srgbClr val="262626"/>
-                </a:solidFill>
-                <a:latin typeface="Times New Roman"/>
-              </a:rPr>
-              <a:t>Zephyr / FreeRTOS task-queue model · ESP32 DevKit docs · RAG-grounding for sensor-cited answers · MediaPipe pose mesh.</a:t>
-            </a:r>
-          </a:p>
-          <a:p>
-            <a:pPr algn="ctr">
-              <a:spcAft>
-                <a:spcPts val="600"/>
-              </a:spcAft>
-            </a:pPr>
-            <a:r>
-              <a:rPr sz="2200" b="1" i="0">
-                <a:solidFill>
-                  <a:srgbClr val="FF0000"/>
-                </a:solidFill>
-                <a:latin typeface="Times New Roman"/>
-              </a:rPr>
-              <a:t>THANK YOU — Questions?</a:t>
-            </a:r>
-          </a:p>
-          <a:p>
-            <a:pPr algn="ctr">
-              <a:spcAft>
-                <a:spcPts val="600"/>
-              </a:spcAft>
-            </a:pPr>
-            <a:r>
-              <a:rPr sz="1400" b="0" i="0">
-                <a:solidFill>
-                  <a:srgbClr val="262626"/>
-                </a:solidFill>
-                <a:latin typeface="Times New Roman"/>
-              </a:rPr>
-              <a:t>github.com/siddoit/KinetiQ</a:t>
             </a:r>
           </a:p>
         </p:txBody>
